--- a/lecture-3--2026-09-25/lecture3.pptx
+++ b/lecture-3--2026-09-25/lecture3.pptx
@@ -66,16 +66,8 @@
     <p:sldId id="589" r:id="rId57"/>
     <p:sldId id="526" r:id="rId58"/>
     <p:sldId id="527" r:id="rId59"/>
-    <p:sldId id="528" r:id="rId60"/>
     <p:sldId id="529" r:id="rId61"/>
-    <p:sldId id="530" r:id="rId62"/>
-    <p:sldId id="531" r:id="rId63"/>
-    <p:sldId id="532" r:id="rId64"/>
-    <p:sldId id="533" r:id="rId65"/>
-    <p:sldId id="534" r:id="rId66"/>
-    <p:sldId id="535" r:id="rId67"/>
     <p:sldId id="536" r:id="rId68"/>
-    <p:sldId id="537" r:id="rId69"/>
     <p:sldId id="560" r:id="rId70"/>
     <p:sldId id="561" r:id="rId71"/>
     <p:sldId id="562" r:id="rId72"/>
@@ -418,16 +410,8 @@
             <p14:sldId id="589"/>
             <p14:sldId id="526"/>
             <p14:sldId id="527"/>
-            <p14:sldId id="528"/>
             <p14:sldId id="529"/>
-            <p14:sldId id="530"/>
-            <p14:sldId id="531"/>
-            <p14:sldId id="532"/>
-            <p14:sldId id="533"/>
-            <p14:sldId id="534"/>
-            <p14:sldId id="535"/>
             <p14:sldId id="536"/>
-            <p14:sldId id="537"/>
             <p14:sldId id="560"/>
             <p14:sldId id="561"/>
             <p14:sldId id="562"/>
@@ -3807,64 +3791,6 @@
 </p:notes>
 </file>
 
-<file path=ppt/notesSlides/notesSlide48.xml><?xml version="1.0" encoding="utf-8"?>
-<p:notes xmlns:a="http://schemas.openxmlformats.org/drawingml/2006/main" xmlns:r="http://schemas.openxmlformats.org/officeDocument/2006/relationships" xmlns:p="http://schemas.openxmlformats.org/presentationml/2006/main">
-  <p:cSld>
-    <p:spTree>
-      <p:nvGrpSpPr>
-        <p:cNvPr id="1" name=""/>
-        <p:cNvGrpSpPr/>
-        <p:nvPr/>
-      </p:nvGrpSpPr>
-      <p:grpSpPr>
-        <a:xfrm>
-          <a:off x="0" y="0"/>
-          <a:ext cx="0" cy="0"/>
-          <a:chOff x="0" y="0"/>
-          <a:chExt cx="0" cy="0"/>
-        </a:xfrm>
-      </p:grpSpPr>
-      <p:sp>
-        <p:nvSpPr>
-          <p:cNvPr id="2" name="Slide Image Placeholder 1"/>
-          <p:cNvSpPr>
-            <a:spLocks noGrp="1" noRot="1" noChangeAspect="1"/>
-          </p:cNvSpPr>
-          <p:nvPr>
-            <p:ph type="sldImg" idx="2"/>
-          </p:nvPr>
-        </p:nvSpPr>
-        <p:spPr/>
-      </p:sp>
-      <p:sp>
-        <p:nvSpPr>
-          <p:cNvPr id="3" name="Notes Placeholder 2"/>
-          <p:cNvSpPr>
-            <a:spLocks noGrp="1"/>
-          </p:cNvSpPr>
-          <p:nvPr>
-            <p:ph type="body" idx="1"/>
-          </p:nvPr>
-        </p:nvSpPr>
-        <p:spPr/>
-        <p:txBody>
-          <a:bodyPr/>
-          <a:lstStyle/>
-          <a:p>
-            <a:r>
-              <a:t>The three tools are read_file, search and edit. Only edit writes files, and all three receive the workspace root as their first parameter.</a:t>
-            </a:r>
-          </a:p>
-        </p:txBody>
-      </p:sp>
-    </p:spTree>
-  </p:cSld>
-  <p:clrMapOvr>
-    <a:masterClrMapping/>
-  </p:clrMapOvr>
-</p:notes>
-</file>
-
 <file path=ppt/notesSlides/notesSlide49.xml><?xml version="1.0" encoding="utf-8"?>
 <p:notes xmlns:a="http://schemas.openxmlformats.org/drawingml/2006/main" xmlns:r="http://schemas.openxmlformats.org/officeDocument/2006/relationships" xmlns:p="http://schemas.openxmlformats.org/presentationml/2006/main">
   <p:cSld>
@@ -3982,296 +3908,6 @@
 </p:notes>
 </file>
 
-<file path=ppt/notesSlides/notesSlide50.xml><?xml version="1.0" encoding="utf-8"?>
-<p:notes xmlns:a="http://schemas.openxmlformats.org/drawingml/2006/main" xmlns:r="http://schemas.openxmlformats.org/officeDocument/2006/relationships" xmlns:p="http://schemas.openxmlformats.org/presentationml/2006/main">
-  <p:cSld>
-    <p:spTree>
-      <p:nvGrpSpPr>
-        <p:cNvPr id="1" name=""/>
-        <p:cNvGrpSpPr/>
-        <p:nvPr/>
-      </p:nvGrpSpPr>
-      <p:grpSpPr>
-        <a:xfrm>
-          <a:off x="0" y="0"/>
-          <a:ext cx="0" cy="0"/>
-          <a:chOff x="0" y="0"/>
-          <a:chExt cx="0" cy="0"/>
-        </a:xfrm>
-      </p:grpSpPr>
-      <p:sp>
-        <p:nvSpPr>
-          <p:cNvPr id="2" name="Slide Image Placeholder 1"/>
-          <p:cNvSpPr>
-            <a:spLocks noGrp="1" noRot="1" noChangeAspect="1"/>
-          </p:cNvSpPr>
-          <p:nvPr>
-            <p:ph type="sldImg" idx="2"/>
-          </p:nvPr>
-        </p:nvSpPr>
-        <p:spPr/>
-      </p:sp>
-      <p:sp>
-        <p:nvSpPr>
-          <p:cNvPr id="3" name="Notes Placeholder 2"/>
-          <p:cNvSpPr>
-            <a:spLocks noGrp="1"/>
-          </p:cNvSpPr>
-          <p:nvPr>
-            <p:ph type="body" idx="1"/>
-          </p:nvPr>
-        </p:nvSpPr>
-        <p:spPr/>
-        <p:txBody>
-          <a:bodyPr/>
-          <a:lstStyle/>
-          <a:p>
-            <a:r>
-              <a:t>Tools read the run's configuration from the module. A request that names ws fails to bind, because the dispatcher has already supplied that argument.</a:t>
-            </a:r>
-          </a:p>
-        </p:txBody>
-      </p:sp>
-    </p:spTree>
-  </p:cSld>
-  <p:clrMapOvr>
-    <a:masterClrMapping/>
-  </p:clrMapOvr>
-</p:notes>
-</file>
-
-<file path=ppt/notesSlides/notesSlide51.xml><?xml version="1.0" encoding="utf-8"?>
-<p:notes xmlns:a="http://schemas.openxmlformats.org/drawingml/2006/main" xmlns:r="http://schemas.openxmlformats.org/officeDocument/2006/relationships" xmlns:p="http://schemas.openxmlformats.org/presentationml/2006/main">
-  <p:cSld>
-    <p:spTree>
-      <p:nvGrpSpPr>
-        <p:cNvPr id="1" name=""/>
-        <p:cNvGrpSpPr/>
-        <p:nvPr/>
-      </p:nvGrpSpPr>
-      <p:grpSpPr>
-        <a:xfrm>
-          <a:off x="0" y="0"/>
-          <a:ext cx="0" cy="0"/>
-          <a:chOff x="0" y="0"/>
-          <a:chExt cx="0" cy="0"/>
-        </a:xfrm>
-      </p:grpSpPr>
-      <p:sp>
-        <p:nvSpPr>
-          <p:cNvPr id="2" name="Slide Image Placeholder 1"/>
-          <p:cNvSpPr>
-            <a:spLocks noGrp="1" noRot="1" noChangeAspect="1"/>
-          </p:cNvSpPr>
-          <p:nvPr>
-            <p:ph type="sldImg" idx="2"/>
-          </p:nvPr>
-        </p:nvSpPr>
-        <p:spPr/>
-      </p:sp>
-      <p:sp>
-        <p:nvSpPr>
-          <p:cNvPr id="3" name="Notes Placeholder 2"/>
-          <p:cNvSpPr>
-            <a:spLocks noGrp="1"/>
-          </p:cNvSpPr>
-          <p:nvPr>
-            <p:ph type="body" idx="1"/>
-          </p:nvPr>
-        </p:nvSpPr>
-        <p:spPr/>
-        <p:txBody>
-          <a:bodyPr/>
-          <a:lstStyle/>
-          <a:p>
-            <a:r>
-              <a:t>The dispatch cycle finds the requested tool, binds arguments to its parameters, checks the access policy, performs the permitted operation and produces an observation. The dashed branches show refused requests, which also produce observations.</a:t>
-            </a:r>
-          </a:p>
-        </p:txBody>
-      </p:sp>
-    </p:spTree>
-  </p:cSld>
-  <p:clrMapOvr>
-    <a:masterClrMapping/>
-  </p:clrMapOvr>
-</p:notes>
-</file>
-
-<file path=ppt/notesSlides/notesSlide52.xml><?xml version="1.0" encoding="utf-8"?>
-<p:notes xmlns:a="http://schemas.openxmlformats.org/drawingml/2006/main" xmlns:r="http://schemas.openxmlformats.org/officeDocument/2006/relationships" xmlns:p="http://schemas.openxmlformats.org/presentationml/2006/main">
-  <p:cSld>
-    <p:spTree>
-      <p:nvGrpSpPr>
-        <p:cNvPr id="1" name=""/>
-        <p:cNvGrpSpPr/>
-        <p:nvPr/>
-      </p:nvGrpSpPr>
-      <p:grpSpPr>
-        <a:xfrm>
-          <a:off x="0" y="0"/>
-          <a:ext cx="0" cy="0"/>
-          <a:chOff x="0" y="0"/>
-          <a:chExt cx="0" cy="0"/>
-        </a:xfrm>
-      </p:grpSpPr>
-      <p:sp>
-        <p:nvSpPr>
-          <p:cNvPr id="2" name="Slide Image Placeholder 1"/>
-          <p:cNvSpPr>
-            <a:spLocks noGrp="1" noRot="1" noChangeAspect="1"/>
-          </p:cNvSpPr>
-          <p:nvPr>
-            <p:ph type="sldImg" idx="2"/>
-          </p:nvPr>
-        </p:nvSpPr>
-        <p:spPr/>
-      </p:sp>
-      <p:sp>
-        <p:nvSpPr>
-          <p:cNvPr id="3" name="Notes Placeholder 2"/>
-          <p:cNvSpPr>
-            <a:spLocks noGrp="1"/>
-          </p:cNvSpPr>
-          <p:nvPr>
-            <p:ph type="body" idx="1"/>
-          </p:nvPr>
-        </p:nvSpPr>
-        <p:spPr/>
-        <p:txBody>
-          <a:bodyPr/>
-          <a:lstStyle/>
-          <a:p>
-            <a:r>
-              <a:t>Binding checks argument names and the number of arguments. The dispatcher converts unambiguous type mismatches, such as a string supplied where an integer is required. Exceptions that escape the dispatcher end the run and are reserved for unrecoverable failures, such as an unwritable trace.</a:t>
-            </a:r>
-          </a:p>
-        </p:txBody>
-      </p:sp>
-    </p:spTree>
-  </p:cSld>
-  <p:clrMapOvr>
-    <a:masterClrMapping/>
-  </p:clrMapOvr>
-</p:notes>
-</file>
-
-<file path=ppt/notesSlides/notesSlide53.xml><?xml version="1.0" encoding="utf-8"?>
-<p:notes xmlns:a="http://schemas.openxmlformats.org/drawingml/2006/main" xmlns:r="http://schemas.openxmlformats.org/officeDocument/2006/relationships" xmlns:p="http://schemas.openxmlformats.org/presentationml/2006/main">
-  <p:cSld>
-    <p:spTree>
-      <p:nvGrpSpPr>
-        <p:cNvPr id="1" name=""/>
-        <p:cNvGrpSpPr/>
-        <p:nvPr/>
-      </p:nvGrpSpPr>
-      <p:grpSpPr>
-        <a:xfrm>
-          <a:off x="0" y="0"/>
-          <a:ext cx="0" cy="0"/>
-          <a:chOff x="0" y="0"/>
-          <a:chExt cx="0" cy="0"/>
-        </a:xfrm>
-      </p:grpSpPr>
-      <p:sp>
-        <p:nvSpPr>
-          <p:cNvPr id="2" name="Slide Image Placeholder 1"/>
-          <p:cNvSpPr>
-            <a:spLocks noGrp="1" noRot="1" noChangeAspect="1"/>
-          </p:cNvSpPr>
-          <p:nvPr>
-            <p:ph type="sldImg" idx="2"/>
-          </p:nvPr>
-        </p:nvSpPr>
-        <p:spPr/>
-      </p:sp>
-      <p:sp>
-        <p:nvSpPr>
-          <p:cNvPr id="3" name="Notes Placeholder 2"/>
-          <p:cNvSpPr>
-            <a:spLocks noGrp="1"/>
-          </p:cNvSpPr>
-          <p:nvPr>
-            <p:ph type="body" idx="1"/>
-          </p:nvPr>
-        </p:nvSpPr>
-        <p:spPr/>
-        <p:txBody>
-          <a:bodyPr/>
-          <a:lstStyle/>
-          <a:p>
-            <a:r>
-              <a:t>Step 4 is the routing event between the model response and the tool request. It records decision tools and by="model", identifying the selected control location. It does not describe tool execution.</a:t>
-            </a:r>
-          </a:p>
-        </p:txBody>
-      </p:sp>
-    </p:spTree>
-  </p:cSld>
-  <p:clrMapOvr>
-    <a:masterClrMapping/>
-  </p:clrMapOvr>
-</p:notes>
-</file>
-
-<file path=ppt/notesSlides/notesSlide54.xml><?xml version="1.0" encoding="utf-8"?>
-<p:notes xmlns:a="http://schemas.openxmlformats.org/drawingml/2006/main" xmlns:r="http://schemas.openxmlformats.org/officeDocument/2006/relationships" xmlns:p="http://schemas.openxmlformats.org/presentationml/2006/main">
-  <p:cSld>
-    <p:spTree>
-      <p:nvGrpSpPr>
-        <p:cNvPr id="1" name=""/>
-        <p:cNvGrpSpPr/>
-        <p:nvPr/>
-      </p:nvGrpSpPr>
-      <p:grpSpPr>
-        <a:xfrm>
-          <a:off x="0" y="0"/>
-          <a:ext cx="0" cy="0"/>
-          <a:chOff x="0" y="0"/>
-          <a:chExt cx="0" cy="0"/>
-        </a:xfrm>
-      </p:grpSpPr>
-      <p:sp>
-        <p:nvSpPr>
-          <p:cNvPr id="2" name="Slide Image Placeholder 1"/>
-          <p:cNvSpPr>
-            <a:spLocks noGrp="1" noRot="1" noChangeAspect="1"/>
-          </p:cNvSpPr>
-          <p:nvPr>
-            <p:ph type="sldImg" idx="2"/>
-          </p:nvPr>
-        </p:nvSpPr>
-        <p:spPr/>
-      </p:sp>
-      <p:sp>
-        <p:nvSpPr>
-          <p:cNvPr id="3" name="Notes Placeholder 2"/>
-          <p:cNvSpPr>
-            <a:spLocks noGrp="1"/>
-          </p:cNvSpPr>
-          <p:nvPr>
-            <p:ph type="body" idx="1"/>
-          </p:nvPr>
-        </p:nvSpPr>
-        <p:spPr/>
-        <p:txBody>
-          <a:bodyPr/>
-          <a:lstStyle/>
-          <a:p>
-            <a:r>
-              <a:t>The guard model from MIT 6.033 requires a check on every resource access. A routing function can select an edge during execution while applying a rule fixed by the programmer. A model’s request or claim of a result does not establish that the runtime performed the action.</a:t>
-            </a:r>
-          </a:p>
-        </p:txBody>
-      </p:sp>
-    </p:spTree>
-  </p:cSld>
-  <p:clrMapOvr>
-    <a:masterClrMapping/>
-  </p:clrMapOvr>
-</p:notes>
-</file>
-
 <file path=ppt/notesSlides/notesSlide55.xml><?xml version="1.0" encoding="utf-8"?>
 <p:notes xmlns:a="http://schemas.openxmlformats.org/drawingml/2006/main" xmlns:r="http://schemas.openxmlformats.org/officeDocument/2006/relationships" xmlns:p="http://schemas.openxmlformats.org/presentationml/2006/main">
   <p:cSld>
@@ -4318,64 +3954,6 @@
           <a:p>
             <a:r>
               <a:t>Joining an absolute path to the root yields the absolute path itself, which the check then refuses if its resolved destination lies outside the root.</a:t>
-            </a:r>
-          </a:p>
-        </p:txBody>
-      </p:sp>
-    </p:spTree>
-  </p:cSld>
-  <p:clrMapOvr>
-    <a:masterClrMapping/>
-  </p:clrMapOvr>
-</p:notes>
-</file>
-
-<file path=ppt/notesSlides/notesSlide56.xml><?xml version="1.0" encoding="utf-8"?>
-<p:notes xmlns:a="http://schemas.openxmlformats.org/drawingml/2006/main" xmlns:r="http://schemas.openxmlformats.org/officeDocument/2006/relationships" xmlns:p="http://schemas.openxmlformats.org/presentationml/2006/main">
-  <p:cSld>
-    <p:spTree>
-      <p:nvGrpSpPr>
-        <p:cNvPr id="1" name=""/>
-        <p:cNvGrpSpPr/>
-        <p:nvPr/>
-      </p:nvGrpSpPr>
-      <p:grpSpPr>
-        <a:xfrm>
-          <a:off x="0" y="0"/>
-          <a:ext cx="0" cy="0"/>
-          <a:chOff x="0" y="0"/>
-          <a:chExt cx="0" cy="0"/>
-        </a:xfrm>
-      </p:grpSpPr>
-      <p:sp>
-        <p:nvSpPr>
-          <p:cNvPr id="2" name="Slide Image Placeholder 1"/>
-          <p:cNvSpPr>
-            <a:spLocks noGrp="1" noRot="1" noChangeAspect="1"/>
-          </p:cNvSpPr>
-          <p:nvPr>
-            <p:ph type="sldImg" idx="2"/>
-          </p:nvPr>
-        </p:nvSpPr>
-        <p:spPr/>
-      </p:sp>
-      <p:sp>
-        <p:nvSpPr>
-          <p:cNvPr id="3" name="Notes Placeholder 2"/>
-          <p:cNvSpPr>
-            <a:spLocks noGrp="1"/>
-          </p:cNvSpPr>
-          <p:nvPr>
-            <p:ph type="body" idx="1"/>
-          </p:nvPr>
-        </p:nvSpPr>
-        <p:spPr/>
-        <p:txBody>
-          <a:bodyPr/>
-          <a:lstStyle/>
-          <a:p>
-            <a:r>
-              <a:t>Section 4.6 describes a constructed dispatcher test. The permitted read returns 1,665 characters, matching step 6 of the recorded run. The refused request produces a tool_request and a failed tool_result with a reason and no character count.</a:t>
             </a:r>
           </a:p>
         </p:txBody>
@@ -31032,7 +30610,7 @@
 </file>
 
 <file path=ppt/slides/slide56.xml><?xml version="1.0" encoding="utf-8"?>
-<p:sld xmlns:a="http://schemas.openxmlformats.org/drawingml/2006/main" xmlns:r="http://schemas.openxmlformats.org/officeDocument/2006/relationships" xmlns:p="http://schemas.openxmlformats.org/presentationml/2006/main">
+<p:sld xmlns:a="http://schemas.openxmlformats.org/drawingml/2006/main" xmlns:r="http://schemas.openxmlformats.org/officeDocument/2006/relationships" xmlns:p="http://schemas.openxmlformats.org/presentationml/2006/main" show="0">
   <p:cSld>
     <p:spTree>
       <p:nvGrpSpPr>
@@ -31595,7 +31173,7 @@
 </file>
 
 <file path=ppt/slides/slide57.xml><?xml version="1.0" encoding="utf-8"?>
-<p:sld xmlns:a="http://schemas.openxmlformats.org/drawingml/2006/main" xmlns:r="http://schemas.openxmlformats.org/officeDocument/2006/relationships" xmlns:p="http://schemas.openxmlformats.org/presentationml/2006/main">
+<p:sld xmlns:a="http://schemas.openxmlformats.org/drawingml/2006/main" xmlns:r="http://schemas.openxmlformats.org/officeDocument/2006/relationships" xmlns:p="http://schemas.openxmlformats.org/presentationml/2006/main" show="0">
   <p:cSld>
     <p:spTree>
       <p:nvGrpSpPr>
@@ -31881,7 +31459,7 @@
 </file>
 
 <file path=ppt/slides/slide58.xml><?xml version="1.0" encoding="utf-8"?>
-<p:sld xmlns:a="http://schemas.openxmlformats.org/drawingml/2006/main" xmlns:r="http://schemas.openxmlformats.org/officeDocument/2006/relationships" xmlns:p="http://schemas.openxmlformats.org/presentationml/2006/main">
+<p:sld xmlns:a="http://schemas.openxmlformats.org/drawingml/2006/main" xmlns:r="http://schemas.openxmlformats.org/officeDocument/2006/relationships" xmlns:p="http://schemas.openxmlformats.org/presentationml/2006/main" show="0">
   <p:cSld>
     <p:spTree>
       <p:nvGrpSpPr>
@@ -33158,7 +32736,7 @@
 </p:sld>
 </file>
 
-<file path=ppt/slides/slide59.xml><?xml version="1.0" encoding="utf-8"?>
+<file path=ppt/slides/slide6.xml><?xml version="1.0" encoding="utf-8"?>
 <p:sld xmlns:a="http://schemas.openxmlformats.org/drawingml/2006/main" xmlns:r="http://schemas.openxmlformats.org/officeDocument/2006/relationships" xmlns:p="http://schemas.openxmlformats.org/presentationml/2006/main">
   <p:cSld>
     <p:spTree>
@@ -33191,7 +32769,7 @@
           <a:lstStyle/>
           <a:p>
             <a:r>
-              <a:t>The five parts of a tool contract</a:t>
+              <a:t>A state machine as a description of an agent</a:t>
             </a:r>
           </a:p>
         </p:txBody>
@@ -33209,23 +32787,25 @@
         <p:spPr>
           <a:xfrm>
             <a:off x="319251" y="700000"/>
-            <a:ext cx="6014545" cy="2440280"/>
+            <a:ext cx="6014545" cy="2450000"/>
           </a:xfrm>
         </p:spPr>
         <p:txBody>
-          <a:bodyPr wrap="square" anchor="ctr"/>
+          <a:bodyPr wrap="square" anchor="ctr">
+            <a:normAutofit fontScale="92500" lnSpcReduction="10000"/>
+          </a:bodyPr>
           <a:lstStyle/>
           <a:p>
             <a:pPr marL="0" indent="0">
               <a:buNone/>
             </a:pPr>
             <a:r>
-              <a:rPr sz="1400" b="1">
+              <a:rPr sz="1400" b="1" dirty="0">
                 <a:solidFill>
                   <a:srgbClr val="28285E"/>
                 </a:solidFill>
               </a:rPr>
-              <a:t>The model receives the tool's name, description and argument schema.</a:t>
+              <a:t>An agent runs in discrete steps: model calls, tool calls and checks.</a:t>
             </a:r>
           </a:p>
           <a:p>
@@ -33244,20 +32824,52 @@
               <a:buChar char="●"/>
             </a:pPr>
             <a:r>
-              <a:rPr sz="1400" b="1">
+              <a:rPr sz="1400" b="1" dirty="0">
                 <a:solidFill>
                   <a:schemeClr val="tx1"/>
                 </a:solidFill>
               </a:rPr>
-              <a:t>The model's tool definition</a:t>
-            </a:r>
-            <a:r>
-              <a:rPr sz="1400" b="0">
+              <a:t>Between steps,</a:t>
+            </a:r>
+            <a:r>
+              <a:rPr sz="1400" b="0" dirty="0">
                 <a:solidFill>
                   <a:schemeClr val="tx1"/>
                 </a:solidFill>
               </a:rPr>
-              <a:t> gives the name, purpose, argument types and argument constraints.</a:t>
+              <a:t> the </a:t>
+            </a:r>
+            <a:r>
+              <a:rPr sz="1400" b="1" dirty="0">
+                <a:solidFill>
+                  <a:schemeClr val="tx1"/>
+                </a:solidFill>
+              </a:rPr>
+              <a:t>agent retains information</a:t>
+            </a:r>
+            <a:r>
+              <a:rPr sz="1400" b="0" dirty="0">
+                <a:solidFill>
+                  <a:schemeClr val="tx1"/>
+                </a:solidFill>
+              </a:rPr>
+              <a:t>. The program </a:t>
+            </a:r>
+            <a:r>
+              <a:rPr sz="1400" b="1" dirty="0">
+                <a:solidFill>
+                  <a:schemeClr val="tx1"/>
+                </a:solidFill>
+              </a:rPr>
+              <a:t>decides which stored values may change </a:t>
+            </a:r>
+            <a:r>
+              <a:rPr sz="1400" b="0" dirty="0">
+                <a:solidFill>
+                  <a:schemeClr val="tx1"/>
+                </a:solidFill>
+              </a:rPr>
+              <a:t>and which computation may run next.</a:t>
             </a:r>
           </a:p>
           <a:p>
@@ -33276,20 +32888,36 @@
               <a:buChar char="●"/>
             </a:pPr>
             <a:r>
-              <a:rPr sz="1400" b="1">
+              <a:rPr sz="1400" b="1" dirty="0">
                 <a:solidFill>
                   <a:schemeClr val="tx1"/>
                 </a:solidFill>
               </a:rPr>
-              <a:t>The implementation and dispatcher</a:t>
-            </a:r>
-            <a:r>
-              <a:rPr sz="1400" b="0">
+              <a:t>The initial configuration</a:t>
+            </a:r>
+            <a:r>
+              <a:rPr sz="1400" b="0" dirty="0">
                 <a:solidFill>
                   <a:schemeClr val="tx1"/>
                 </a:solidFill>
               </a:rPr>
-              <a:t> define results, errors, side effects such as file changes, and execution constraints.</a:t>
+              <a:t> describes how the agent starts. </a:t>
+            </a:r>
+            <a:r>
+              <a:rPr sz="1400" b="1" dirty="0">
+                <a:solidFill>
+                  <a:schemeClr val="tx1"/>
+                </a:solidFill>
+              </a:rPr>
+              <a:t>A transition rule specifies how its state changes</a:t>
+            </a:r>
+            <a:r>
+              <a:rPr sz="1400" b="0" dirty="0">
+                <a:solidFill>
+                  <a:schemeClr val="tx1"/>
+                </a:solidFill>
+              </a:rPr>
+              <a:t> in response to an input and what output it produces.</a:t>
             </a:r>
           </a:p>
           <a:p>
@@ -33308,12 +32936,242 @@
               <a:buChar char="●"/>
             </a:pPr>
             <a:r>
+              <a:rPr sz="1400" b="1" dirty="0">
+                <a:solidFill>
+                  <a:schemeClr val="tx1"/>
+                </a:solidFill>
+              </a:rPr>
+              <a:t>A terminal configuration</a:t>
+            </a:r>
+            <a:r>
+              <a:rPr sz="1400" b="0" dirty="0">
+                <a:solidFill>
+                  <a:schemeClr val="tx1"/>
+                </a:solidFill>
+              </a:rPr>
+              <a:t> is one from which the </a:t>
+            </a:r>
+            <a:r>
+              <a:rPr sz="1400" b="1" dirty="0">
+                <a:solidFill>
+                  <a:schemeClr val="tx1"/>
+                </a:solidFill>
+              </a:rPr>
+              <a:t>runtime schedules no further step. It marks the end of the run.</a:t>
+            </a:r>
+          </a:p>
+        </p:txBody>
+      </p:sp>
+      <p:sp>
+        <p:nvSpPr>
+          <p:cNvPr id="4" name="Rectangle 3"/>
+          <p:cNvSpPr/>
+          <p:nvPr/>
+        </p:nvSpPr>
+        <p:spPr>
+          <a:xfrm>
+            <a:off x="319251" y="3340000"/>
+            <a:ext cx="6014545" cy="800000"/>
+          </a:xfrm>
+          <a:prstGeom prst="rect">
+            <a:avLst/>
+          </a:prstGeom>
+          <a:solidFill>
+            <a:srgbClr val="28285E"/>
+          </a:solidFill>
+          <a:ln>
+            <a:solidFill>
+              <a:srgbClr val="28285E"/>
+            </a:solidFill>
+          </a:ln>
+          <a:effectLst/>
+        </p:spPr>
+        <p:style>
+          <a:lnRef idx="1">
+            <a:schemeClr val="accent1"/>
+          </a:lnRef>
+          <a:fillRef idx="3">
+            <a:schemeClr val="accent1"/>
+          </a:fillRef>
+          <a:effectRef idx="2">
+            <a:schemeClr val="accent1"/>
+          </a:effectRef>
+          <a:fontRef idx="minor">
+            <a:schemeClr val="lt1"/>
+          </a:fontRef>
+        </p:style>
+        <p:txBody>
+          <a:bodyPr wrap="square" lIns="182880" rIns="182880" rtlCol="0" anchor="ctr"/>
+          <a:lstStyle/>
+          <a:p>
+            <a:pPr algn="ctr"/>
+            <a:r>
               <a:rPr sz="1400" b="1">
                 <a:solidFill>
+                  <a:schemeClr val="tx2"/>
+                </a:solidFill>
+              </a:rPr>
+              <a:t>A state machine is a simplified description of an agent. It omits the prompts, the model and the tool code.</a:t>
+            </a:r>
+          </a:p>
+        </p:txBody>
+      </p:sp>
+      <p:sp>
+        <p:nvSpPr>
+          <p:cNvPr id="5" name="Rectangle 4"/>
+          <p:cNvSpPr/>
+          <p:nvPr/>
+        </p:nvSpPr>
+        <p:spPr>
+          <a:xfrm>
+            <a:off x="319251" y="4330000"/>
+            <a:ext cx="6014545" cy="430000"/>
+          </a:xfrm>
+          <a:prstGeom prst="rect">
+            <a:avLst/>
+          </a:prstGeom>
+          <a:solidFill>
+            <a:srgbClr val="CACAE5"/>
+          </a:solidFill>
+          <a:ln>
+            <a:solidFill>
+              <a:srgbClr val="28285E"/>
+            </a:solidFill>
+          </a:ln>
+          <a:effectLst/>
+        </p:spPr>
+        <p:style>
+          <a:lnRef idx="1">
+            <a:schemeClr val="accent1"/>
+          </a:lnRef>
+          <a:fillRef idx="3">
+            <a:schemeClr val="accent1"/>
+          </a:fillRef>
+          <a:effectRef idx="2">
+            <a:schemeClr val="accent1"/>
+          </a:effectRef>
+          <a:fontRef idx="minor">
+            <a:schemeClr val="lt1"/>
+          </a:fontRef>
+        </p:style>
+        <p:txBody>
+          <a:bodyPr wrap="square" lIns="137160" rIns="137160" rtlCol="0" anchor="ctr"/>
+          <a:lstStyle/>
+          <a:p>
+            <a:pPr algn="ctr"/>
+            <a:r>
+              <a:rPr sz="1200" b="1">
+                <a:solidFill>
+                  <a:srgbClr val="28285E"/>
+                </a:solidFill>
+              </a:rPr>
+              <a:t>This description lets us examine execution without describing the whole program.</a:t>
+            </a:r>
+          </a:p>
+        </p:txBody>
+      </p:sp>
+    </p:spTree>
+  </p:cSld>
+  <p:clrMapOvr>
+    <a:masterClrMapping/>
+  </p:clrMapOvr>
+</p:sld>
+</file>
+
+<file path=ppt/slides/slide60.xml><?xml version="1.0" encoding="utf-8"?>
+<p:sld xmlns:a="http://schemas.openxmlformats.org/drawingml/2006/main" xmlns:r="http://schemas.openxmlformats.org/officeDocument/2006/relationships" xmlns:p="http://schemas.openxmlformats.org/presentationml/2006/main" show="0">
+  <p:cSld>
+    <p:spTree>
+      <p:nvGrpSpPr>
+        <p:cNvPr id="1" name=""/>
+        <p:cNvGrpSpPr/>
+        <p:nvPr/>
+      </p:nvGrpSpPr>
+      <p:grpSpPr>
+        <a:xfrm>
+          <a:off x="0" y="0"/>
+          <a:ext cx="0" cy="0"/>
+          <a:chOff x="0" y="0"/>
+          <a:chExt cx="0" cy="0"/>
+        </a:xfrm>
+      </p:grpSpPr>
+      <p:sp>
+        <p:nvSpPr>
+          <p:cNvPr id="2" name="Title 1"/>
+          <p:cNvSpPr>
+            <a:spLocks noGrp="1"/>
+          </p:cNvSpPr>
+          <p:nvPr>
+            <p:ph type="title"/>
+          </p:nvPr>
+        </p:nvSpPr>
+        <p:spPr/>
+        <p:txBody>
+          <a:bodyPr/>
+          <a:lstStyle/>
+          <a:p>
+            <a:r>
+              <a:t>Tool preconditions and postconditions</a:t>
+            </a:r>
+          </a:p>
+        </p:txBody>
+      </p:sp>
+      <p:sp>
+        <p:nvSpPr>
+          <p:cNvPr id="3" name="Content Placeholder 2"/>
+          <p:cNvSpPr>
+            <a:spLocks noGrp="1"/>
+          </p:cNvSpPr>
+          <p:nvPr>
+            <p:ph idx="1"/>
+          </p:nvPr>
+        </p:nvSpPr>
+        <p:spPr>
+          <a:xfrm>
+            <a:off x="319251" y="700000"/>
+            <a:ext cx="6014545" cy="2440280"/>
+          </a:xfrm>
+        </p:spPr>
+        <p:txBody>
+          <a:bodyPr wrap="square" anchor="ctr">
+            <a:normAutofit fontScale="92500" lnSpcReduction="10000"/>
+          </a:bodyPr>
+          <a:lstStyle/>
+          <a:p>
+            <a:pPr marL="0" indent="0">
+              <a:buNone/>
+            </a:pPr>
+            <a:r>
+              <a:rPr sz="1400" b="1">
+                <a:solidFill>
+                  <a:srgbClr val="28285E"/>
+                </a:solidFill>
+              </a:rPr>
+              <a:t>A method specification states what the caller must provide and what the implementation must guarantee.</a:t>
+            </a:r>
+          </a:p>
+          <a:p>
+            <a:pPr marL="400050" indent="-285750">
+              <a:spcBef>
+                <a:spcPts val="600"/>
+              </a:spcBef>
+              <a:spcAft>
+                <a:spcPts val="600"/>
+              </a:spcAft>
+              <a:buClr>
+                <a:srgbClr val="28285E"/>
+              </a:buClr>
+              <a:buSzPts val="1260"/>
+              <a:buFont typeface="+mn-lt"/>
+              <a:buChar char="●"/>
+            </a:pPr>
+            <a:r>
+              <a:rPr sz="1400" b="1">
+                <a:solidFill>
                   <a:schemeClr val="tx1"/>
                 </a:solidFill>
               </a:rPr>
-              <a:t>A description alone</a:t>
+              <a:t>The precondition</a:t>
             </a:r>
             <a:r>
               <a:rPr sz="1400" b="0">
@@ -33321,7 +33179,71 @@
                   <a:schemeClr val="tx1"/>
                 </a:solidFill>
               </a:rPr>
-              <a:t> does not enforce the tool's constraints.</a:t>
+              <a:t> states what must be true before a call, such as its path resolving inside the workspace.</a:t>
+            </a:r>
+          </a:p>
+          <a:p>
+            <a:pPr marL="400050" indent="-285750">
+              <a:spcBef>
+                <a:spcPts val="600"/>
+              </a:spcBef>
+              <a:spcAft>
+                <a:spcPts val="600"/>
+              </a:spcAft>
+              <a:buClr>
+                <a:srgbClr val="28285E"/>
+              </a:buClr>
+              <a:buSzPts val="1260"/>
+              <a:buFont typeface="+mn-lt"/>
+              <a:buChar char="●"/>
+            </a:pPr>
+            <a:r>
+              <a:rPr sz="1400" b="1">
+                <a:solidFill>
+                  <a:schemeClr val="tx1"/>
+                </a:solidFill>
+              </a:rPr>
+              <a:t>The postcondition</a:t>
+            </a:r>
+            <a:r>
+              <a:rPr sz="1400" b="0">
+                <a:solidFill>
+                  <a:schemeClr val="tx1"/>
+                </a:solidFill>
+              </a:rPr>
+              <a:t> states what the call guarantees if the precondition holds, including results, errors and side effects.</a:t>
+            </a:r>
+          </a:p>
+          <a:p>
+            <a:pPr marL="400050" indent="-285750">
+              <a:spcBef>
+                <a:spcPts val="600"/>
+              </a:spcBef>
+              <a:spcAft>
+                <a:spcPts val="600"/>
+              </a:spcAft>
+              <a:buClr>
+                <a:srgbClr val="28285E"/>
+              </a:buClr>
+              <a:buSzPts val="1260"/>
+              <a:buFont typeface="+mn-lt"/>
+              <a:buChar char="●"/>
+            </a:pPr>
+            <a:r>
+              <a:rPr sz="1400" b="1">
+                <a:solidFill>
+                  <a:schemeClr val="tx1"/>
+                </a:solidFill>
+              </a:rPr>
+              <a:t>The contract</a:t>
+            </a:r>
+            <a:r>
+              <a:rPr sz="1400" b="0">
+                <a:solidFill>
+                  <a:schemeClr val="tx1"/>
+                </a:solidFill>
+              </a:rPr>
+              <a:t> also specifies which invalid requests the runtime detects and how it refuses them without side effects.</a:t>
             </a:r>
           </a:p>
         </p:txBody>
@@ -33375,7 +33297,7 @@
                   <a:schemeClr val="tx2"/>
                 </a:solidFill>
               </a:rPr>
-              <a:t>A tool contract specifies what a tool does, its accepted arguments, its results and errors, its side effects, and its execution constraints.</a:t>
+              <a:t>The caller must satisfy the precondition. The implementer must ensure the postcondition whenever the precondition holds.</a:t>
             </a:r>
           </a:p>
         </p:txBody>
@@ -33429,4202 +33351,7 @@
                   <a:srgbClr val="28285E"/>
                 </a:solidFill>
               </a:rPr>
-              <a:t>Checks in the implementation and dispatcher enforce the tool's execution constraints.</a:t>
-            </a:r>
-          </a:p>
-        </p:txBody>
-      </p:sp>
-    </p:spTree>
-  </p:cSld>
-  <p:clrMapOvr>
-    <a:masterClrMapping/>
-  </p:clrMapOvr>
-</p:sld>
-</file>
-
-<file path=ppt/slides/slide6.xml><?xml version="1.0" encoding="utf-8"?>
-<p:sld xmlns:a="http://schemas.openxmlformats.org/drawingml/2006/main" xmlns:r="http://schemas.openxmlformats.org/officeDocument/2006/relationships" xmlns:p="http://schemas.openxmlformats.org/presentationml/2006/main">
-  <p:cSld>
-    <p:spTree>
-      <p:nvGrpSpPr>
-        <p:cNvPr id="1" name=""/>
-        <p:cNvGrpSpPr/>
-        <p:nvPr/>
-      </p:nvGrpSpPr>
-      <p:grpSpPr>
-        <a:xfrm>
-          <a:off x="0" y="0"/>
-          <a:ext cx="0" cy="0"/>
-          <a:chOff x="0" y="0"/>
-          <a:chExt cx="0" cy="0"/>
-        </a:xfrm>
-      </p:grpSpPr>
-      <p:sp>
-        <p:nvSpPr>
-          <p:cNvPr id="2" name="Title 1"/>
-          <p:cNvSpPr>
-            <a:spLocks noGrp="1"/>
-          </p:cNvSpPr>
-          <p:nvPr>
-            <p:ph type="title"/>
-          </p:nvPr>
-        </p:nvSpPr>
-        <p:spPr/>
-        <p:txBody>
-          <a:bodyPr/>
-          <a:lstStyle/>
-          <a:p>
-            <a:r>
-              <a:t>A state machine as a description of an agent</a:t>
-            </a:r>
-          </a:p>
-        </p:txBody>
-      </p:sp>
-      <p:sp>
-        <p:nvSpPr>
-          <p:cNvPr id="3" name="Content Placeholder 2"/>
-          <p:cNvSpPr>
-            <a:spLocks noGrp="1"/>
-          </p:cNvSpPr>
-          <p:nvPr>
-            <p:ph idx="1"/>
-          </p:nvPr>
-        </p:nvSpPr>
-        <p:spPr>
-          <a:xfrm>
-            <a:off x="319251" y="700000"/>
-            <a:ext cx="6014545" cy="2450000"/>
-          </a:xfrm>
-        </p:spPr>
-        <p:txBody>
-          <a:bodyPr wrap="square" anchor="ctr">
-            <a:normAutofit fontScale="92500" lnSpcReduction="10000"/>
-          </a:bodyPr>
-          <a:lstStyle/>
-          <a:p>
-            <a:pPr marL="0" indent="0">
-              <a:buNone/>
-            </a:pPr>
-            <a:r>
-              <a:rPr sz="1400" b="1" dirty="0">
-                <a:solidFill>
-                  <a:srgbClr val="28285E"/>
-                </a:solidFill>
-              </a:rPr>
-              <a:t>An agent runs in discrete steps: model calls, tool calls and checks.</a:t>
-            </a:r>
-          </a:p>
-          <a:p>
-            <a:pPr marL="400050" indent="-285750">
-              <a:spcBef>
-                <a:spcPts val="600"/>
-              </a:spcBef>
-              <a:spcAft>
-                <a:spcPts val="600"/>
-              </a:spcAft>
-              <a:buClr>
-                <a:srgbClr val="28285E"/>
-              </a:buClr>
-              <a:buSzPts val="1260"/>
-              <a:buFont typeface="+mn-lt"/>
-              <a:buChar char="●"/>
-            </a:pPr>
-            <a:r>
-              <a:rPr sz="1400" b="1" dirty="0">
-                <a:solidFill>
-                  <a:schemeClr val="tx1"/>
-                </a:solidFill>
-              </a:rPr>
-              <a:t>Between steps,</a:t>
-            </a:r>
-            <a:r>
-              <a:rPr sz="1400" b="0" dirty="0">
-                <a:solidFill>
-                  <a:schemeClr val="tx1"/>
-                </a:solidFill>
-              </a:rPr>
-              <a:t> the </a:t>
-            </a:r>
-            <a:r>
-              <a:rPr sz="1400" b="1" dirty="0">
-                <a:solidFill>
-                  <a:schemeClr val="tx1"/>
-                </a:solidFill>
-              </a:rPr>
-              <a:t>agent retains information</a:t>
-            </a:r>
-            <a:r>
-              <a:rPr sz="1400" b="0" dirty="0">
-                <a:solidFill>
-                  <a:schemeClr val="tx1"/>
-                </a:solidFill>
-              </a:rPr>
-              <a:t>. The program </a:t>
-            </a:r>
-            <a:r>
-              <a:rPr sz="1400" b="1" dirty="0">
-                <a:solidFill>
-                  <a:schemeClr val="tx1"/>
-                </a:solidFill>
-              </a:rPr>
-              <a:t>decides which stored values may change </a:t>
-            </a:r>
-            <a:r>
-              <a:rPr sz="1400" b="0" dirty="0">
-                <a:solidFill>
-                  <a:schemeClr val="tx1"/>
-                </a:solidFill>
-              </a:rPr>
-              <a:t>and which computation may run next.</a:t>
-            </a:r>
-          </a:p>
-          <a:p>
-            <a:pPr marL="400050" indent="-285750">
-              <a:spcBef>
-                <a:spcPts val="600"/>
-              </a:spcBef>
-              <a:spcAft>
-                <a:spcPts val="600"/>
-              </a:spcAft>
-              <a:buClr>
-                <a:srgbClr val="28285E"/>
-              </a:buClr>
-              <a:buSzPts val="1260"/>
-              <a:buFont typeface="+mn-lt"/>
-              <a:buChar char="●"/>
-            </a:pPr>
-            <a:r>
-              <a:rPr sz="1400" b="1" dirty="0">
-                <a:solidFill>
-                  <a:schemeClr val="tx1"/>
-                </a:solidFill>
-              </a:rPr>
-              <a:t>The initial configuration</a:t>
-            </a:r>
-            <a:r>
-              <a:rPr sz="1400" b="0" dirty="0">
-                <a:solidFill>
-                  <a:schemeClr val="tx1"/>
-                </a:solidFill>
-              </a:rPr>
-              <a:t> describes how the agent starts. </a:t>
-            </a:r>
-            <a:r>
-              <a:rPr sz="1400" b="1" dirty="0">
-                <a:solidFill>
-                  <a:schemeClr val="tx1"/>
-                </a:solidFill>
-              </a:rPr>
-              <a:t>A transition rule specifies how its state changes</a:t>
-            </a:r>
-            <a:r>
-              <a:rPr sz="1400" b="0" dirty="0">
-                <a:solidFill>
-                  <a:schemeClr val="tx1"/>
-                </a:solidFill>
-              </a:rPr>
-              <a:t> in response to an input and what output it produces.</a:t>
-            </a:r>
-          </a:p>
-          <a:p>
-            <a:pPr marL="400050" indent="-285750">
-              <a:spcBef>
-                <a:spcPts val="600"/>
-              </a:spcBef>
-              <a:spcAft>
-                <a:spcPts val="600"/>
-              </a:spcAft>
-              <a:buClr>
-                <a:srgbClr val="28285E"/>
-              </a:buClr>
-              <a:buSzPts val="1260"/>
-              <a:buFont typeface="+mn-lt"/>
-              <a:buChar char="●"/>
-            </a:pPr>
-            <a:r>
-              <a:rPr sz="1400" b="1" dirty="0">
-                <a:solidFill>
-                  <a:schemeClr val="tx1"/>
-                </a:solidFill>
-              </a:rPr>
-              <a:t>A terminal configuration</a:t>
-            </a:r>
-            <a:r>
-              <a:rPr sz="1400" b="0" dirty="0">
-                <a:solidFill>
-                  <a:schemeClr val="tx1"/>
-                </a:solidFill>
-              </a:rPr>
-              <a:t> is one from which the </a:t>
-            </a:r>
-            <a:r>
-              <a:rPr sz="1400" b="1" dirty="0">
-                <a:solidFill>
-                  <a:schemeClr val="tx1"/>
-                </a:solidFill>
-              </a:rPr>
-              <a:t>runtime schedules no further step. It marks the end of the run.</a:t>
-            </a:r>
-          </a:p>
-        </p:txBody>
-      </p:sp>
-      <p:sp>
-        <p:nvSpPr>
-          <p:cNvPr id="4" name="Rectangle 3"/>
-          <p:cNvSpPr/>
-          <p:nvPr/>
-        </p:nvSpPr>
-        <p:spPr>
-          <a:xfrm>
-            <a:off x="319251" y="3340000"/>
-            <a:ext cx="6014545" cy="800000"/>
-          </a:xfrm>
-          <a:prstGeom prst="rect">
-            <a:avLst/>
-          </a:prstGeom>
-          <a:solidFill>
-            <a:srgbClr val="28285E"/>
-          </a:solidFill>
-          <a:ln>
-            <a:solidFill>
-              <a:srgbClr val="28285E"/>
-            </a:solidFill>
-          </a:ln>
-          <a:effectLst/>
-        </p:spPr>
-        <p:style>
-          <a:lnRef idx="1">
-            <a:schemeClr val="accent1"/>
-          </a:lnRef>
-          <a:fillRef idx="3">
-            <a:schemeClr val="accent1"/>
-          </a:fillRef>
-          <a:effectRef idx="2">
-            <a:schemeClr val="accent1"/>
-          </a:effectRef>
-          <a:fontRef idx="minor">
-            <a:schemeClr val="lt1"/>
-          </a:fontRef>
-        </p:style>
-        <p:txBody>
-          <a:bodyPr wrap="square" lIns="182880" rIns="182880" rtlCol="0" anchor="ctr"/>
-          <a:lstStyle/>
-          <a:p>
-            <a:pPr algn="ctr"/>
-            <a:r>
-              <a:rPr sz="1400" b="1">
-                <a:solidFill>
-                  <a:schemeClr val="tx2"/>
-                </a:solidFill>
-              </a:rPr>
-              <a:t>A state machine is a simplified description of an agent. It omits the prompts, the model and the tool code.</a:t>
-            </a:r>
-          </a:p>
-        </p:txBody>
-      </p:sp>
-      <p:sp>
-        <p:nvSpPr>
-          <p:cNvPr id="5" name="Rectangle 4"/>
-          <p:cNvSpPr/>
-          <p:nvPr/>
-        </p:nvSpPr>
-        <p:spPr>
-          <a:xfrm>
-            <a:off x="319251" y="4330000"/>
-            <a:ext cx="6014545" cy="430000"/>
-          </a:xfrm>
-          <a:prstGeom prst="rect">
-            <a:avLst/>
-          </a:prstGeom>
-          <a:solidFill>
-            <a:srgbClr val="CACAE5"/>
-          </a:solidFill>
-          <a:ln>
-            <a:solidFill>
-              <a:srgbClr val="28285E"/>
-            </a:solidFill>
-          </a:ln>
-          <a:effectLst/>
-        </p:spPr>
-        <p:style>
-          <a:lnRef idx="1">
-            <a:schemeClr val="accent1"/>
-          </a:lnRef>
-          <a:fillRef idx="3">
-            <a:schemeClr val="accent1"/>
-          </a:fillRef>
-          <a:effectRef idx="2">
-            <a:schemeClr val="accent1"/>
-          </a:effectRef>
-          <a:fontRef idx="minor">
-            <a:schemeClr val="lt1"/>
-          </a:fontRef>
-        </p:style>
-        <p:txBody>
-          <a:bodyPr wrap="square" lIns="137160" rIns="137160" rtlCol="0" anchor="ctr"/>
-          <a:lstStyle/>
-          <a:p>
-            <a:pPr algn="ctr"/>
-            <a:r>
-              <a:rPr sz="1200" b="1">
-                <a:solidFill>
-                  <a:srgbClr val="28285E"/>
-                </a:solidFill>
-              </a:rPr>
-              <a:t>This description lets us examine execution without describing the whole program.</a:t>
-            </a:r>
-          </a:p>
-        </p:txBody>
-      </p:sp>
-    </p:spTree>
-  </p:cSld>
-  <p:clrMapOvr>
-    <a:masterClrMapping/>
-  </p:clrMapOvr>
-</p:sld>
-</file>
-
-<file path=ppt/slides/slide60.xml><?xml version="1.0" encoding="utf-8"?>
-<p:sld xmlns:a="http://schemas.openxmlformats.org/drawingml/2006/main" xmlns:r="http://schemas.openxmlformats.org/officeDocument/2006/relationships" xmlns:p="http://schemas.openxmlformats.org/presentationml/2006/main">
-  <p:cSld>
-    <p:spTree>
-      <p:nvGrpSpPr>
-        <p:cNvPr id="1" name=""/>
-        <p:cNvGrpSpPr/>
-        <p:nvPr/>
-      </p:nvGrpSpPr>
-      <p:grpSpPr>
-        <a:xfrm>
-          <a:off x="0" y="0"/>
-          <a:ext cx="0" cy="0"/>
-          <a:chOff x="0" y="0"/>
-          <a:chExt cx="0" cy="0"/>
-        </a:xfrm>
-      </p:grpSpPr>
-      <p:sp>
-        <p:nvSpPr>
-          <p:cNvPr id="2" name="Title 1"/>
-          <p:cNvSpPr>
-            <a:spLocks noGrp="1"/>
-          </p:cNvSpPr>
-          <p:nvPr>
-            <p:ph type="title"/>
-          </p:nvPr>
-        </p:nvSpPr>
-        <p:spPr/>
-        <p:txBody>
-          <a:bodyPr/>
-          <a:lstStyle/>
-          <a:p>
-            <a:r>
-              <a:t>Tool preconditions and postconditions</a:t>
-            </a:r>
-          </a:p>
-        </p:txBody>
-      </p:sp>
-      <p:sp>
-        <p:nvSpPr>
-          <p:cNvPr id="3" name="Content Placeholder 2"/>
-          <p:cNvSpPr>
-            <a:spLocks noGrp="1"/>
-          </p:cNvSpPr>
-          <p:nvPr>
-            <p:ph idx="1"/>
-          </p:nvPr>
-        </p:nvSpPr>
-        <p:spPr>
-          <a:xfrm>
-            <a:off x="319251" y="700000"/>
-            <a:ext cx="6014545" cy="2440280"/>
-          </a:xfrm>
-        </p:spPr>
-        <p:txBody>
-          <a:bodyPr wrap="square" anchor="ctr">
-            <a:normAutofit fontScale="92500" lnSpcReduction="10000"/>
-          </a:bodyPr>
-          <a:lstStyle/>
-          <a:p>
-            <a:pPr marL="0" indent="0">
-              <a:buNone/>
-            </a:pPr>
-            <a:r>
-              <a:rPr sz="1400" b="1">
-                <a:solidFill>
-                  <a:srgbClr val="28285E"/>
-                </a:solidFill>
-              </a:rPr>
-              <a:t>A method specification states what the caller must provide and what the implementation must guarantee.</a:t>
-            </a:r>
-          </a:p>
-          <a:p>
-            <a:pPr marL="400050" indent="-285750">
-              <a:spcBef>
-                <a:spcPts val="600"/>
-              </a:spcBef>
-              <a:spcAft>
-                <a:spcPts val="600"/>
-              </a:spcAft>
-              <a:buClr>
-                <a:srgbClr val="28285E"/>
-              </a:buClr>
-              <a:buSzPts val="1260"/>
-              <a:buFont typeface="+mn-lt"/>
-              <a:buChar char="●"/>
-            </a:pPr>
-            <a:r>
-              <a:rPr sz="1400" b="1">
-                <a:solidFill>
-                  <a:schemeClr val="tx1"/>
-                </a:solidFill>
-              </a:rPr>
-              <a:t>The precondition</a:t>
-            </a:r>
-            <a:r>
-              <a:rPr sz="1400" b="0">
-                <a:solidFill>
-                  <a:schemeClr val="tx1"/>
-                </a:solidFill>
-              </a:rPr>
-              <a:t> states what must be true before a call, such as its path resolving inside the workspace.</a:t>
-            </a:r>
-          </a:p>
-          <a:p>
-            <a:pPr marL="400050" indent="-285750">
-              <a:spcBef>
-                <a:spcPts val="600"/>
-              </a:spcBef>
-              <a:spcAft>
-                <a:spcPts val="600"/>
-              </a:spcAft>
-              <a:buClr>
-                <a:srgbClr val="28285E"/>
-              </a:buClr>
-              <a:buSzPts val="1260"/>
-              <a:buFont typeface="+mn-lt"/>
-              <a:buChar char="●"/>
-            </a:pPr>
-            <a:r>
-              <a:rPr sz="1400" b="1">
-                <a:solidFill>
-                  <a:schemeClr val="tx1"/>
-                </a:solidFill>
-              </a:rPr>
-              <a:t>The postcondition</a:t>
-            </a:r>
-            <a:r>
-              <a:rPr sz="1400" b="0">
-                <a:solidFill>
-                  <a:schemeClr val="tx1"/>
-                </a:solidFill>
-              </a:rPr>
-              <a:t> states what the call guarantees if the precondition holds, including results, errors and side effects.</a:t>
-            </a:r>
-          </a:p>
-          <a:p>
-            <a:pPr marL="400050" indent="-285750">
-              <a:spcBef>
-                <a:spcPts val="600"/>
-              </a:spcBef>
-              <a:spcAft>
-                <a:spcPts val="600"/>
-              </a:spcAft>
-              <a:buClr>
-                <a:srgbClr val="28285E"/>
-              </a:buClr>
-              <a:buSzPts val="1260"/>
-              <a:buFont typeface="+mn-lt"/>
-              <a:buChar char="●"/>
-            </a:pPr>
-            <a:r>
-              <a:rPr sz="1400" b="1">
-                <a:solidFill>
-                  <a:schemeClr val="tx1"/>
-                </a:solidFill>
-              </a:rPr>
-              <a:t>The contract</a:t>
-            </a:r>
-            <a:r>
-              <a:rPr sz="1400" b="0">
-                <a:solidFill>
-                  <a:schemeClr val="tx1"/>
-                </a:solidFill>
-              </a:rPr>
-              <a:t> also specifies which invalid requests the runtime detects and how it refuses them without side effects.</a:t>
-            </a:r>
-          </a:p>
-        </p:txBody>
-      </p:sp>
-      <p:sp>
-        <p:nvSpPr>
-          <p:cNvPr id="4" name="Rectangle 3"/>
-          <p:cNvSpPr/>
-          <p:nvPr/>
-        </p:nvSpPr>
-        <p:spPr>
-          <a:xfrm>
-            <a:off x="319251" y="3330280"/>
-            <a:ext cx="6014545" cy="710801"/>
-          </a:xfrm>
-          <a:prstGeom prst="rect">
-            <a:avLst/>
-          </a:prstGeom>
-          <a:solidFill>
-            <a:srgbClr val="28285E"/>
-          </a:solidFill>
-          <a:ln>
-            <a:solidFill>
-              <a:srgbClr val="28285E"/>
-            </a:solidFill>
-          </a:ln>
-          <a:effectLst/>
-        </p:spPr>
-        <p:style>
-          <a:lnRef idx="1">
-            <a:schemeClr val="accent1"/>
-          </a:lnRef>
-          <a:fillRef idx="3">
-            <a:schemeClr val="accent1"/>
-          </a:fillRef>
-          <a:effectRef idx="2">
-            <a:schemeClr val="accent1"/>
-          </a:effectRef>
-          <a:fontRef idx="minor">
-            <a:schemeClr val="lt1"/>
-          </a:fontRef>
-        </p:style>
-        <p:txBody>
-          <a:bodyPr wrap="square" lIns="182880" rIns="182880" rtlCol="0" anchor="ctr"/>
-          <a:lstStyle/>
-          <a:p>
-            <a:pPr algn="ctr"/>
-            <a:r>
-              <a:rPr sz="1400" b="0">
-                <a:solidFill>
-                  <a:schemeClr val="tx2"/>
-                </a:solidFill>
-              </a:rPr>
-              <a:t>The caller must satisfy the precondition. The implementer must ensure the postcondition whenever the precondition holds.</a:t>
-            </a:r>
-          </a:p>
-        </p:txBody>
-      </p:sp>
-      <p:sp>
-        <p:nvSpPr>
-          <p:cNvPr id="5" name="Rectangle 4"/>
-          <p:cNvSpPr/>
-          <p:nvPr/>
-        </p:nvSpPr>
-        <p:spPr>
-          <a:xfrm>
-            <a:off x="319251" y="4231081"/>
-            <a:ext cx="6014545" cy="430000"/>
-          </a:xfrm>
-          <a:prstGeom prst="rect">
-            <a:avLst/>
-          </a:prstGeom>
-          <a:solidFill>
-            <a:srgbClr val="CACAE5"/>
-          </a:solidFill>
-          <a:ln>
-            <a:solidFill>
-              <a:srgbClr val="28285E"/>
-            </a:solidFill>
-          </a:ln>
-          <a:effectLst/>
-        </p:spPr>
-        <p:style>
-          <a:lnRef idx="1">
-            <a:schemeClr val="accent1"/>
-          </a:lnRef>
-          <a:fillRef idx="3">
-            <a:schemeClr val="accent1"/>
-          </a:fillRef>
-          <a:effectRef idx="2">
-            <a:schemeClr val="accent1"/>
-          </a:effectRef>
-          <a:fontRef idx="minor">
-            <a:schemeClr val="lt1"/>
-          </a:fontRef>
-        </p:style>
-        <p:txBody>
-          <a:bodyPr wrap="square" lIns="137160" rIns="137160" rtlCol="0" anchor="ctr"/>
-          <a:lstStyle/>
-          <a:p>
-            <a:pPr algn="ctr"/>
-            <a:r>
-              <a:rPr sz="1200" b="1">
-                <a:solidFill>
-                  <a:srgbClr val="28285E"/>
-                </a:solidFill>
-              </a:rPr>
               <a:t>The tool contract must also define what happens when a request violates a precondition.</a:t>
-            </a:r>
-          </a:p>
-        </p:txBody>
-      </p:sp>
-    </p:spTree>
-  </p:cSld>
-  <p:clrMapOvr>
-    <a:masterClrMapping/>
-  </p:clrMapOvr>
-</p:sld>
-</file>
-
-<file path=ppt/slides/slide61.xml><?xml version="1.0" encoding="utf-8"?>
-<p:sld xmlns:a="http://schemas.openxmlformats.org/drawingml/2006/main" xmlns:r="http://schemas.openxmlformats.org/officeDocument/2006/relationships" xmlns:p="http://schemas.openxmlformats.org/presentationml/2006/main">
-  <p:cSld>
-    <p:spTree>
-      <p:nvGrpSpPr>
-        <p:cNvPr id="1" name=""/>
-        <p:cNvGrpSpPr/>
-        <p:nvPr/>
-      </p:nvGrpSpPr>
-      <p:grpSpPr>
-        <a:xfrm>
-          <a:off x="0" y="0"/>
-          <a:ext cx="0" cy="0"/>
-          <a:chOff x="0" y="0"/>
-          <a:chExt cx="0" cy="0"/>
-        </a:xfrm>
-      </p:grpSpPr>
-      <p:sp>
-        <p:nvSpPr>
-          <p:cNvPr id="2" name="Title 1"/>
-          <p:cNvSpPr>
-            <a:spLocks noGrp="1"/>
-          </p:cNvSpPr>
-          <p:nvPr>
-            <p:ph type="title"/>
-          </p:nvPr>
-        </p:nvSpPr>
-        <p:spPr/>
-        <p:txBody>
-          <a:bodyPr/>
-          <a:lstStyle/>
-          <a:p>
-            <a:r>
-              <a:t>Arguments supplied by the dispatcher</a:t>
-            </a:r>
-          </a:p>
-        </p:txBody>
-      </p:sp>
-      <p:sp>
-        <p:nvSpPr>
-          <p:cNvPr id="3" name="Content Placeholder 2"/>
-          <p:cNvSpPr>
-            <a:spLocks noGrp="1"/>
-          </p:cNvSpPr>
-          <p:nvPr>
-            <p:ph idx="1"/>
-          </p:nvPr>
-        </p:nvSpPr>
-        <p:spPr>
-          <a:xfrm>
-            <a:off x="319251" y="700000"/>
-            <a:ext cx="6014545" cy="731648"/>
-          </a:xfrm>
-        </p:spPr>
-        <p:txBody>
-          <a:bodyPr wrap="square" anchor="ctr">
-            <a:normAutofit fontScale="92500"/>
-          </a:bodyPr>
-          <a:lstStyle/>
-          <a:p>
-            <a:pPr marL="0" indent="0">
-              <a:buNone/>
-            </a:pPr>
-            <a:r>
-              <a:rPr sz="1400" b="1">
-                <a:solidFill>
-                  <a:srgbClr val="28285E"/>
-                </a:solidFill>
-              </a:rPr>
-              <a:t>The dispatcher binds arguments to parameters: it supplies the workspace root and matches the model's arguments to the remaining parameters.</a:t>
-            </a:r>
-          </a:p>
-        </p:txBody>
-      </p:sp>
-      <p:sp>
-        <p:nvSpPr>
-          <p:cNvPr id="4" name="TextBox 3"/>
-          <p:cNvSpPr txBox="1"/>
-          <p:nvPr/>
-        </p:nvSpPr>
-        <p:spPr>
-          <a:xfrm>
-            <a:off x="319251" y="1621648"/>
-            <a:ext cx="6014545" cy="200000"/>
-          </a:xfrm>
-          <a:prstGeom prst="rect">
-            <a:avLst/>
-          </a:prstGeom>
-          <a:noFill/>
-        </p:spPr>
-        <p:txBody>
-          <a:bodyPr wrap="none" lIns="0" tIns="0" rIns="0" bIns="0">
-            <a:spAutoFit/>
-          </a:bodyPr>
-          <a:lstStyle/>
-          <a:p>
-            <a:r>
-              <a:rPr sz="1200" b="1">
-                <a:solidFill>
-                  <a:srgbClr val="28285E"/>
-                </a:solidFill>
-              </a:rPr>
-              <a:t>tools.py, </a:t>
-            </a:r>
-            <a:r>
-              <a:rPr sz="1200" b="0">
-                <a:solidFill>
-                  <a:srgbClr val="28285E"/>
-                </a:solidFill>
-                <a:latin typeface="Maple Mono NF"/>
-              </a:rPr>
-              <a:t>read_file</a:t>
-            </a:r>
-            <a:r>
-              <a:rPr sz="1200" b="1">
-                <a:solidFill>
-                  <a:srgbClr val="28285E"/>
-                </a:solidFill>
-              </a:rPr>
-              <a:t>, lines 28 to 29. dispatch.py, line 143.</a:t>
-            </a:r>
-          </a:p>
-        </p:txBody>
-      </p:sp>
-      <p:sp>
-        <p:nvSpPr>
-          <p:cNvPr id="5" name="CodeWindow"/>
-          <p:cNvSpPr/>
-          <p:nvPr/>
-        </p:nvSpPr>
-        <p:spPr>
-          <a:xfrm>
-            <a:off x="319251" y="1881648"/>
-            <a:ext cx="6014545" cy="1450000"/>
-          </a:xfrm>
-          <a:prstGeom prst="roundRect">
-            <a:avLst>
-              <a:gd name="adj" fmla="val 2731"/>
-            </a:avLst>
-          </a:prstGeom>
-          <a:solidFill>
-            <a:schemeClr val="tx1">
-              <a:lumMod val="85000"/>
-              <a:lumOff val="15000"/>
-            </a:schemeClr>
-          </a:solidFill>
-          <a:ln>
-            <a:solidFill>
-              <a:schemeClr val="accent1">
-                <a:lumMod val="15000"/>
-              </a:schemeClr>
-            </a:solidFill>
-          </a:ln>
-          <a:effectLst/>
-        </p:spPr>
-        <p:style>
-          <a:lnRef idx="1">
-            <a:schemeClr val="accent1"/>
-          </a:lnRef>
-          <a:fillRef idx="3">
-            <a:schemeClr val="accent1"/>
-          </a:fillRef>
-          <a:effectRef idx="2">
-            <a:schemeClr val="accent1"/>
-          </a:effectRef>
-          <a:fontRef idx="minor">
-            <a:schemeClr val="lt1"/>
-          </a:fontRef>
-        </p:style>
-        <p:txBody>
-          <a:bodyPr rtlCol="0" anchor="ctr"/>
-          <a:lstStyle/>
-          <a:p>
-            <a:endParaRPr/>
-          </a:p>
-        </p:txBody>
-      </p:sp>
-      <p:sp>
-        <p:nvSpPr>
-          <p:cNvPr id="6" name="WinDot 0"/>
-          <p:cNvSpPr/>
-          <p:nvPr/>
-        </p:nvSpPr>
-        <p:spPr>
-          <a:xfrm>
-            <a:off x="371717" y="1925464"/>
-            <a:ext cx="157397" cy="157397"/>
-          </a:xfrm>
-          <a:prstGeom prst="ellipse">
-            <a:avLst/>
-          </a:prstGeom>
-          <a:solidFill>
-            <a:srgbClr val="FF0000"/>
-          </a:solidFill>
-          <a:ln>
-            <a:noFill/>
-          </a:ln>
-          <a:effectLst/>
-        </p:spPr>
-        <p:style>
-          <a:lnRef idx="1">
-            <a:schemeClr val="accent1"/>
-          </a:lnRef>
-          <a:fillRef idx="3">
-            <a:schemeClr val="accent1"/>
-          </a:fillRef>
-          <a:effectRef idx="2">
-            <a:schemeClr val="accent1"/>
-          </a:effectRef>
-          <a:fontRef idx="minor">
-            <a:schemeClr val="lt1"/>
-          </a:fontRef>
-        </p:style>
-        <p:txBody>
-          <a:bodyPr rtlCol="0" anchor="ctr"/>
-          <a:lstStyle/>
-          <a:p>
-            <a:pPr algn="ctr"/>
-            <a:endParaRPr/>
-          </a:p>
-        </p:txBody>
-      </p:sp>
-      <p:sp>
-        <p:nvSpPr>
-          <p:cNvPr id="7" name="WinDot 1"/>
-          <p:cNvSpPr/>
-          <p:nvPr/>
-        </p:nvSpPr>
-        <p:spPr>
-          <a:xfrm>
-            <a:off x="581580" y="1925464"/>
-            <a:ext cx="157397" cy="157397"/>
-          </a:xfrm>
-          <a:prstGeom prst="ellipse">
-            <a:avLst/>
-          </a:prstGeom>
-          <a:solidFill>
-            <a:srgbClr val="FFC000"/>
-          </a:solidFill>
-          <a:ln>
-            <a:noFill/>
-          </a:ln>
-          <a:effectLst/>
-        </p:spPr>
-        <p:style>
-          <a:lnRef idx="1">
-            <a:schemeClr val="accent1"/>
-          </a:lnRef>
-          <a:fillRef idx="3">
-            <a:schemeClr val="accent1"/>
-          </a:fillRef>
-          <a:effectRef idx="2">
-            <a:schemeClr val="accent1"/>
-          </a:effectRef>
-          <a:fontRef idx="minor">
-            <a:schemeClr val="lt1"/>
-          </a:fontRef>
-        </p:style>
-        <p:txBody>
-          <a:bodyPr rtlCol="0" anchor="ctr"/>
-          <a:lstStyle/>
-          <a:p>
-            <a:pPr algn="ctr"/>
-            <a:endParaRPr/>
-          </a:p>
-        </p:txBody>
-      </p:sp>
-      <p:sp>
-        <p:nvSpPr>
-          <p:cNvPr id="8" name="WinDot 2"/>
-          <p:cNvSpPr/>
-          <p:nvPr/>
-        </p:nvSpPr>
-        <p:spPr>
-          <a:xfrm>
-            <a:off x="791443" y="1925464"/>
-            <a:ext cx="157397" cy="157397"/>
-          </a:xfrm>
-          <a:prstGeom prst="ellipse">
-            <a:avLst/>
-          </a:prstGeom>
-          <a:solidFill>
-            <a:srgbClr val="92D050"/>
-          </a:solidFill>
-          <a:ln>
-            <a:noFill/>
-          </a:ln>
-          <a:effectLst/>
-        </p:spPr>
-        <p:style>
-          <a:lnRef idx="1">
-            <a:schemeClr val="accent1"/>
-          </a:lnRef>
-          <a:fillRef idx="3">
-            <a:schemeClr val="accent1"/>
-          </a:fillRef>
-          <a:effectRef idx="2">
-            <a:schemeClr val="accent1"/>
-          </a:effectRef>
-          <a:fontRef idx="minor">
-            <a:schemeClr val="lt1"/>
-          </a:fontRef>
-        </p:style>
-        <p:txBody>
-          <a:bodyPr rtlCol="0" anchor="ctr"/>
-          <a:lstStyle/>
-          <a:p>
-            <a:pPr algn="ctr"/>
-            <a:endParaRPr/>
-          </a:p>
-        </p:txBody>
-      </p:sp>
-      <p:sp>
-        <p:nvSpPr>
-          <p:cNvPr id="9" name="WinText"/>
-          <p:cNvSpPr txBox="1"/>
-          <p:nvPr/>
-        </p:nvSpPr>
-        <p:spPr>
-          <a:xfrm>
-            <a:off x="469251" y="2211648"/>
-            <a:ext cx="5714545" cy="1050000"/>
-          </a:xfrm>
-          <a:prstGeom prst="rect">
-            <a:avLst/>
-          </a:prstGeom>
-          <a:noFill/>
-        </p:spPr>
-        <p:txBody>
-          <a:bodyPr wrap="none" lIns="0" tIns="0" rIns="0" bIns="0" anchor="t">
-            <a:spAutoFit/>
-          </a:bodyPr>
-          <a:lstStyle/>
-          <a:p>
-            <a:pPr algn="l">
-              <a:buNone/>
-            </a:pPr>
-            <a:r>
-              <a:rPr sz="1100" b="0">
-                <a:solidFill>
-                  <a:schemeClr val="accent2"/>
-                </a:solidFill>
-                <a:latin typeface="Maple Mono NF"/>
-              </a:rPr>
-              <a:t>def</a:t>
-            </a:r>
-            <a:r>
-              <a:rPr sz="1100" b="0">
-                <a:solidFill>
-                  <a:schemeClr val="bg1"/>
-                </a:solidFill>
-                <a:latin typeface="Maple Mono NF"/>
-              </a:rPr>
-              <a:t> read_file(</a:t>
-            </a:r>
-            <a:r>
-              <a:rPr sz="1100" b="1">
-                <a:solidFill>
-                  <a:schemeClr val="accent4">
-                    <a:lumMod val="70000"/>
-                    <a:lumOff val="30000"/>
-                  </a:schemeClr>
-                </a:solidFill>
-                <a:latin typeface="Maple Mono NF"/>
-              </a:rPr>
-              <a:t>ws</a:t>
-            </a:r>
-            <a:r>
-              <a:rPr sz="1100" b="0">
-                <a:solidFill>
-                  <a:schemeClr val="bg1"/>
-                </a:solidFill>
-                <a:latin typeface="Maple Mono NF"/>
-              </a:rPr>
-              <a:t>: Path, path: str, start: int | </a:t>
-            </a:r>
-            <a:r>
-              <a:rPr sz="1100" b="0">
-                <a:solidFill>
-                  <a:schemeClr val="accent2"/>
-                </a:solidFill>
-                <a:latin typeface="Maple Mono NF"/>
-              </a:rPr>
-              <a:t>None</a:t>
-            </a:r>
-            <a:r>
-              <a:rPr sz="1100" b="0">
-                <a:solidFill>
-                  <a:schemeClr val="bg1"/>
-                </a:solidFill>
-                <a:latin typeface="Maple Mono NF"/>
-              </a:rPr>
-              <a:t> = </a:t>
-            </a:r>
-            <a:r>
-              <a:rPr sz="1100" b="0">
-                <a:solidFill>
-                  <a:schemeClr val="accent2"/>
-                </a:solidFill>
-                <a:latin typeface="Maple Mono NF"/>
-              </a:rPr>
-              <a:t>None</a:t>
-            </a:r>
-            <a:r>
-              <a:rPr sz="1100" b="0">
-                <a:solidFill>
-                  <a:schemeClr val="bg1"/>
-                </a:solidFill>
-                <a:latin typeface="Maple Mono NF"/>
-              </a:rPr>
-              <a:t>,</a:t>
-            </a:r>
-          </a:p>
-          <a:p>
-            <a:pPr algn="l">
-              <a:buNone/>
-            </a:pPr>
-            <a:r>
-              <a:rPr sz="1100" b="0">
-                <a:solidFill>
-                  <a:schemeClr val="bg1"/>
-                </a:solidFill>
-                <a:latin typeface="Maple Mono NF"/>
-              </a:rPr>
-              <a:t>              end: int | </a:t>
-            </a:r>
-            <a:r>
-              <a:rPr sz="1100" b="0">
-                <a:solidFill>
-                  <a:schemeClr val="accent2"/>
-                </a:solidFill>
-                <a:latin typeface="Maple Mono NF"/>
-              </a:rPr>
-              <a:t>None</a:t>
-            </a:r>
-            <a:r>
-              <a:rPr sz="1100" b="0">
-                <a:solidFill>
-                  <a:schemeClr val="bg1"/>
-                </a:solidFill>
-                <a:latin typeface="Maple Mono NF"/>
-              </a:rPr>
-              <a:t> = </a:t>
-            </a:r>
-            <a:r>
-              <a:rPr sz="1100" b="0">
-                <a:solidFill>
-                  <a:schemeClr val="accent2"/>
-                </a:solidFill>
-                <a:latin typeface="Maple Mono NF"/>
-              </a:rPr>
-              <a:t>None</a:t>
-            </a:r>
-            <a:r>
-              <a:rPr sz="1100" b="0">
-                <a:solidFill>
-                  <a:schemeClr val="bg1"/>
-                </a:solidFill>
-                <a:latin typeface="Maple Mono NF"/>
-              </a:rPr>
-              <a:t>) -&gt; str:</a:t>
-            </a:r>
-          </a:p>
-          <a:p>
-            <a:pPr algn="l">
-              <a:buNone/>
-            </a:pPr>
-            <a:endParaRPr sz="1100" b="0">
-              <a:solidFill>
-                <a:schemeClr val="bg1"/>
-              </a:solidFill>
-              <a:latin typeface="Maple Mono NF"/>
-            </a:endParaRPr>
-          </a:p>
-          <a:p>
-            <a:pPr algn="l">
-              <a:buNone/>
-            </a:pPr>
-            <a:r>
-              <a:rPr sz="1100" b="0">
-                <a:solidFill>
-                  <a:schemeClr val="accent6"/>
-                </a:solidFill>
-                <a:latin typeface="Maple Mono NF"/>
-              </a:rPr>
-              <a:t># ours: the dispatcher supplies ws before the model's arguments</a:t>
-            </a:r>
-          </a:p>
-          <a:p>
-            <a:pPr algn="l">
-              <a:buNone/>
-            </a:pPr>
-            <a:r>
-              <a:rPr sz="1100" b="0">
-                <a:solidFill>
-                  <a:schemeClr val="bg1"/>
-                </a:solidFill>
-                <a:latin typeface="Maple Mono NF"/>
-              </a:rPr>
-              <a:t>inspect.signature(function).bind(</a:t>
-            </a:r>
-            <a:r>
-              <a:rPr sz="1100" b="0">
-                <a:solidFill>
-                  <a:schemeClr val="accent2"/>
-                </a:solidFill>
-                <a:latin typeface="Maple Mono NF"/>
-              </a:rPr>
-              <a:t>self</a:t>
-            </a:r>
-            <a:r>
-              <a:rPr sz="1100" b="0">
-                <a:solidFill>
-                  <a:schemeClr val="bg1"/>
-                </a:solidFill>
-                <a:latin typeface="Maple Mono NF"/>
-              </a:rPr>
-              <a:t>.</a:t>
-            </a:r>
-            <a:r>
-              <a:rPr sz="1100" b="1">
-                <a:solidFill>
-                  <a:schemeClr val="accent4">
-                    <a:lumMod val="70000"/>
-                    <a:lumOff val="30000"/>
-                  </a:schemeClr>
-                </a:solidFill>
-                <a:latin typeface="Maple Mono NF"/>
-              </a:rPr>
-              <a:t>ws</a:t>
-            </a:r>
-            <a:r>
-              <a:rPr sz="1100" b="0">
-                <a:solidFill>
-                  <a:schemeClr val="bg1"/>
-                </a:solidFill>
-                <a:latin typeface="Maple Mono NF"/>
-              </a:rPr>
-              <a:t>, **args)</a:t>
-            </a:r>
-          </a:p>
-        </p:txBody>
-      </p:sp>
-      <p:sp>
-        <p:nvSpPr>
-          <p:cNvPr id="10" name="Rectangle 9"/>
-          <p:cNvSpPr/>
-          <p:nvPr/>
-        </p:nvSpPr>
-        <p:spPr>
-          <a:xfrm>
-            <a:off x="319251" y="3521648"/>
-            <a:ext cx="6014545" cy="700000"/>
-          </a:xfrm>
-          <a:prstGeom prst="rect">
-            <a:avLst/>
-          </a:prstGeom>
-          <a:solidFill>
-            <a:srgbClr val="28285E"/>
-          </a:solidFill>
-          <a:ln>
-            <a:solidFill>
-              <a:srgbClr val="28285E"/>
-            </a:solidFill>
-          </a:ln>
-          <a:effectLst/>
-        </p:spPr>
-        <p:style>
-          <a:lnRef idx="1">
-            <a:schemeClr val="accent1"/>
-          </a:lnRef>
-          <a:fillRef idx="3">
-            <a:schemeClr val="accent1"/>
-          </a:fillRef>
-          <a:effectRef idx="2">
-            <a:schemeClr val="accent1"/>
-          </a:effectRef>
-          <a:fontRef idx="minor">
-            <a:schemeClr val="lt1"/>
-          </a:fontRef>
-        </p:style>
-        <p:txBody>
-          <a:bodyPr wrap="square" lIns="137160" rIns="137160" rtlCol="0" anchor="ctr"/>
-          <a:lstStyle/>
-          <a:p>
-            <a:pPr algn="ctr"/>
-            <a:r>
-              <a:rPr sz="1200" b="1">
-                <a:solidFill>
-                  <a:schemeClr val="tx2"/>
-                </a:solidFill>
-              </a:rPr>
-              <a:t>Tools read configuration from the module. A </a:t>
-            </a:r>
-            <a:r>
-              <a:rPr sz="1200" b="0">
-                <a:solidFill>
-                  <a:schemeClr val="tx2"/>
-                </a:solidFill>
-                <a:latin typeface="Maple Mono NF"/>
-              </a:rPr>
-              <a:t>config</a:t>
-            </a:r>
-            <a:r>
-              <a:rPr sz="1200" b="1">
-                <a:solidFill>
-                  <a:schemeClr val="tx2"/>
-                </a:solidFill>
-              </a:rPr>
-              <a:t> parameter would allow the model to supply its value.</a:t>
-            </a:r>
-          </a:p>
-        </p:txBody>
-      </p:sp>
-    </p:spTree>
-  </p:cSld>
-  <p:clrMapOvr>
-    <a:masterClrMapping/>
-  </p:clrMapOvr>
-</p:sld>
-</file>
-
-<file path=ppt/slides/slide62.xml><?xml version="1.0" encoding="utf-8"?>
-<p:sld xmlns:a="http://schemas.openxmlformats.org/drawingml/2006/main" xmlns:r="http://schemas.openxmlformats.org/officeDocument/2006/relationships" xmlns:p="http://schemas.openxmlformats.org/presentationml/2006/main">
-  <p:cSld>
-    <p:spTree>
-      <p:nvGrpSpPr>
-        <p:cNvPr id="1" name=""/>
-        <p:cNvGrpSpPr/>
-        <p:nvPr/>
-      </p:nvGrpSpPr>
-      <p:grpSpPr>
-        <a:xfrm>
-          <a:off x="0" y="0"/>
-          <a:ext cx="0" cy="0"/>
-          <a:chOff x="0" y="0"/>
-          <a:chExt cx="0" cy="0"/>
-        </a:xfrm>
-      </p:grpSpPr>
-      <p:sp>
-        <p:nvSpPr>
-          <p:cNvPr id="2" name="Title 1"/>
-          <p:cNvSpPr>
-            <a:spLocks noGrp="1"/>
-          </p:cNvSpPr>
-          <p:nvPr>
-            <p:ph type="title"/>
-          </p:nvPr>
-        </p:nvSpPr>
-        <p:spPr/>
-        <p:txBody>
-          <a:bodyPr/>
-          <a:lstStyle/>
-          <a:p>
-            <a:r>
-              <a:t>The five operations of the dispatch cycle</a:t>
-            </a:r>
-          </a:p>
-        </p:txBody>
-      </p:sp>
-      <p:sp>
-        <p:nvSpPr>
-          <p:cNvPr id="3" name="Content Placeholder 2"/>
-          <p:cNvSpPr>
-            <a:spLocks noGrp="1"/>
-          </p:cNvSpPr>
-          <p:nvPr>
-            <p:ph idx="1"/>
-          </p:nvPr>
-        </p:nvSpPr>
-        <p:spPr>
-          <a:xfrm>
-            <a:off x="319251" y="700000"/>
-            <a:ext cx="6014545" cy="500000"/>
-          </a:xfrm>
-        </p:spPr>
-        <p:txBody>
-          <a:bodyPr wrap="square" anchor="ctr">
-            <a:normAutofit fontScale="70000" lnSpcReduction="20000"/>
-          </a:bodyPr>
-          <a:lstStyle/>
-          <a:p>
-            <a:pPr marL="0" indent="0">
-              <a:buNone/>
-            </a:pPr>
-            <a:r>
-              <a:rPr sz="1400" b="1">
-                <a:solidFill>
-                  <a:srgbClr val="28285E"/>
-                </a:solidFill>
-              </a:rPr>
-              <a:t>The runtime finds the tool, binds arguments, checks policy, runs the operation and records an observation.</a:t>
-            </a:r>
-          </a:p>
-        </p:txBody>
-      </p:sp>
-      <p:pic>
-        <p:nvPicPr>
-          <p:cNvPr id="4" name="Figure s4-dispatch-cycle" descr="s4-dispatch-cycle.png"/>
-          <p:cNvPicPr>
-            <a:picLocks noChangeAspect="1"/>
-          </p:cNvPicPr>
-          <p:nvPr/>
-        </p:nvPicPr>
-        <p:blipFill>
-          <a:blip r:embed="rId3"/>
-          <a:stretch>
-            <a:fillRect/>
-          </a:stretch>
-        </p:blipFill>
-        <p:spPr>
-          <a:xfrm>
-            <a:off x="1524148" y="1390000"/>
-            <a:ext cx="3604753" cy="2510000"/>
-          </a:xfrm>
-          <a:prstGeom prst="rect">
-            <a:avLst/>
-          </a:prstGeom>
-        </p:spPr>
-      </p:pic>
-      <p:sp>
-        <p:nvSpPr>
-          <p:cNvPr id="5" name="Rectangle 4"/>
-          <p:cNvSpPr/>
-          <p:nvPr/>
-        </p:nvSpPr>
-        <p:spPr>
-          <a:xfrm>
-            <a:off x="319251" y="4090000"/>
-            <a:ext cx="6014545" cy="700000"/>
-          </a:xfrm>
-          <a:prstGeom prst="rect">
-            <a:avLst/>
-          </a:prstGeom>
-          <a:solidFill>
-            <a:srgbClr val="CACAE5"/>
-          </a:solidFill>
-          <a:ln>
-            <a:solidFill>
-              <a:srgbClr val="28285E"/>
-            </a:solidFill>
-          </a:ln>
-          <a:effectLst/>
-        </p:spPr>
-        <p:style>
-          <a:lnRef idx="1">
-            <a:schemeClr val="accent1"/>
-          </a:lnRef>
-          <a:fillRef idx="3">
-            <a:schemeClr val="accent1"/>
-          </a:fillRef>
-          <a:effectRef idx="2">
-            <a:schemeClr val="accent1"/>
-          </a:effectRef>
-          <a:fontRef idx="minor">
-            <a:schemeClr val="lt1"/>
-          </a:fontRef>
-        </p:style>
-        <p:txBody>
-          <a:bodyPr wrap="square" lIns="137160" rIns="137160" rtlCol="0" anchor="ctr"/>
-          <a:lstStyle/>
-          <a:p>
-            <a:pPr algn="ctr"/>
-            <a:r>
-              <a:rPr sz="1200" b="1">
-                <a:solidFill>
-                  <a:srgbClr val="28285E"/>
-                </a:solidFill>
-              </a:rPr>
-              <a:t>Figure 7 in the lecture notes. The dispatcher returns an observation after a successful operation or a refused request.</a:t>
-            </a:r>
-          </a:p>
-        </p:txBody>
-      </p:sp>
-    </p:spTree>
-  </p:cSld>
-  <p:clrMapOvr>
-    <a:masterClrMapping/>
-  </p:clrMapOvr>
-</p:sld>
-</file>
-
-<file path=ppt/slides/slide63.xml><?xml version="1.0" encoding="utf-8"?>
-<p:sld xmlns:a="http://schemas.openxmlformats.org/drawingml/2006/main" xmlns:r="http://schemas.openxmlformats.org/officeDocument/2006/relationships" xmlns:p="http://schemas.openxmlformats.org/presentationml/2006/main">
-  <p:cSld>
-    <p:spTree>
-      <p:nvGrpSpPr>
-        <p:cNvPr id="1" name=""/>
-        <p:cNvGrpSpPr/>
-        <p:nvPr/>
-      </p:nvGrpSpPr>
-      <p:grpSpPr>
-        <a:xfrm>
-          <a:off x="0" y="0"/>
-          <a:ext cx="0" cy="0"/>
-          <a:chOff x="0" y="0"/>
-          <a:chExt cx="0" cy="0"/>
-        </a:xfrm>
-      </p:grpSpPr>
-      <p:sp>
-        <p:nvSpPr>
-          <p:cNvPr id="2" name="Title 1"/>
-          <p:cNvSpPr>
-            <a:spLocks noGrp="1"/>
-          </p:cNvSpPr>
-          <p:nvPr>
-            <p:ph type="title"/>
-          </p:nvPr>
-        </p:nvSpPr>
-        <p:spPr/>
-        <p:txBody>
-          <a:bodyPr/>
-          <a:lstStyle/>
-          <a:p>
-            <a:r>
-              <a:t>Returning a refusal as an observation</a:t>
-            </a:r>
-          </a:p>
-        </p:txBody>
-      </p:sp>
-      <p:sp>
-        <p:nvSpPr>
-          <p:cNvPr id="3" name="TextBox 2"/>
-          <p:cNvSpPr txBox="1"/>
-          <p:nvPr/>
-        </p:nvSpPr>
-        <p:spPr>
-          <a:xfrm>
-            <a:off x="319251" y="700000"/>
-            <a:ext cx="6014545" cy="200000"/>
-          </a:xfrm>
-          <a:prstGeom prst="rect">
-            <a:avLst/>
-          </a:prstGeom>
-          <a:noFill/>
-        </p:spPr>
-        <p:txBody>
-          <a:bodyPr wrap="none" lIns="0" tIns="0" rIns="0" bIns="0">
-            <a:spAutoFit/>
-          </a:bodyPr>
-          <a:lstStyle/>
-          <a:p>
-            <a:r>
-              <a:rPr sz="1200" b="1">
-                <a:solidFill>
-                  <a:srgbClr val="28285E"/>
-                </a:solidFill>
-              </a:rPr>
-              <a:t>dispatch.py, lines 134 to 164. Coercion and other exception handlers omitted.</a:t>
-            </a:r>
-          </a:p>
-        </p:txBody>
-      </p:sp>
-      <p:sp>
-        <p:nvSpPr>
-          <p:cNvPr id="4" name="CodeWindow"/>
-          <p:cNvSpPr/>
-          <p:nvPr/>
-        </p:nvSpPr>
-        <p:spPr>
-          <a:xfrm>
-            <a:off x="319251" y="960000"/>
-            <a:ext cx="6014545" cy="2690908"/>
-          </a:xfrm>
-          <a:prstGeom prst="roundRect">
-            <a:avLst>
-              <a:gd name="adj" fmla="val 2731"/>
-            </a:avLst>
-          </a:prstGeom>
-          <a:solidFill>
-            <a:schemeClr val="tx1">
-              <a:lumMod val="85000"/>
-              <a:lumOff val="15000"/>
-            </a:schemeClr>
-          </a:solidFill>
-          <a:ln>
-            <a:solidFill>
-              <a:schemeClr val="accent1">
-                <a:lumMod val="15000"/>
-              </a:schemeClr>
-            </a:solidFill>
-          </a:ln>
-          <a:effectLst/>
-        </p:spPr>
-        <p:style>
-          <a:lnRef idx="1">
-            <a:schemeClr val="accent1"/>
-          </a:lnRef>
-          <a:fillRef idx="3">
-            <a:schemeClr val="accent1"/>
-          </a:fillRef>
-          <a:effectRef idx="2">
-            <a:schemeClr val="accent1"/>
-          </a:effectRef>
-          <a:fontRef idx="minor">
-            <a:schemeClr val="lt1"/>
-          </a:fontRef>
-        </p:style>
-        <p:txBody>
-          <a:bodyPr rtlCol="0" anchor="ctr"/>
-          <a:lstStyle/>
-          <a:p>
-            <a:endParaRPr/>
-          </a:p>
-        </p:txBody>
-      </p:sp>
-      <p:sp>
-        <p:nvSpPr>
-          <p:cNvPr id="5" name="WinDot 0"/>
-          <p:cNvSpPr/>
-          <p:nvPr/>
-        </p:nvSpPr>
-        <p:spPr>
-          <a:xfrm>
-            <a:off x="371717" y="1003816"/>
-            <a:ext cx="157397" cy="157397"/>
-          </a:xfrm>
-          <a:prstGeom prst="ellipse">
-            <a:avLst/>
-          </a:prstGeom>
-          <a:solidFill>
-            <a:srgbClr val="FF0000"/>
-          </a:solidFill>
-          <a:ln>
-            <a:noFill/>
-          </a:ln>
-          <a:effectLst/>
-        </p:spPr>
-        <p:style>
-          <a:lnRef idx="1">
-            <a:schemeClr val="accent1"/>
-          </a:lnRef>
-          <a:fillRef idx="3">
-            <a:schemeClr val="accent1"/>
-          </a:fillRef>
-          <a:effectRef idx="2">
-            <a:schemeClr val="accent1"/>
-          </a:effectRef>
-          <a:fontRef idx="minor">
-            <a:schemeClr val="lt1"/>
-          </a:fontRef>
-        </p:style>
-        <p:txBody>
-          <a:bodyPr rtlCol="0" anchor="ctr"/>
-          <a:lstStyle/>
-          <a:p>
-            <a:pPr algn="ctr"/>
-            <a:endParaRPr/>
-          </a:p>
-        </p:txBody>
-      </p:sp>
-      <p:sp>
-        <p:nvSpPr>
-          <p:cNvPr id="6" name="WinDot 1"/>
-          <p:cNvSpPr/>
-          <p:nvPr/>
-        </p:nvSpPr>
-        <p:spPr>
-          <a:xfrm>
-            <a:off x="581580" y="1003816"/>
-            <a:ext cx="157397" cy="157397"/>
-          </a:xfrm>
-          <a:prstGeom prst="ellipse">
-            <a:avLst/>
-          </a:prstGeom>
-          <a:solidFill>
-            <a:srgbClr val="FFC000"/>
-          </a:solidFill>
-          <a:ln>
-            <a:noFill/>
-          </a:ln>
-          <a:effectLst/>
-        </p:spPr>
-        <p:style>
-          <a:lnRef idx="1">
-            <a:schemeClr val="accent1"/>
-          </a:lnRef>
-          <a:fillRef idx="3">
-            <a:schemeClr val="accent1"/>
-          </a:fillRef>
-          <a:effectRef idx="2">
-            <a:schemeClr val="accent1"/>
-          </a:effectRef>
-          <a:fontRef idx="minor">
-            <a:schemeClr val="lt1"/>
-          </a:fontRef>
-        </p:style>
-        <p:txBody>
-          <a:bodyPr rtlCol="0" anchor="ctr"/>
-          <a:lstStyle/>
-          <a:p>
-            <a:pPr algn="ctr"/>
-            <a:endParaRPr/>
-          </a:p>
-        </p:txBody>
-      </p:sp>
-      <p:sp>
-        <p:nvSpPr>
-          <p:cNvPr id="7" name="WinDot 2"/>
-          <p:cNvSpPr/>
-          <p:nvPr/>
-        </p:nvSpPr>
-        <p:spPr>
-          <a:xfrm>
-            <a:off x="791443" y="1003816"/>
-            <a:ext cx="157397" cy="157397"/>
-          </a:xfrm>
-          <a:prstGeom prst="ellipse">
-            <a:avLst/>
-          </a:prstGeom>
-          <a:solidFill>
-            <a:srgbClr val="92D050"/>
-          </a:solidFill>
-          <a:ln>
-            <a:noFill/>
-          </a:ln>
-          <a:effectLst/>
-        </p:spPr>
-        <p:style>
-          <a:lnRef idx="1">
-            <a:schemeClr val="accent1"/>
-          </a:lnRef>
-          <a:fillRef idx="3">
-            <a:schemeClr val="accent1"/>
-          </a:fillRef>
-          <a:effectRef idx="2">
-            <a:schemeClr val="accent1"/>
-          </a:effectRef>
-          <a:fontRef idx="minor">
-            <a:schemeClr val="lt1"/>
-          </a:fontRef>
-        </p:style>
-        <p:txBody>
-          <a:bodyPr rtlCol="0" anchor="ctr"/>
-          <a:lstStyle/>
-          <a:p>
-            <a:pPr algn="ctr"/>
-            <a:endParaRPr/>
-          </a:p>
-        </p:txBody>
-      </p:sp>
-      <p:sp>
-        <p:nvSpPr>
-          <p:cNvPr id="8" name="WinText"/>
-          <p:cNvSpPr txBox="1"/>
-          <p:nvPr/>
-        </p:nvSpPr>
-        <p:spPr>
-          <a:xfrm>
-            <a:off x="469251" y="1290000"/>
-            <a:ext cx="5714545" cy="2290908"/>
-          </a:xfrm>
-          <a:prstGeom prst="rect">
-            <a:avLst/>
-          </a:prstGeom>
-          <a:noFill/>
-        </p:spPr>
-        <p:txBody>
-          <a:bodyPr wrap="none" lIns="0" tIns="0" rIns="0" bIns="0" anchor="t">
-            <a:spAutoFit/>
-          </a:bodyPr>
-          <a:lstStyle/>
-          <a:p>
-            <a:pPr algn="l">
-              <a:buNone/>
-            </a:pPr>
-            <a:r>
-              <a:rPr sz="1000" b="0">
-                <a:solidFill>
-                  <a:schemeClr val="bg1"/>
-                </a:solidFill>
-                <a:latin typeface="Maple Mono NF"/>
-              </a:rPr>
-              <a:t>function = </a:t>
-            </a:r>
-            <a:r>
-              <a:rPr sz="1000" b="0">
-                <a:solidFill>
-                  <a:schemeClr val="accent2"/>
-                </a:solidFill>
-                <a:latin typeface="Maple Mono NF"/>
-              </a:rPr>
-              <a:t>self</a:t>
-            </a:r>
-            <a:r>
-              <a:rPr sz="1000" b="0">
-                <a:solidFill>
-                  <a:schemeClr val="bg1"/>
-                </a:solidFill>
-                <a:latin typeface="Maple Mono NF"/>
-              </a:rPr>
-              <a:t>.registry.get(name)</a:t>
-            </a:r>
-          </a:p>
-          <a:p>
-            <a:pPr algn="l">
-              <a:buNone/>
-            </a:pPr>
-            <a:r>
-              <a:rPr sz="1000" b="0">
-                <a:solidFill>
-                  <a:schemeClr val="accent2"/>
-                </a:solidFill>
-                <a:latin typeface="Maple Mono NF"/>
-              </a:rPr>
-              <a:t>if</a:t>
-            </a:r>
-            <a:r>
-              <a:rPr sz="1000" b="0">
-                <a:solidFill>
-                  <a:schemeClr val="bg1"/>
-                </a:solidFill>
-                <a:latin typeface="Maple Mono NF"/>
-              </a:rPr>
-              <a:t> function is </a:t>
-            </a:r>
-            <a:r>
-              <a:rPr sz="1000" b="0">
-                <a:solidFill>
-                  <a:schemeClr val="accent2"/>
-                </a:solidFill>
-                <a:latin typeface="Maple Mono NF"/>
-              </a:rPr>
-              <a:t>None</a:t>
-            </a:r>
-            <a:r>
-              <a:rPr sz="1000" b="0">
-                <a:solidFill>
-                  <a:schemeClr val="bg1"/>
-                </a:solidFill>
-                <a:latin typeface="Maple Mono NF"/>
-              </a:rPr>
-              <a:t>:</a:t>
-            </a:r>
-          </a:p>
-          <a:p>
-            <a:pPr algn="l">
-              <a:buNone/>
-            </a:pPr>
-            <a:r>
-              <a:rPr sz="1000" b="0">
-                <a:solidFill>
-                  <a:schemeClr val="accent6"/>
-                </a:solidFill>
-                <a:latin typeface="Maple Mono NF"/>
-              </a:rPr>
-              <a:t>    # ours: return a refusal listing the registered tools</a:t>
-            </a:r>
-          </a:p>
-          <a:p>
-            <a:pPr algn="l">
-              <a:buNone/>
-            </a:pPr>
-            <a:r>
-              <a:rPr sz="1000" b="0">
-                <a:solidFill>
-                  <a:schemeClr val="accent2"/>
-                </a:solidFill>
-                <a:latin typeface="Maple Mono NF"/>
-              </a:rPr>
-              <a:t>try</a:t>
-            </a:r>
-            <a:r>
-              <a:rPr sz="1000" b="0">
-                <a:solidFill>
-                  <a:schemeClr val="bg1"/>
-                </a:solidFill>
-                <a:latin typeface="Maple Mono NF"/>
-              </a:rPr>
-              <a:t>:</a:t>
-            </a:r>
-          </a:p>
-          <a:p>
-            <a:pPr algn="l">
-              <a:buNone/>
-            </a:pPr>
-            <a:r>
-              <a:rPr sz="1000" b="0">
-                <a:solidFill>
-                  <a:schemeClr val="bg1"/>
-                </a:solidFill>
-                <a:latin typeface="Maple Mono NF"/>
-              </a:rPr>
-              <a:t>    inspect.signature(function).bind(</a:t>
-            </a:r>
-            <a:r>
-              <a:rPr sz="1000" b="0">
-                <a:solidFill>
-                  <a:schemeClr val="accent2"/>
-                </a:solidFill>
-                <a:latin typeface="Maple Mono NF"/>
-              </a:rPr>
-              <a:t>self</a:t>
-            </a:r>
-            <a:r>
-              <a:rPr sz="1000" b="0">
-                <a:solidFill>
-                  <a:schemeClr val="bg1"/>
-                </a:solidFill>
-                <a:latin typeface="Maple Mono NF"/>
-              </a:rPr>
-              <a:t>.ws, **args)</a:t>
-            </a:r>
-          </a:p>
-          <a:p>
-            <a:pPr algn="l">
-              <a:buNone/>
-            </a:pPr>
-            <a:r>
-              <a:rPr sz="1000" b="0">
-                <a:solidFill>
-                  <a:schemeClr val="accent2"/>
-                </a:solidFill>
-                <a:latin typeface="Maple Mono NF"/>
-              </a:rPr>
-              <a:t>except</a:t>
-            </a:r>
-            <a:r>
-              <a:rPr sz="1000" b="0">
-                <a:solidFill>
-                  <a:schemeClr val="bg1"/>
-                </a:solidFill>
-                <a:latin typeface="Maple Mono NF"/>
-              </a:rPr>
-              <a:t> TypeError </a:t>
-            </a:r>
-            <a:r>
-              <a:rPr sz="1000" b="0">
-                <a:solidFill>
-                  <a:schemeClr val="accent2"/>
-                </a:solidFill>
-                <a:latin typeface="Maple Mono NF"/>
-              </a:rPr>
-              <a:t>as</a:t>
-            </a:r>
-            <a:r>
-              <a:rPr sz="1000" b="0">
-                <a:solidFill>
-                  <a:schemeClr val="bg1"/>
-                </a:solidFill>
-                <a:latin typeface="Maple Mono NF"/>
-              </a:rPr>
-              <a:t> exc:</a:t>
-            </a:r>
-          </a:p>
-          <a:p>
-            <a:pPr algn="l">
-              <a:buNone/>
-            </a:pPr>
-            <a:r>
-              <a:rPr sz="1000" b="0">
-                <a:solidFill>
-                  <a:schemeClr val="bg1"/>
-                </a:solidFill>
-                <a:latin typeface="Maple Mono NF"/>
-              </a:rPr>
-              <a:t>    </a:t>
-            </a:r>
-            <a:r>
-              <a:rPr sz="1000" b="0">
-                <a:solidFill>
-                  <a:schemeClr val="accent2"/>
-                </a:solidFill>
-                <a:latin typeface="Maple Mono NF"/>
-              </a:rPr>
-              <a:t>return</a:t>
-            </a:r>
-            <a:r>
-              <a:rPr sz="1000" b="0">
-                <a:solidFill>
-                  <a:schemeClr val="bg1"/>
-                </a:solidFill>
-                <a:latin typeface="Maple Mono NF"/>
-              </a:rPr>
-              <a:t> </a:t>
-            </a:r>
-            <a:r>
-              <a:rPr sz="1000" b="0">
-                <a:solidFill>
-                  <a:schemeClr val="accent2"/>
-                </a:solidFill>
-                <a:latin typeface="Maple Mono NF"/>
-              </a:rPr>
-              <a:t>self</a:t>
-            </a:r>
-            <a:r>
-              <a:rPr sz="1000" b="0">
-                <a:solidFill>
-                  <a:schemeClr val="bg1"/>
-                </a:solidFill>
-                <a:latin typeface="Maple Mono NF"/>
-              </a:rPr>
-              <a:t>.</a:t>
-            </a:r>
-            <a:r>
-              <a:rPr sz="1000" b="1">
-                <a:solidFill>
-                  <a:schemeClr val="accent4">
-                    <a:lumMod val="70000"/>
-                    <a:lumOff val="30000"/>
-                  </a:schemeClr>
-                </a:solidFill>
-                <a:latin typeface="Maple Mono NF"/>
-              </a:rPr>
-              <a:t>_refuse</a:t>
-            </a:r>
-            <a:r>
-              <a:rPr sz="1000" b="0">
-                <a:solidFill>
-                  <a:schemeClr val="bg1"/>
-                </a:solidFill>
-                <a:latin typeface="Maple Mono NF"/>
-              </a:rPr>
-              <a:t>(name, args, f</a:t>
-            </a:r>
-            <a:r>
-              <a:rPr sz="1000" b="0">
-                <a:solidFill>
-                  <a:schemeClr val="accent3">
-                    <a:lumMod val="55000"/>
-                    <a:lumOff val="45000"/>
-                  </a:schemeClr>
-                </a:solidFill>
-                <a:latin typeface="Maple Mono NF"/>
-              </a:rPr>
-              <a:t>"bad arguments for {name}: {exc}"</a:t>
-            </a:r>
-            <a:r>
-              <a:rPr sz="1000" b="0">
-                <a:solidFill>
-                  <a:schemeClr val="bg1"/>
-                </a:solidFill>
-                <a:latin typeface="Maple Mono NF"/>
-              </a:rPr>
-              <a:t>)</a:t>
-            </a:r>
-          </a:p>
-          <a:p>
-            <a:pPr algn="l">
-              <a:buNone/>
-            </a:pPr>
-            <a:r>
-              <a:rPr sz="1000" b="0">
-                <a:solidFill>
-                  <a:schemeClr val="accent2"/>
-                </a:solidFill>
-                <a:latin typeface="Maple Mono NF"/>
-              </a:rPr>
-              <a:t>try</a:t>
-            </a:r>
-            <a:r>
-              <a:rPr sz="1000" b="0">
-                <a:solidFill>
-                  <a:schemeClr val="bg1"/>
-                </a:solidFill>
-                <a:latin typeface="Maple Mono NF"/>
-              </a:rPr>
-              <a:t>:</a:t>
-            </a:r>
-          </a:p>
-          <a:p>
-            <a:pPr algn="l">
-              <a:buNone/>
-            </a:pPr>
-            <a:r>
-              <a:rPr sz="1000" b="0">
-                <a:solidFill>
-                  <a:schemeClr val="bg1"/>
-                </a:solidFill>
-                <a:latin typeface="Maple Mono NF"/>
-              </a:rPr>
-              <a:t>    value = function(</a:t>
-            </a:r>
-            <a:r>
-              <a:rPr sz="1000" b="0">
-                <a:solidFill>
-                  <a:schemeClr val="accent2"/>
-                </a:solidFill>
-                <a:latin typeface="Maple Mono NF"/>
-              </a:rPr>
-              <a:t>self</a:t>
-            </a:r>
-            <a:r>
-              <a:rPr sz="1000" b="0">
-                <a:solidFill>
-                  <a:schemeClr val="bg1"/>
-                </a:solidFill>
-                <a:latin typeface="Maple Mono NF"/>
-              </a:rPr>
-              <a:t>.ws, **args)</a:t>
-            </a:r>
-          </a:p>
-          <a:p>
-            <a:pPr algn="l">
-              <a:buNone/>
-            </a:pPr>
-            <a:r>
-              <a:rPr sz="1000" b="0">
-                <a:solidFill>
-                  <a:schemeClr val="accent2"/>
-                </a:solidFill>
-                <a:latin typeface="Maple Mono NF"/>
-              </a:rPr>
-              <a:t>except</a:t>
-            </a:r>
-            <a:r>
-              <a:rPr sz="1000" b="0">
-                <a:solidFill>
-                  <a:schemeClr val="bg1"/>
-                </a:solidFill>
-                <a:latin typeface="Maple Mono NF"/>
-              </a:rPr>
-              <a:t> PathEscapeException </a:t>
-            </a:r>
-            <a:r>
-              <a:rPr sz="1000" b="0">
-                <a:solidFill>
-                  <a:schemeClr val="accent2"/>
-                </a:solidFill>
-                <a:latin typeface="Maple Mono NF"/>
-              </a:rPr>
-              <a:t>as</a:t>
-            </a:r>
-            <a:r>
-              <a:rPr sz="1000" b="0">
-                <a:solidFill>
-                  <a:schemeClr val="bg1"/>
-                </a:solidFill>
-                <a:latin typeface="Maple Mono NF"/>
-              </a:rPr>
-              <a:t> exc:</a:t>
-            </a:r>
-          </a:p>
-          <a:p>
-            <a:pPr algn="l">
-              <a:buNone/>
-            </a:pPr>
-            <a:r>
-              <a:rPr sz="1000" b="0">
-                <a:solidFill>
-                  <a:schemeClr val="bg1"/>
-                </a:solidFill>
-                <a:latin typeface="Maple Mono NF"/>
-              </a:rPr>
-              <a:t>    </a:t>
-            </a:r>
-            <a:r>
-              <a:rPr sz="1000" b="0">
-                <a:solidFill>
-                  <a:schemeClr val="accent2"/>
-                </a:solidFill>
-                <a:latin typeface="Maple Mono NF"/>
-              </a:rPr>
-              <a:t>return</a:t>
-            </a:r>
-            <a:r>
-              <a:rPr sz="1000" b="0">
-                <a:solidFill>
-                  <a:schemeClr val="bg1"/>
-                </a:solidFill>
-                <a:latin typeface="Maple Mono NF"/>
-              </a:rPr>
-              <a:t> </a:t>
-            </a:r>
-            <a:r>
-              <a:rPr sz="1000" b="0">
-                <a:solidFill>
-                  <a:schemeClr val="accent2"/>
-                </a:solidFill>
-                <a:latin typeface="Maple Mono NF"/>
-              </a:rPr>
-              <a:t>self</a:t>
-            </a:r>
-            <a:r>
-              <a:rPr sz="1000" b="0">
-                <a:solidFill>
-                  <a:schemeClr val="bg1"/>
-                </a:solidFill>
-                <a:latin typeface="Maple Mono NF"/>
-              </a:rPr>
-              <a:t>.</a:t>
-            </a:r>
-            <a:r>
-              <a:rPr sz="1000" b="1">
-                <a:solidFill>
-                  <a:schemeClr val="accent4">
-                    <a:lumMod val="70000"/>
-                    <a:lumOff val="30000"/>
-                  </a:schemeClr>
-                </a:solidFill>
-                <a:latin typeface="Maple Mono NF"/>
-              </a:rPr>
-              <a:t>_refuse</a:t>
-            </a:r>
-            <a:r>
-              <a:rPr sz="1000" b="0">
-                <a:solidFill>
-                  <a:schemeClr val="bg1"/>
-                </a:solidFill>
-                <a:latin typeface="Maple Mono NF"/>
-              </a:rPr>
-              <a:t>(name, args, f</a:t>
-            </a:r>
-            <a:r>
-              <a:rPr sz="1000" b="0">
-                <a:solidFill>
-                  <a:schemeClr val="accent3">
-                    <a:lumMod val="55000"/>
-                    <a:lumOff val="45000"/>
-                  </a:schemeClr>
-                </a:solidFill>
-                <a:latin typeface="Maple Mono NF"/>
-              </a:rPr>
-              <a:t>"refused: {exc}"</a:t>
-            </a:r>
-            <a:r>
-              <a:rPr sz="1000" b="0">
-                <a:solidFill>
-                  <a:schemeClr val="bg1"/>
-                </a:solidFill>
-                <a:latin typeface="Maple Mono NF"/>
-              </a:rPr>
-              <a:t>)</a:t>
-            </a:r>
-          </a:p>
-          <a:p>
-            <a:pPr algn="l">
-              <a:buNone/>
-            </a:pPr>
-            <a:r>
-              <a:rPr sz="1000" b="0">
-                <a:solidFill>
-                  <a:schemeClr val="accent2"/>
-                </a:solidFill>
-                <a:latin typeface="Maple Mono NF"/>
-              </a:rPr>
-              <a:t>return</a:t>
-            </a:r>
-            <a:r>
-              <a:rPr sz="1000" b="0">
-                <a:solidFill>
-                  <a:schemeClr val="bg1"/>
-                </a:solidFill>
-                <a:latin typeface="Maple Mono NF"/>
-              </a:rPr>
-              <a:t> </a:t>
-            </a:r>
-            <a:r>
-              <a:rPr sz="1000" b="0">
-                <a:solidFill>
-                  <a:schemeClr val="accent2"/>
-                </a:solidFill>
-                <a:latin typeface="Maple Mono NF"/>
-              </a:rPr>
-              <a:t>self</a:t>
-            </a:r>
-            <a:r>
-              <a:rPr sz="1000" b="0">
-                <a:solidFill>
-                  <a:schemeClr val="bg1"/>
-                </a:solidFill>
-                <a:latin typeface="Maple Mono NF"/>
-              </a:rPr>
-              <a:t>._observe(name, args, </a:t>
-            </a:r>
-            <a:r>
-              <a:rPr sz="1000" b="0">
-                <a:solidFill>
-                  <a:schemeClr val="accent2"/>
-                </a:solidFill>
-                <a:latin typeface="Maple Mono NF"/>
-              </a:rPr>
-              <a:t>self</a:t>
-            </a:r>
-            <a:r>
-              <a:rPr sz="1000" b="0">
-                <a:solidFill>
-                  <a:schemeClr val="bg1"/>
-                </a:solidFill>
-                <a:latin typeface="Maple Mono NF"/>
-              </a:rPr>
-              <a:t>._render(name, value))</a:t>
-            </a:r>
-          </a:p>
-        </p:txBody>
-      </p:sp>
-      <p:sp>
-        <p:nvSpPr>
-          <p:cNvPr id="9" name="Rectangle 8"/>
-          <p:cNvSpPr/>
-          <p:nvPr/>
-        </p:nvSpPr>
-        <p:spPr>
-          <a:xfrm>
-            <a:off x="319251" y="3840908"/>
-            <a:ext cx="6014545" cy="562963"/>
-          </a:xfrm>
-          <a:prstGeom prst="rect">
-            <a:avLst/>
-          </a:prstGeom>
-          <a:solidFill>
-            <a:srgbClr val="28285E"/>
-          </a:solidFill>
-          <a:ln>
-            <a:solidFill>
-              <a:srgbClr val="28285E"/>
-            </a:solidFill>
-          </a:ln>
-          <a:effectLst/>
-        </p:spPr>
-        <p:style>
-          <a:lnRef idx="1">
-            <a:schemeClr val="accent1"/>
-          </a:lnRef>
-          <a:fillRef idx="3">
-            <a:schemeClr val="accent1"/>
-          </a:fillRef>
-          <a:effectRef idx="2">
-            <a:schemeClr val="accent1"/>
-          </a:effectRef>
-          <a:fontRef idx="minor">
-            <a:schemeClr val="lt1"/>
-          </a:fontRef>
-        </p:style>
-        <p:txBody>
-          <a:bodyPr wrap="square" lIns="137160" rIns="137160" rtlCol="0" anchor="ctr"/>
-          <a:lstStyle/>
-          <a:p>
-            <a:pPr algn="ctr"/>
-            <a:r>
-              <a:rPr sz="1200" b="1">
-                <a:solidFill>
-                  <a:schemeClr val="tx2"/>
-                </a:solidFill>
-              </a:rPr>
-              <a:t>An unhandled exception ends the run. A refusal returns an observation so the model can revise its request.</a:t>
-            </a:r>
-          </a:p>
-        </p:txBody>
-      </p:sp>
-    </p:spTree>
-  </p:cSld>
-  <p:clrMapOvr>
-    <a:masterClrMapping/>
-  </p:clrMapOvr>
-</p:sld>
-</file>
-
-<file path=ppt/slides/slide64.xml><?xml version="1.0" encoding="utf-8"?>
-<p:sld xmlns:a="http://schemas.openxmlformats.org/drawingml/2006/main" xmlns:r="http://schemas.openxmlformats.org/officeDocument/2006/relationships" xmlns:p="http://schemas.openxmlformats.org/presentationml/2006/main">
-  <p:cSld>
-    <p:spTree>
-      <p:nvGrpSpPr>
-        <p:cNvPr id="1" name=""/>
-        <p:cNvGrpSpPr/>
-        <p:nvPr/>
-      </p:nvGrpSpPr>
-      <p:grpSpPr>
-        <a:xfrm>
-          <a:off x="0" y="0"/>
-          <a:ext cx="0" cy="0"/>
-          <a:chOff x="0" y="0"/>
-          <a:chExt cx="0" cy="0"/>
-        </a:xfrm>
-      </p:grpSpPr>
-      <p:sp>
-        <p:nvSpPr>
-          <p:cNvPr id="2" name="Title 1"/>
-          <p:cNvSpPr>
-            <a:spLocks noGrp="1"/>
-          </p:cNvSpPr>
-          <p:nvPr>
-            <p:ph type="title"/>
-          </p:nvPr>
-        </p:nvSpPr>
-        <p:spPr/>
-        <p:txBody>
-          <a:bodyPr/>
-          <a:lstStyle/>
-          <a:p>
-            <a:r>
-              <a:t>Evidence of a tool request and execution</a:t>
-            </a:r>
-          </a:p>
-        </p:txBody>
-      </p:sp>
-      <p:sp>
-        <p:nvSpPr>
-          <p:cNvPr id="3" name="Content Placeholder 2"/>
-          <p:cNvSpPr>
-            <a:spLocks noGrp="1"/>
-          </p:cNvSpPr>
-          <p:nvPr>
-            <p:ph idx="1"/>
-          </p:nvPr>
-        </p:nvSpPr>
-        <p:spPr>
-          <a:xfrm>
-            <a:off x="319251" y="700000"/>
-            <a:ext cx="6014545" cy="500000"/>
-          </a:xfrm>
-        </p:spPr>
-        <p:txBody>
-          <a:bodyPr wrap="square" anchor="ctr">
-            <a:normAutofit fontScale="70000" lnSpcReduction="20000"/>
-          </a:bodyPr>
-          <a:lstStyle/>
-          <a:p>
-            <a:pPr marL="0" indent="0">
-              <a:buNone/>
-            </a:pPr>
-            <a:r>
-              <a:rPr sz="1400" b="1">
-                <a:solidFill>
-                  <a:srgbClr val="28285E"/>
-                </a:solidFill>
-              </a:rPr>
-              <a:t>The first </a:t>
-            </a:r>
-            <a:r>
-              <a:rPr sz="1400" b="0">
-                <a:solidFill>
-                  <a:srgbClr val="28285E"/>
-                </a:solidFill>
-                <a:latin typeface="Maple Mono NF"/>
-              </a:rPr>
-              <a:t>read_file</a:t>
-            </a:r>
-            <a:r>
-              <a:rPr sz="1400" b="1">
-                <a:solidFill>
-                  <a:srgbClr val="28285E"/>
-                </a:solidFill>
-              </a:rPr>
-              <a:t> call in run </a:t>
-            </a:r>
-            <a:r>
-              <a:rPr sz="1400" b="0">
-                <a:solidFill>
-                  <a:srgbClr val="28285E"/>
-                </a:solidFill>
-                <a:latin typeface="Maple Mono NF"/>
-              </a:rPr>
-              <a:t>bc284c6b</a:t>
-            </a:r>
-            <a:r>
-              <a:rPr sz="1400" b="1">
-                <a:solidFill>
-                  <a:srgbClr val="28285E"/>
-                </a:solidFill>
-              </a:rPr>
-              <a:t> shows what each record or processing stage can establish about execution.</a:t>
-            </a:r>
-          </a:p>
-        </p:txBody>
-      </p:sp>
-      <p:graphicFrame>
-        <p:nvGraphicFramePr>
-          <p:cNvPr id="4" name="Table 3"/>
-          <p:cNvGraphicFramePr>
-            <a:graphicFrameLocks noGrp="1"/>
-          </p:cNvGraphicFramePr>
-          <p:nvPr/>
-        </p:nvGraphicFramePr>
-        <p:xfrm>
-          <a:off x="319251" y="1390000"/>
-          <a:ext cx="6014545" cy="2547900"/>
-        </p:xfrm>
-        <a:graphic>
-          <a:graphicData uri="http://schemas.openxmlformats.org/drawingml/2006/table">
-            <a:tbl>
-              <a:tblPr firstRow="1" bandRow="1">
-                <a:tableStyleId>{5C22544A-7EE6-4342-B048-85BDC9FD1C3A}</a:tableStyleId>
-              </a:tblPr>
-              <a:tblGrid>
-                <a:gridCol w="2100000">
-                  <a:extLst>
-                    <a:ext uri="{9D8B030D-6E8A-4147-A177-3AD203B41FA5}">
-                      <a16:colId xmlns:a16="http://schemas.microsoft.com/office/drawing/2014/main" val="20000"/>
-                    </a:ext>
-                  </a:extLst>
-                </a:gridCol>
-                <a:gridCol w="3914545">
-                  <a:extLst>
-                    <a:ext uri="{9D8B030D-6E8A-4147-A177-3AD203B41FA5}">
-                      <a16:colId xmlns:a16="http://schemas.microsoft.com/office/drawing/2014/main" val="20001"/>
-                    </a:ext>
-                  </a:extLst>
-                </a:gridCol>
-              </a:tblGrid>
-              <a:tr h="300000">
-                <a:tc>
-                  <a:txBody>
-                    <a:bodyPr/>
-                    <a:lstStyle/>
-                    <a:p>
-                      <a:pPr>
-                        <a:buNone/>
-                      </a:pPr>
-                      <a:r>
-                        <a:rPr sz="1000" b="1">
-                          <a:solidFill>
-                            <a:schemeClr val="tx1"/>
-                          </a:solidFill>
-                        </a:rPr>
-                        <a:t>Record or processing stage</a:t>
-                      </a:r>
-                    </a:p>
-                  </a:txBody>
-                  <a:tcPr marL="95250" marR="95250" marT="47625" marB="47625">
-                    <a:lnB w="12700" cap="flat" cmpd="sng" algn="ctr">
-                      <a:solidFill>
-                        <a:schemeClr val="tx1"/>
-                      </a:solidFill>
-                    </a:lnB>
-                    <a:noFill/>
-                  </a:tcPr>
-                </a:tc>
-                <a:tc>
-                  <a:txBody>
-                    <a:bodyPr/>
-                    <a:lstStyle/>
-                    <a:p>
-                      <a:pPr>
-                        <a:buNone/>
-                      </a:pPr>
-                      <a:r>
-                        <a:rPr sz="1000" b="1">
-                          <a:solidFill>
-                            <a:schemeClr val="tx1"/>
-                          </a:solidFill>
-                        </a:rPr>
-                        <a:t>What it establishes</a:t>
-                      </a:r>
-                    </a:p>
-                  </a:txBody>
-                  <a:tcPr marL="95250" marR="95250" marT="47625" marB="47625">
-                    <a:lnB w="12700" cap="flat" cmpd="sng" algn="ctr">
-                      <a:solidFill>
-                        <a:schemeClr val="tx1"/>
-                      </a:solidFill>
-                    </a:lnB>
-                    <a:noFill/>
-                  </a:tcPr>
-                </a:tc>
-                <a:extLst>
-                  <a:ext uri="{0D108BD9-81ED-4DB2-BD59-A6C34878D82A}">
-                    <a16:rowId xmlns:a16="http://schemas.microsoft.com/office/drawing/2014/main" val="10000"/>
-                  </a:ext>
-                </a:extLst>
-              </a:tr>
-              <a:tr h="0">
-                <a:tc>
-                  <a:txBody>
-                    <a:bodyPr/>
-                    <a:lstStyle/>
-                    <a:p>
-                      <a:pPr>
-                        <a:buNone/>
-                      </a:pPr>
-                      <a:r>
-                        <a:rPr sz="1000" b="1">
-                          <a:solidFill>
-                            <a:srgbClr val="28285E"/>
-                          </a:solidFill>
-                        </a:rPr>
-                        <a:t>Model input</a:t>
-                      </a:r>
-                    </a:p>
-                  </a:txBody>
-                  <a:tcPr marL="95250" marR="95250" marT="47625" marB="47625">
-                    <a:lnT w="12700" cap="flat" cmpd="sng" algn="ctr">
-                      <a:solidFill>
-                        <a:schemeClr val="tx1"/>
-                      </a:solidFill>
-                      <a:prstDash val="solid"/>
-                      <a:round/>
-                      <a:headEnd type="none" w="med" len="med"/>
-                      <a:tailEnd type="none" w="med" len="med"/>
-                    </a:lnT>
-                    <a:lnB w="12700" cap="flat" cmpd="sng" algn="ctr">
-                      <a:solidFill>
-                        <a:schemeClr val="tx1"/>
-                      </a:solidFill>
-                    </a:lnB>
-                    <a:noFill/>
-                  </a:tcPr>
-                </a:tc>
-                <a:tc>
-                  <a:txBody>
-                    <a:bodyPr/>
-                    <a:lstStyle/>
-                    <a:p>
-                      <a:pPr>
-                        <a:buNone/>
-                      </a:pPr>
-                      <a:r>
-                        <a:rPr sz="1000" b="0">
-                          <a:solidFill>
-                            <a:schemeClr val="tx1"/>
-                          </a:solidFill>
-                        </a:rPr>
-                        <a:t>The model input contains the available tool definitions. The trace does not record this input.</a:t>
-                      </a:r>
-                    </a:p>
-                  </a:txBody>
-                  <a:tcPr marL="95250" marR="95250" marT="47625" marB="47625">
-                    <a:lnT w="12700" cap="flat" cmpd="sng" algn="ctr">
-                      <a:solidFill>
-                        <a:schemeClr val="tx1"/>
-                      </a:solidFill>
-                      <a:prstDash val="solid"/>
-                      <a:round/>
-                      <a:headEnd type="none" w="med" len="med"/>
-                      <a:tailEnd type="none" w="med" len="med"/>
-                    </a:lnT>
-                    <a:lnB w="12700" cap="flat" cmpd="sng" algn="ctr">
-                      <a:solidFill>
-                        <a:schemeClr val="tx1"/>
-                      </a:solidFill>
-                    </a:lnB>
-                    <a:noFill/>
-                  </a:tcPr>
-                </a:tc>
-                <a:extLst>
-                  <a:ext uri="{0D108BD9-81ED-4DB2-BD59-A6C34878D82A}">
-                    <a16:rowId xmlns:a16="http://schemas.microsoft.com/office/drawing/2014/main" val="10001"/>
-                  </a:ext>
-                </a:extLst>
-              </a:tr>
-              <a:tr h="0">
-                <a:tc>
-                  <a:txBody>
-                    <a:bodyPr/>
-                    <a:lstStyle/>
-                    <a:p>
-                      <a:pPr>
-                        <a:buNone/>
-                      </a:pPr>
-                      <a:r>
-                        <a:rPr sz="1000" b="1">
-                          <a:solidFill>
-                            <a:srgbClr val="28285E"/>
-                          </a:solidFill>
-                        </a:rPr>
-                        <a:t>Model response and </a:t>
-                      </a:r>
-                      <a:r>
-                        <a:rPr sz="1000" b="0">
-                          <a:solidFill>
-                            <a:srgbClr val="28285E"/>
-                          </a:solidFill>
-                          <a:latin typeface="Maple Mono NF"/>
-                        </a:rPr>
-                        <a:t>model_call</a:t>
-                      </a:r>
-                      <a:r>
-                        <a:rPr sz="1000" b="1">
-                          <a:solidFill>
-                            <a:srgbClr val="28285E"/>
-                          </a:solidFill>
-                        </a:rPr>
-                        <a:t> event, step 3</a:t>
-                      </a:r>
-                    </a:p>
-                  </a:txBody>
-                  <a:tcPr marL="95250" marR="95250" marT="47625" marB="47625">
-                    <a:lnT w="12700" cap="flat" cmpd="sng" algn="ctr">
-                      <a:solidFill>
-                        <a:schemeClr val="tx1"/>
-                      </a:solidFill>
-                      <a:prstDash val="solid"/>
-                      <a:round/>
-                      <a:headEnd type="none" w="med" len="med"/>
-                      <a:tailEnd type="none" w="med" len="med"/>
-                    </a:lnT>
-                    <a:lnB w="12700" cap="flat" cmpd="sng" algn="ctr">
-                      <a:solidFill>
-                        <a:schemeClr val="tx1"/>
-                      </a:solidFill>
-                    </a:lnB>
-                    <a:noFill/>
-                  </a:tcPr>
-                </a:tc>
-                <a:tc>
-                  <a:txBody>
-                    <a:bodyPr/>
-                    <a:lstStyle/>
-                    <a:p>
-                      <a:pPr>
-                        <a:buNone/>
-                      </a:pPr>
-                      <a:r>
-                        <a:rPr sz="1000" b="0">
-                          <a:solidFill>
-                            <a:schemeClr val="tx1"/>
-                          </a:solidFill>
-                        </a:rPr>
-                        <a:t>The model asked to call a tool. The request alone does not establish that the tool ran.</a:t>
-                      </a:r>
-                    </a:p>
-                  </a:txBody>
-                  <a:tcPr marL="95250" marR="95250" marT="47625" marB="47625">
-                    <a:lnT w="12700" cap="flat" cmpd="sng" algn="ctr">
-                      <a:solidFill>
-                        <a:schemeClr val="tx1"/>
-                      </a:solidFill>
-                      <a:prstDash val="solid"/>
-                      <a:round/>
-                      <a:headEnd type="none" w="med" len="med"/>
-                      <a:tailEnd type="none" w="med" len="med"/>
-                    </a:lnT>
-                    <a:lnB w="12700" cap="flat" cmpd="sng" algn="ctr">
-                      <a:solidFill>
-                        <a:schemeClr val="tx1"/>
-                      </a:solidFill>
-                    </a:lnB>
-                    <a:noFill/>
-                  </a:tcPr>
-                </a:tc>
-                <a:extLst>
-                  <a:ext uri="{0D108BD9-81ED-4DB2-BD59-A6C34878D82A}">
-                    <a16:rowId xmlns:a16="http://schemas.microsoft.com/office/drawing/2014/main" val="10002"/>
-                  </a:ext>
-                </a:extLst>
-              </a:tr>
-              <a:tr h="0">
-                <a:tc>
-                  <a:txBody>
-                    <a:bodyPr/>
-                    <a:lstStyle/>
-                    <a:p>
-                      <a:pPr>
-                        <a:buNone/>
-                      </a:pPr>
-                      <a:r>
-                        <a:rPr sz="1000" b="1">
-                          <a:solidFill>
-                            <a:srgbClr val="28285E"/>
-                          </a:solidFill>
-                        </a:rPr>
-                        <a:t>tool_request event, step 5</a:t>
-                      </a:r>
-                    </a:p>
-                  </a:txBody>
-                  <a:tcPr marL="95250" marR="95250" marT="47625" marB="47625">
-                    <a:lnT w="12700" cap="flat" cmpd="sng" algn="ctr">
-                      <a:solidFill>
-                        <a:schemeClr val="tx1"/>
-                      </a:solidFill>
-                      <a:prstDash val="solid"/>
-                      <a:round/>
-                      <a:headEnd type="none" w="med" len="med"/>
-                      <a:tailEnd type="none" w="med" len="med"/>
-                    </a:lnT>
-                    <a:lnB w="12700" cap="flat" cmpd="sng" algn="ctr">
-                      <a:solidFill>
-                        <a:schemeClr val="tx1"/>
-                      </a:solidFill>
-                    </a:lnB>
-                    <a:noFill/>
-                  </a:tcPr>
-                </a:tc>
-                <a:tc>
-                  <a:txBody>
-                    <a:bodyPr/>
-                    <a:lstStyle/>
-                    <a:p>
-                      <a:pPr>
-                        <a:buNone/>
-                      </a:pPr>
-                      <a:r>
-                        <a:rPr sz="1000" b="0">
-                          <a:solidFill>
-                            <a:schemeClr val="tx1"/>
-                          </a:solidFill>
-                        </a:rPr>
-                        <a:t>The dispatcher received the request and began checking it.</a:t>
-                      </a:r>
-                    </a:p>
-                  </a:txBody>
-                  <a:tcPr marL="95250" marR="95250" marT="47625" marB="47625">
-                    <a:lnT w="12700" cap="flat" cmpd="sng" algn="ctr">
-                      <a:solidFill>
-                        <a:schemeClr val="tx1"/>
-                      </a:solidFill>
-                      <a:prstDash val="solid"/>
-                      <a:round/>
-                      <a:headEnd type="none" w="med" len="med"/>
-                      <a:tailEnd type="none" w="med" len="med"/>
-                    </a:lnT>
-                    <a:lnB w="12700" cap="flat" cmpd="sng" algn="ctr">
-                      <a:solidFill>
-                        <a:schemeClr val="tx1"/>
-                      </a:solidFill>
-                    </a:lnB>
-                    <a:noFill/>
-                  </a:tcPr>
-                </a:tc>
-                <a:extLst>
-                  <a:ext uri="{0D108BD9-81ED-4DB2-BD59-A6C34878D82A}">
-                    <a16:rowId xmlns:a16="http://schemas.microsoft.com/office/drawing/2014/main" val="10003"/>
-                  </a:ext>
-                </a:extLst>
-              </a:tr>
-              <a:tr h="0">
-                <a:tc>
-                  <a:txBody>
-                    <a:bodyPr/>
-                    <a:lstStyle/>
-                    <a:p>
-                      <a:pPr>
-                        <a:buNone/>
-                      </a:pPr>
-                      <a:r>
-                        <a:rPr sz="1000" b="1">
-                          <a:solidFill>
-                            <a:srgbClr val="28285E"/>
-                          </a:solidFill>
-                        </a:rPr>
-                        <a:t>Dispatcher</a:t>
-                      </a:r>
-                    </a:p>
-                  </a:txBody>
-                  <a:tcPr marL="95250" marR="95250" marT="47625" marB="47625">
-                    <a:lnT w="12700" cap="flat" cmpd="sng" algn="ctr">
-                      <a:solidFill>
-                        <a:schemeClr val="tx1"/>
-                      </a:solidFill>
-                      <a:prstDash val="solid"/>
-                      <a:round/>
-                      <a:headEnd type="none" w="med" len="med"/>
-                      <a:tailEnd type="none" w="med" len="med"/>
-                    </a:lnT>
-                    <a:lnB w="12700" cap="flat" cmpd="sng" algn="ctr">
-                      <a:solidFill>
-                        <a:schemeClr val="tx1"/>
-                      </a:solidFill>
-                    </a:lnB>
-                    <a:noFill/>
-                  </a:tcPr>
-                </a:tc>
-                <a:tc>
-                  <a:txBody>
-                    <a:bodyPr/>
-                    <a:lstStyle/>
-                    <a:p>
-                      <a:pPr>
-                        <a:buNone/>
-                      </a:pPr>
-                      <a:r>
-                        <a:rPr sz="1000" b="0">
-                          <a:solidFill>
-                            <a:schemeClr val="tx1"/>
-                          </a:solidFill>
-                        </a:rPr>
-                        <a:t>The dispatcher checks the request. Refusal reasons appear in </a:t>
-                      </a:r>
-                      <a:r>
-                        <a:rPr sz="1000" b="0">
-                          <a:solidFill>
-                            <a:schemeClr val="tx1"/>
-                          </a:solidFill>
-                          <a:latin typeface="Maple Mono NF"/>
-                        </a:rPr>
-                        <a:t>tool_result</a:t>
-                      </a:r>
-                      <a:r>
-                        <a:rPr sz="1000" b="0">
-                          <a:solidFill>
-                            <a:schemeClr val="tx1"/>
-                          </a:solidFill>
-                        </a:rPr>
-                        <a:t>, with no separate event for each check.</a:t>
-                      </a:r>
-                    </a:p>
-                  </a:txBody>
-                  <a:tcPr marL="95250" marR="95250" marT="47625" marB="47625">
-                    <a:lnT w="12700" cap="flat" cmpd="sng" algn="ctr">
-                      <a:solidFill>
-                        <a:schemeClr val="tx1"/>
-                      </a:solidFill>
-                      <a:prstDash val="solid"/>
-                      <a:round/>
-                      <a:headEnd type="none" w="med" len="med"/>
-                      <a:tailEnd type="none" w="med" len="med"/>
-                    </a:lnT>
-                    <a:lnB w="12700" cap="flat" cmpd="sng" algn="ctr">
-                      <a:solidFill>
-                        <a:schemeClr val="tx1"/>
-                      </a:solidFill>
-                    </a:lnB>
-                    <a:noFill/>
-                  </a:tcPr>
-                </a:tc>
-                <a:extLst>
-                  <a:ext uri="{0D108BD9-81ED-4DB2-BD59-A6C34878D82A}">
-                    <a16:rowId xmlns:a16="http://schemas.microsoft.com/office/drawing/2014/main" val="10004"/>
-                  </a:ext>
-                </a:extLst>
-              </a:tr>
-              <a:tr h="0">
-                <a:tc>
-                  <a:txBody>
-                    <a:bodyPr/>
-                    <a:lstStyle/>
-                    <a:p>
-                      <a:pPr>
-                        <a:buNone/>
-                      </a:pPr>
-                      <a:r>
-                        <a:rPr sz="1000" b="1">
-                          <a:solidFill>
-                            <a:srgbClr val="28285E"/>
-                          </a:solidFill>
-                        </a:rPr>
-                        <a:t>tool_result event, step 6</a:t>
-                      </a:r>
-                    </a:p>
-                  </a:txBody>
-                  <a:tcPr marL="95250" marR="95250" marT="47625" marB="47625">
-                    <a:lnT w="12700" cap="flat" cmpd="sng" algn="ctr">
-                      <a:solidFill>
-                        <a:schemeClr val="tx1"/>
-                      </a:solidFill>
-                      <a:prstDash val="solid"/>
-                      <a:round/>
-                      <a:headEnd type="none" w="med" len="med"/>
-                      <a:tailEnd type="none" w="med" len="med"/>
-                    </a:lnT>
-                    <a:lnB w="12700" cap="flat" cmpd="sng" algn="ctr">
-                      <a:solidFill>
-                        <a:schemeClr val="tx1"/>
-                      </a:solidFill>
-                    </a:lnB>
-                    <a:noFill/>
-                  </a:tcPr>
-                </a:tc>
-                <a:tc>
-                  <a:txBody>
-                    <a:bodyPr/>
-                    <a:lstStyle/>
-                    <a:p>
-                      <a:pPr>
-                        <a:buNone/>
-                      </a:pPr>
-                      <a:r>
-                        <a:rPr sz="1000" b="0">
-                          <a:solidFill>
-                            <a:schemeClr val="tx1"/>
-                          </a:solidFill>
-                        </a:rPr>
-                        <a:t>The tool returned 1,665 characters. The event records their count and omits the text.</a:t>
-                      </a:r>
-                    </a:p>
-                  </a:txBody>
-                  <a:tcPr marL="95250" marR="95250" marT="47625" marB="47625">
-                    <a:lnT w="12700" cap="flat" cmpd="sng" algn="ctr">
-                      <a:solidFill>
-                        <a:schemeClr val="tx1"/>
-                      </a:solidFill>
-                      <a:prstDash val="solid"/>
-                      <a:round/>
-                      <a:headEnd type="none" w="med" len="med"/>
-                      <a:tailEnd type="none" w="med" len="med"/>
-                    </a:lnT>
-                    <a:lnB w="12700" cap="flat" cmpd="sng" algn="ctr">
-                      <a:solidFill>
-                        <a:schemeClr val="tx1"/>
-                      </a:solidFill>
-                    </a:lnB>
-                    <a:noFill/>
-                  </a:tcPr>
-                </a:tc>
-                <a:extLst>
-                  <a:ext uri="{0D108BD9-81ED-4DB2-BD59-A6C34878D82A}">
-                    <a16:rowId xmlns:a16="http://schemas.microsoft.com/office/drawing/2014/main" val="10005"/>
-                  </a:ext>
-                </a:extLst>
-              </a:tr>
-              <a:tr h="0">
-                <a:tc>
-                  <a:txBody>
-                    <a:bodyPr/>
-                    <a:lstStyle/>
-                    <a:p>
-                      <a:pPr>
-                        <a:buNone/>
-                      </a:pPr>
-                      <a:r>
-                        <a:rPr sz="1000" b="1">
-                          <a:solidFill>
-                            <a:srgbClr val="28285E"/>
-                          </a:solidFill>
-                        </a:rPr>
-                        <a:t>State and next input</a:t>
-                      </a:r>
-                    </a:p>
-                  </a:txBody>
-                  <a:tcPr marL="95250" marR="95250" marT="47625" marB="47625">
-                    <a:lnT w="12700" cap="flat" cmpd="sng" algn="ctr">
-                      <a:solidFill>
-                        <a:schemeClr val="tx1"/>
-                      </a:solidFill>
-                      <a:prstDash val="solid"/>
-                      <a:round/>
-                      <a:headEnd type="none" w="med" len="med"/>
-                      <a:tailEnd type="none" w="med" len="med"/>
-                    </a:lnT>
-                    <a:lnB w="12700" cap="flat" cmpd="sng" algn="ctr">
-                      <a:solidFill>
-                        <a:schemeClr val="tx1"/>
-                      </a:solidFill>
-                    </a:lnB>
-                    <a:noFill/>
-                  </a:tcPr>
-                </a:tc>
-                <a:tc>
-                  <a:txBody>
-                    <a:bodyPr/>
-                    <a:lstStyle/>
-                    <a:p>
-                      <a:pPr>
-                        <a:buNone/>
-                      </a:pPr>
-                      <a:r>
-                        <a:rPr sz="1000" b="0">
-                          <a:solidFill>
-                            <a:schemeClr val="tx1"/>
-                          </a:solidFill>
-                        </a:rPr>
-                        <a:t>The runtime stores the observation in state and adds a tool message to the next model input, at step 7.</a:t>
-                      </a:r>
-                    </a:p>
-                  </a:txBody>
-                  <a:tcPr marL="95250" marR="95250" marT="47625" marB="47625">
-                    <a:lnT w="12700" cap="flat" cmpd="sng" algn="ctr">
-                      <a:solidFill>
-                        <a:schemeClr val="tx1"/>
-                      </a:solidFill>
-                      <a:prstDash val="solid"/>
-                      <a:round/>
-                      <a:headEnd type="none" w="med" len="med"/>
-                      <a:tailEnd type="none" w="med" len="med"/>
-                    </a:lnT>
-                    <a:lnB w="12700" cap="flat" cmpd="sng" algn="ctr">
-                      <a:solidFill>
-                        <a:schemeClr val="tx1"/>
-                      </a:solidFill>
-                    </a:lnB>
-                    <a:noFill/>
-                  </a:tcPr>
-                </a:tc>
-                <a:extLst>
-                  <a:ext uri="{0D108BD9-81ED-4DB2-BD59-A6C34878D82A}">
-                    <a16:rowId xmlns:a16="http://schemas.microsoft.com/office/drawing/2014/main" val="10006"/>
-                  </a:ext>
-                </a:extLst>
-              </a:tr>
-            </a:tbl>
-          </a:graphicData>
-        </a:graphic>
-      </p:graphicFrame>
-      <p:sp>
-        <p:nvSpPr>
-          <p:cNvPr id="5" name="Rectangle 4"/>
-          <p:cNvSpPr/>
-          <p:nvPr/>
-        </p:nvSpPr>
-        <p:spPr>
-          <a:xfrm>
-            <a:off x="319251" y="4135012"/>
-            <a:ext cx="6014545" cy="562963"/>
-          </a:xfrm>
-          <a:prstGeom prst="rect">
-            <a:avLst/>
-          </a:prstGeom>
-          <a:solidFill>
-            <a:srgbClr val="28285E"/>
-          </a:solidFill>
-          <a:ln>
-            <a:solidFill>
-              <a:srgbClr val="28285E"/>
-            </a:solidFill>
-          </a:ln>
-          <a:effectLst/>
-        </p:spPr>
-        <p:style>
-          <a:lnRef idx="1">
-            <a:schemeClr val="accent1"/>
-          </a:lnRef>
-          <a:fillRef idx="3">
-            <a:schemeClr val="accent1"/>
-          </a:fillRef>
-          <a:effectRef idx="2">
-            <a:schemeClr val="accent1"/>
-          </a:effectRef>
-          <a:fontRef idx="minor">
-            <a:schemeClr val="lt1"/>
-          </a:fontRef>
-        </p:style>
-        <p:txBody>
-          <a:bodyPr wrap="square" lIns="137160" rIns="137160" rtlCol="0" anchor="ctr"/>
-          <a:lstStyle/>
-          <a:p>
-            <a:pPr algn="ctr"/>
-            <a:r>
-              <a:rPr sz="1200" b="1">
-                <a:solidFill>
-                  <a:schemeClr val="tx2"/>
-                </a:solidFill>
-              </a:rPr>
-              <a:t>Table 6 in the lecture notes. The successful </a:t>
-            </a:r>
-            <a:r>
-              <a:rPr sz="1200" b="0">
-                <a:solidFill>
-                  <a:schemeClr val="tx2"/>
-                </a:solidFill>
-                <a:latin typeface="Maple Mono NF"/>
-              </a:rPr>
-              <a:t>tool_result</a:t>
-            </a:r>
-            <a:r>
-              <a:rPr sz="1200" b="1">
-                <a:solidFill>
-                  <a:schemeClr val="tx2"/>
-                </a:solidFill>
-              </a:rPr>
-              <a:t> event establishes that the function ran and returned.</a:t>
-            </a:r>
-          </a:p>
-        </p:txBody>
-      </p:sp>
-    </p:spTree>
-  </p:cSld>
-  <p:clrMapOvr>
-    <a:masterClrMapping/>
-  </p:clrMapOvr>
-</p:sld>
-</file>
-
-<file path=ppt/slides/slide65.xml><?xml version="1.0" encoding="utf-8"?>
-<p:sld xmlns:a="http://schemas.openxmlformats.org/drawingml/2006/main" xmlns:r="http://schemas.openxmlformats.org/officeDocument/2006/relationships" xmlns:p="http://schemas.openxmlformats.org/presentationml/2006/main">
-  <p:cSld>
-    <p:spTree>
-      <p:nvGrpSpPr>
-        <p:cNvPr id="1" name=""/>
-        <p:cNvGrpSpPr/>
-        <p:nvPr/>
-      </p:nvGrpSpPr>
-      <p:grpSpPr>
-        <a:xfrm>
-          <a:off x="0" y="0"/>
-          <a:ext cx="0" cy="0"/>
-          <a:chOff x="0" y="0"/>
-          <a:chExt cx="0" cy="0"/>
-        </a:xfrm>
-      </p:grpSpPr>
-      <p:sp>
-        <p:nvSpPr>
-          <p:cNvPr id="2" name="Title 1"/>
-          <p:cNvSpPr>
-            <a:spLocks noGrp="1"/>
-          </p:cNvSpPr>
-          <p:nvPr>
-            <p:ph type="title"/>
-          </p:nvPr>
-        </p:nvSpPr>
-        <p:spPr/>
-        <p:txBody>
-          <a:bodyPr/>
-          <a:lstStyle/>
-          <a:p>
-            <a:r>
-              <a:t>Complete mediation of resource access</a:t>
-            </a:r>
-          </a:p>
-        </p:txBody>
-      </p:sp>
-      <p:sp>
-        <p:nvSpPr>
-          <p:cNvPr id="3" name="Content Placeholder 2"/>
-          <p:cNvSpPr>
-            <a:spLocks noGrp="1"/>
-          </p:cNvSpPr>
-          <p:nvPr>
-            <p:ph idx="1"/>
-          </p:nvPr>
-        </p:nvSpPr>
-        <p:spPr>
-          <a:xfrm>
-            <a:off x="319251" y="700000"/>
-            <a:ext cx="6014545" cy="2440280"/>
-          </a:xfrm>
-        </p:spPr>
-        <p:txBody>
-          <a:bodyPr wrap="square" anchor="ctr">
-            <a:normAutofit fontScale="92500" lnSpcReduction="10000"/>
-          </a:bodyPr>
-          <a:lstStyle/>
-          <a:p>
-            <a:pPr marL="0" indent="0">
-              <a:buNone/>
-            </a:pPr>
-            <a:r>
-              <a:rPr sz="1400" b="1">
-                <a:solidFill>
-                  <a:srgbClr val="28285E"/>
-                </a:solidFill>
-              </a:rPr>
-              <a:t>The model requests an action. Before executing it, the runtime checks whether the action is permitted.</a:t>
-            </a:r>
-          </a:p>
-          <a:p>
-            <a:pPr marL="400050" indent="-285750">
-              <a:spcBef>
-                <a:spcPts val="600"/>
-              </a:spcBef>
-              <a:spcAft>
-                <a:spcPts val="600"/>
-              </a:spcAft>
-              <a:buClr>
-                <a:srgbClr val="28285E"/>
-              </a:buClr>
-              <a:buSzPts val="1260"/>
-              <a:buFont typeface="+mn-lt"/>
-              <a:buChar char="●"/>
-            </a:pPr>
-            <a:r>
-              <a:rPr sz="1400" b="1">
-                <a:solidFill>
-                  <a:schemeClr val="tx1"/>
-                </a:solidFill>
-              </a:rPr>
-              <a:t>Every way of reaching a protected resource</a:t>
-            </a:r>
-            <a:r>
-              <a:rPr sz="1400" b="0">
-                <a:solidFill>
-                  <a:schemeClr val="tx1"/>
-                </a:solidFill>
-              </a:rPr>
-              <a:t>, such as a file, must pass through the required checks.</a:t>
-            </a:r>
-          </a:p>
-          <a:p>
-            <a:pPr marL="400050" indent="-285750">
-              <a:spcBef>
-                <a:spcPts val="600"/>
-              </a:spcBef>
-              <a:spcAft>
-                <a:spcPts val="600"/>
-              </a:spcAft>
-              <a:buClr>
-                <a:srgbClr val="28285E"/>
-              </a:buClr>
-              <a:buSzPts val="1260"/>
-              <a:buFont typeface="+mn-lt"/>
-              <a:buChar char="●"/>
-            </a:pPr>
-            <a:r>
-              <a:rPr sz="1400" b="1">
-                <a:solidFill>
-                  <a:schemeClr val="tx1"/>
-                </a:solidFill>
-              </a:rPr>
-              <a:t>A new tool or a wildcard file pattern (glob)</a:t>
-            </a:r>
-            <a:r>
-              <a:rPr sz="1400" b="0">
-                <a:solidFill>
-                  <a:schemeClr val="tx1"/>
-                </a:solidFill>
-              </a:rPr>
-              <a:t> may reach files without passing through the existing path check.</a:t>
-            </a:r>
-          </a:p>
-          <a:p>
-            <a:pPr marL="400050" indent="-285750">
-              <a:spcBef>
-                <a:spcPts val="600"/>
-              </a:spcBef>
-              <a:spcAft>
-                <a:spcPts val="600"/>
-              </a:spcAft>
-              <a:buClr>
-                <a:srgbClr val="28285E"/>
-              </a:buClr>
-              <a:buSzPts val="1260"/>
-              <a:buFont typeface="+mn-lt"/>
-              <a:buChar char="●"/>
-            </a:pPr>
-            <a:r>
-              <a:rPr sz="1400" b="1">
-                <a:solidFill>
-                  <a:schemeClr val="tx1"/>
-                </a:solidFill>
-              </a:rPr>
-              <a:t>Checking every request</a:t>
-            </a:r>
-            <a:r>
-              <a:rPr sz="1400" b="0">
-                <a:solidFill>
-                  <a:schemeClr val="tx1"/>
-                </a:solidFill>
-              </a:rPr>
-              <a:t> establishes that the policy is applied. The policy may still contain errors.</a:t>
-            </a:r>
-          </a:p>
-        </p:txBody>
-      </p:sp>
-      <p:sp>
-        <p:nvSpPr>
-          <p:cNvPr id="4" name="Rectangle 3"/>
-          <p:cNvSpPr/>
-          <p:nvPr/>
-        </p:nvSpPr>
-        <p:spPr>
-          <a:xfrm>
-            <a:off x="319251" y="3330280"/>
-            <a:ext cx="6014545" cy="710801"/>
-          </a:xfrm>
-          <a:prstGeom prst="rect">
-            <a:avLst/>
-          </a:prstGeom>
-          <a:solidFill>
-            <a:srgbClr val="28285E"/>
-          </a:solidFill>
-          <a:ln>
-            <a:solidFill>
-              <a:srgbClr val="28285E"/>
-            </a:solidFill>
-          </a:ln>
-          <a:effectLst/>
-        </p:spPr>
-        <p:style>
-          <a:lnRef idx="1">
-            <a:schemeClr val="accent1"/>
-          </a:lnRef>
-          <a:fillRef idx="3">
-            <a:schemeClr val="accent1"/>
-          </a:fillRef>
-          <a:effectRef idx="2">
-            <a:schemeClr val="accent1"/>
-          </a:effectRef>
-          <a:fontRef idx="minor">
-            <a:schemeClr val="lt1"/>
-          </a:fontRef>
-        </p:style>
-        <p:txBody>
-          <a:bodyPr wrap="square" lIns="182880" rIns="182880" rtlCol="0" anchor="ctr"/>
-          <a:lstStyle/>
-          <a:p>
-            <a:pPr algn="ctr"/>
-            <a:r>
-              <a:rPr sz="1400" b="0">
-                <a:solidFill>
-                  <a:schemeClr val="tx2"/>
-                </a:solidFill>
-              </a:rPr>
-              <a:t>Complete mediation requires every request for a protected resource to pass through a guard, which checks whether access is permitted.</a:t>
-            </a:r>
-          </a:p>
-        </p:txBody>
-      </p:sp>
-      <p:sp>
-        <p:nvSpPr>
-          <p:cNvPr id="5" name="Rectangle 4"/>
-          <p:cNvSpPr/>
-          <p:nvPr/>
-        </p:nvSpPr>
-        <p:spPr>
-          <a:xfrm>
-            <a:off x="319251" y="4231081"/>
-            <a:ext cx="6014545" cy="430000"/>
-          </a:xfrm>
-          <a:prstGeom prst="rect">
-            <a:avLst/>
-          </a:prstGeom>
-          <a:solidFill>
-            <a:srgbClr val="CACAE5"/>
-          </a:solidFill>
-          <a:ln>
-            <a:solidFill>
-              <a:srgbClr val="28285E"/>
-            </a:solidFill>
-          </a:ln>
-          <a:effectLst/>
-        </p:spPr>
-        <p:style>
-          <a:lnRef idx="1">
-            <a:schemeClr val="accent1"/>
-          </a:lnRef>
-          <a:fillRef idx="3">
-            <a:schemeClr val="accent1"/>
-          </a:fillRef>
-          <a:effectRef idx="2">
-            <a:schemeClr val="accent1"/>
-          </a:effectRef>
-          <a:fontRef idx="minor">
-            <a:schemeClr val="lt1"/>
-          </a:fontRef>
-        </p:style>
-        <p:txBody>
-          <a:bodyPr wrap="square" lIns="137160" rIns="137160" rtlCol="0" anchor="ctr"/>
-          <a:lstStyle/>
-          <a:p>
-            <a:pPr algn="ctr"/>
-            <a:r>
-              <a:rPr sz="1200" b="1">
-                <a:solidFill>
-                  <a:srgbClr val="28285E"/>
-                </a:solidFill>
-              </a:rPr>
-              <a:t>We must check every route by which a tool can reach the resource.</a:t>
-            </a:r>
-          </a:p>
-        </p:txBody>
-      </p:sp>
-    </p:spTree>
-  </p:cSld>
-  <p:clrMapOvr>
-    <a:masterClrMapping/>
-  </p:clrMapOvr>
-</p:sld>
-</file>
-
-<file path=ppt/slides/slide66.xml><?xml version="1.0" encoding="utf-8"?>
-<p:sld xmlns:a="http://schemas.openxmlformats.org/drawingml/2006/main" xmlns:r="http://schemas.openxmlformats.org/officeDocument/2006/relationships" xmlns:p="http://schemas.openxmlformats.org/presentationml/2006/main">
-  <p:cSld>
-    <p:spTree>
-      <p:nvGrpSpPr>
-        <p:cNvPr id="1" name=""/>
-        <p:cNvGrpSpPr/>
-        <p:nvPr/>
-      </p:nvGrpSpPr>
-      <p:grpSpPr>
-        <a:xfrm>
-          <a:off x="0" y="0"/>
-          <a:ext cx="0" cy="0"/>
-          <a:chOff x="0" y="0"/>
-          <a:chExt cx="0" cy="0"/>
-        </a:xfrm>
-      </p:grpSpPr>
-      <p:sp>
-        <p:nvSpPr>
-          <p:cNvPr id="2" name="Title 1"/>
-          <p:cNvSpPr>
-            <a:spLocks noGrp="1"/>
-          </p:cNvSpPr>
-          <p:nvPr>
-            <p:ph type="title"/>
-          </p:nvPr>
-        </p:nvSpPr>
-        <p:spPr/>
-        <p:txBody>
-          <a:bodyPr/>
-          <a:lstStyle/>
-          <a:p>
-            <a:r>
-              <a:t>Guarantees and their enforcing components</a:t>
-            </a:r>
-          </a:p>
-        </p:txBody>
-      </p:sp>
-      <p:sp>
-        <p:nvSpPr>
-          <p:cNvPr id="3" name="Content Placeholder 2"/>
-          <p:cNvSpPr>
-            <a:spLocks noGrp="1"/>
-          </p:cNvSpPr>
-          <p:nvPr>
-            <p:ph idx="1"/>
-          </p:nvPr>
-        </p:nvSpPr>
-        <p:spPr>
-          <a:xfrm>
-            <a:off x="319251" y="700000"/>
-            <a:ext cx="6014545" cy="500000"/>
-          </a:xfrm>
-        </p:spPr>
-        <p:txBody>
-          <a:bodyPr wrap="square" anchor="ctr">
-            <a:normAutofit fontScale="70000" lnSpcReduction="20000"/>
-          </a:bodyPr>
-          <a:lstStyle/>
-          <a:p>
-            <a:pPr marL="0" indent="0">
-              <a:buNone/>
-            </a:pPr>
-            <a:r>
-              <a:rPr sz="1400" b="1">
-                <a:solidFill>
-                  <a:srgbClr val="28285E"/>
-                </a:solidFill>
-              </a:rPr>
-              <a:t>This table shows how the runtime enforces each desired guarantee. The row about reads identifies a missing path check.</a:t>
-            </a:r>
-          </a:p>
-        </p:txBody>
-      </p:sp>
-      <p:graphicFrame>
-        <p:nvGraphicFramePr>
-          <p:cNvPr id="4" name="Table 3"/>
-          <p:cNvGraphicFramePr>
-            <a:graphicFrameLocks noGrp="1"/>
-          </p:cNvGraphicFramePr>
-          <p:nvPr/>
-        </p:nvGraphicFramePr>
-        <p:xfrm>
-          <a:off x="319251" y="1390000"/>
-          <a:ext cx="6014545" cy="2795550"/>
-        </p:xfrm>
-        <a:graphic>
-          <a:graphicData uri="http://schemas.openxmlformats.org/drawingml/2006/table">
-            <a:tbl>
-              <a:tblPr firstRow="1" bandRow="1">
-                <a:tableStyleId>{5C22544A-7EE6-4342-B048-85BDC9FD1C3A}</a:tableStyleId>
-              </a:tblPr>
-              <a:tblGrid>
-                <a:gridCol w="2500000">
-                  <a:extLst>
-                    <a:ext uri="{9D8B030D-6E8A-4147-A177-3AD203B41FA5}">
-                      <a16:colId xmlns:a16="http://schemas.microsoft.com/office/drawing/2014/main" val="20000"/>
-                    </a:ext>
-                  </a:extLst>
-                </a:gridCol>
-                <a:gridCol w="3514545">
-                  <a:extLst>
-                    <a:ext uri="{9D8B030D-6E8A-4147-A177-3AD203B41FA5}">
-                      <a16:colId xmlns:a16="http://schemas.microsoft.com/office/drawing/2014/main" val="20001"/>
-                    </a:ext>
-                  </a:extLst>
-                </a:gridCol>
-              </a:tblGrid>
-              <a:tr h="300000">
-                <a:tc>
-                  <a:txBody>
-                    <a:bodyPr/>
-                    <a:lstStyle/>
-                    <a:p>
-                      <a:pPr>
-                        <a:buNone/>
-                      </a:pPr>
-                      <a:r>
-                        <a:rPr sz="1000" b="1">
-                          <a:solidFill>
-                            <a:schemeClr val="tx1"/>
-                          </a:solidFill>
-                        </a:rPr>
-                        <a:t>Guarantee</a:t>
-                      </a:r>
-                    </a:p>
-                  </a:txBody>
-                  <a:tcPr marL="95250" marR="95250" marT="47625" marB="47625">
-                    <a:lnB w="12700" cap="flat" cmpd="sng" algn="ctr">
-                      <a:solidFill>
-                        <a:schemeClr val="tx1"/>
-                      </a:solidFill>
-                    </a:lnB>
-                    <a:noFill/>
-                  </a:tcPr>
-                </a:tc>
-                <a:tc>
-                  <a:txBody>
-                    <a:bodyPr/>
-                    <a:lstStyle/>
-                    <a:p>
-                      <a:pPr>
-                        <a:buNone/>
-                      </a:pPr>
-                      <a:r>
-                        <a:rPr sz="1000" b="1">
-                          <a:solidFill>
-                            <a:schemeClr val="tx1"/>
-                          </a:solidFill>
-                        </a:rPr>
-                        <a:t>Where it is enforced</a:t>
-                      </a:r>
-                    </a:p>
-                  </a:txBody>
-                  <a:tcPr marL="95250" marR="95250" marT="47625" marB="47625">
-                    <a:lnB w="12700" cap="flat" cmpd="sng" algn="ctr">
-                      <a:solidFill>
-                        <a:schemeClr val="tx1"/>
-                      </a:solidFill>
-                    </a:lnB>
-                    <a:noFill/>
-                  </a:tcPr>
-                </a:tc>
-                <a:extLst>
-                  <a:ext uri="{0D108BD9-81ED-4DB2-BD59-A6C34878D82A}">
-                    <a16:rowId xmlns:a16="http://schemas.microsoft.com/office/drawing/2014/main" val="10000"/>
-                  </a:ext>
-                </a:extLst>
-              </a:tr>
-              <a:tr h="0">
-                <a:tc>
-                  <a:txBody>
-                    <a:bodyPr/>
-                    <a:lstStyle/>
-                    <a:p>
-                      <a:pPr>
-                        <a:buNone/>
-                      </a:pPr>
-                      <a:r>
-                        <a:rPr sz="1000" b="1">
-                          <a:solidFill>
-                            <a:srgbClr val="28285E"/>
-                          </a:solidFill>
-                        </a:rPr>
-                        <a:t>Only registered tools run</a:t>
-                      </a:r>
-                    </a:p>
-                  </a:txBody>
-                  <a:tcPr marL="95250" marR="95250" marT="47625" marB="47625">
-                    <a:lnT w="12700" cap="flat" cmpd="sng" algn="ctr">
-                      <a:solidFill>
-                        <a:schemeClr val="tx1"/>
-                      </a:solidFill>
-                      <a:prstDash val="solid"/>
-                      <a:round/>
-                      <a:headEnd type="none" w="med" len="med"/>
-                      <a:tailEnd type="none" w="med" len="med"/>
-                    </a:lnT>
-                    <a:lnB w="12700" cap="flat" cmpd="sng" algn="ctr">
-                      <a:solidFill>
-                        <a:schemeClr val="tx1"/>
-                      </a:solidFill>
-                    </a:lnB>
-                    <a:noFill/>
-                  </a:tcPr>
-                </a:tc>
-                <a:tc>
-                  <a:txBody>
-                    <a:bodyPr/>
-                    <a:lstStyle/>
-                    <a:p>
-                      <a:pPr>
-                        <a:buNone/>
-                      </a:pPr>
-                      <a:r>
-                        <a:rPr sz="1000" b="0">
-                          <a:solidFill>
-                            <a:schemeClr val="tx1"/>
-                          </a:solidFill>
-                        </a:rPr>
-                        <a:t>The dispatcher checks the registry before calling a tool.</a:t>
-                      </a:r>
-                    </a:p>
-                  </a:txBody>
-                  <a:tcPr marL="95250" marR="95250" marT="47625" marB="47625">
-                    <a:lnT w="12700" cap="flat" cmpd="sng" algn="ctr">
-                      <a:solidFill>
-                        <a:schemeClr val="tx1"/>
-                      </a:solidFill>
-                      <a:prstDash val="solid"/>
-                      <a:round/>
-                      <a:headEnd type="none" w="med" len="med"/>
-                      <a:tailEnd type="none" w="med" len="med"/>
-                    </a:lnT>
-                    <a:lnB w="12700" cap="flat" cmpd="sng" algn="ctr">
-                      <a:solidFill>
-                        <a:schemeClr val="tx1"/>
-                      </a:solidFill>
-                    </a:lnB>
-                    <a:noFill/>
-                  </a:tcPr>
-                </a:tc>
-                <a:extLst>
-                  <a:ext uri="{0D108BD9-81ED-4DB2-BD59-A6C34878D82A}">
-                    <a16:rowId xmlns:a16="http://schemas.microsoft.com/office/drawing/2014/main" val="10001"/>
-                  </a:ext>
-                </a:extLst>
-              </a:tr>
-              <a:tr h="0">
-                <a:tc>
-                  <a:txBody>
-                    <a:bodyPr/>
-                    <a:lstStyle/>
-                    <a:p>
-                      <a:pPr>
-                        <a:buNone/>
-                      </a:pPr>
-                      <a:r>
-                        <a:rPr sz="1000" b="1">
-                          <a:solidFill>
-                            <a:srgbClr val="28285E"/>
-                          </a:solidFill>
-                        </a:rPr>
-                        <a:t>Arguments match the tool's parameters</a:t>
-                      </a:r>
-                    </a:p>
-                  </a:txBody>
-                  <a:tcPr marL="95250" marR="95250" marT="47625" marB="47625">
-                    <a:lnT w="12700" cap="flat" cmpd="sng" algn="ctr">
-                      <a:solidFill>
-                        <a:schemeClr val="tx1"/>
-                      </a:solidFill>
-                      <a:prstDash val="solid"/>
-                      <a:round/>
-                      <a:headEnd type="none" w="med" len="med"/>
-                      <a:tailEnd type="none" w="med" len="med"/>
-                    </a:lnT>
-                    <a:lnB w="12700" cap="flat" cmpd="sng" algn="ctr">
-                      <a:solidFill>
-                        <a:schemeClr val="tx1"/>
-                      </a:solidFill>
-                    </a:lnB>
-                    <a:noFill/>
-                  </a:tcPr>
-                </a:tc>
-                <a:tc>
-                  <a:txBody>
-                    <a:bodyPr/>
-                    <a:lstStyle/>
-                    <a:p>
-                      <a:pPr>
-                        <a:buNone/>
-                      </a:pPr>
-                      <a:r>
-                        <a:rPr sz="1000" b="0">
-                          <a:solidFill>
-                            <a:schemeClr val="tx1"/>
-                          </a:solidFill>
-                        </a:rPr>
-                        <a:t>The dispatcher binds arguments and converts unambiguous type mismatches.</a:t>
-                      </a:r>
-                    </a:p>
-                  </a:txBody>
-                  <a:tcPr marL="95250" marR="95250" marT="47625" marB="47625">
-                    <a:lnT w="12700" cap="flat" cmpd="sng" algn="ctr">
-                      <a:solidFill>
-                        <a:schemeClr val="tx1"/>
-                      </a:solidFill>
-                      <a:prstDash val="solid"/>
-                      <a:round/>
-                      <a:headEnd type="none" w="med" len="med"/>
-                      <a:tailEnd type="none" w="med" len="med"/>
-                    </a:lnT>
-                    <a:lnB w="12700" cap="flat" cmpd="sng" algn="ctr">
-                      <a:solidFill>
-                        <a:schemeClr val="tx1"/>
-                      </a:solidFill>
-                    </a:lnB>
-                    <a:noFill/>
-                  </a:tcPr>
-                </a:tc>
-                <a:extLst>
-                  <a:ext uri="{0D108BD9-81ED-4DB2-BD59-A6C34878D82A}">
-                    <a16:rowId xmlns:a16="http://schemas.microsoft.com/office/drawing/2014/main" val="10002"/>
-                  </a:ext>
-                </a:extLst>
-              </a:tr>
-              <a:tr h="0">
-                <a:tc>
-                  <a:txBody>
-                    <a:bodyPr/>
-                    <a:lstStyle/>
-                    <a:p>
-                      <a:pPr>
-                        <a:buNone/>
-                      </a:pPr>
-                      <a:r>
-                        <a:rPr sz="1000" b="1">
-                          <a:solidFill>
-                            <a:srgbClr val="28285E"/>
-                          </a:solidFill>
-                        </a:rPr>
-                        <a:t>Writes stay inside the workspace</a:t>
-                      </a:r>
-                    </a:p>
-                  </a:txBody>
-                  <a:tcPr marL="95250" marR="95250" marT="47625" marB="47625">
-                    <a:lnT w="12700" cap="flat" cmpd="sng" algn="ctr">
-                      <a:solidFill>
-                        <a:schemeClr val="tx1"/>
-                      </a:solidFill>
-                      <a:prstDash val="solid"/>
-                      <a:round/>
-                      <a:headEnd type="none" w="med" len="med"/>
-                      <a:tailEnd type="none" w="med" len="med"/>
-                    </a:lnT>
-                    <a:lnB w="12700" cap="flat" cmpd="sng" algn="ctr">
-                      <a:solidFill>
-                        <a:schemeClr val="tx1"/>
-                      </a:solidFill>
-                    </a:lnB>
-                    <a:noFill/>
-                  </a:tcPr>
-                </a:tc>
-                <a:tc>
-                  <a:txBody>
-                    <a:bodyPr/>
-                    <a:lstStyle/>
-                    <a:p>
-                      <a:pPr>
-                        <a:buNone/>
-                      </a:pPr>
-                      <a:r>
-                        <a:rPr sz="1000" b="0">
-                          <a:solidFill>
-                            <a:schemeClr val="tx1"/>
-                          </a:solidFill>
-                        </a:rPr>
-                        <a:t>The edit tool, the only writer, checks paths with </a:t>
-                      </a:r>
-                      <a:r>
-                        <a:rPr sz="1000" b="0">
-                          <a:solidFill>
-                            <a:schemeClr val="tx1"/>
-                          </a:solidFill>
-                          <a:latin typeface="Maple Mono NF"/>
-                        </a:rPr>
-                        <a:t>workspace.resolve</a:t>
-                      </a:r>
-                      <a:r>
-                        <a:rPr sz="1000" b="0">
-                          <a:solidFill>
-                            <a:schemeClr val="tx1"/>
-                          </a:solidFill>
-                        </a:rPr>
-                        <a:t>.</a:t>
-                      </a:r>
-                    </a:p>
-                  </a:txBody>
-                  <a:tcPr marL="95250" marR="95250" marT="47625" marB="47625">
-                    <a:lnT w="12700" cap="flat" cmpd="sng" algn="ctr">
-                      <a:solidFill>
-                        <a:schemeClr val="tx1"/>
-                      </a:solidFill>
-                      <a:prstDash val="solid"/>
-                      <a:round/>
-                      <a:headEnd type="none" w="med" len="med"/>
-                      <a:tailEnd type="none" w="med" len="med"/>
-                    </a:lnT>
-                    <a:lnB w="12700" cap="flat" cmpd="sng" algn="ctr">
-                      <a:solidFill>
-                        <a:schemeClr val="tx1"/>
-                      </a:solidFill>
-                    </a:lnB>
-                    <a:noFill/>
-                  </a:tcPr>
-                </a:tc>
-                <a:extLst>
-                  <a:ext uri="{0D108BD9-81ED-4DB2-BD59-A6C34878D82A}">
-                    <a16:rowId xmlns:a16="http://schemas.microsoft.com/office/drawing/2014/main" val="10003"/>
-                  </a:ext>
-                </a:extLst>
-              </a:tr>
-              <a:tr h="0">
-                <a:tc>
-                  <a:txBody>
-                    <a:bodyPr/>
-                    <a:lstStyle/>
-                    <a:p>
-                      <a:pPr>
-                        <a:buNone/>
-                      </a:pPr>
-                      <a:r>
-                        <a:rPr sz="1000" b="1">
-                          <a:solidFill>
-                            <a:srgbClr val="28285E"/>
-                          </a:solidFill>
-                        </a:rPr>
-                        <a:t>Reads stay inside the workspace</a:t>
-                      </a:r>
-                    </a:p>
-                  </a:txBody>
-                  <a:tcPr marL="95250" marR="95250" marT="47625" marB="47625">
-                    <a:lnT w="12700" cap="flat" cmpd="sng" algn="ctr">
-                      <a:solidFill>
-                        <a:schemeClr val="tx1"/>
-                      </a:solidFill>
-                      <a:prstDash val="solid"/>
-                      <a:round/>
-                      <a:headEnd type="none" w="med" len="med"/>
-                      <a:tailEnd type="none" w="med" len="med"/>
-                    </a:lnT>
-                    <a:lnB w="12700" cap="flat" cmpd="sng" algn="ctr">
-                      <a:solidFill>
-                        <a:schemeClr val="tx1"/>
-                      </a:solidFill>
-                    </a:lnB>
-                    <a:noFill/>
-                  </a:tcPr>
-                </a:tc>
-                <a:tc>
-                  <a:txBody>
-                    <a:bodyPr/>
-                    <a:lstStyle/>
-                    <a:p>
-                      <a:pPr>
-                        <a:buNone/>
-                      </a:pPr>
-                      <a:r>
-                        <a:rPr sz="1000" b="0">
-                          <a:solidFill>
-                            <a:schemeClr val="tx1"/>
-                          </a:solidFill>
-                        </a:rPr>
-                        <a:t>This is unenforced. The search glob bypasses </a:t>
-                      </a:r>
-                      <a:r>
-                        <a:rPr sz="1000" b="0">
-                          <a:solidFill>
-                            <a:schemeClr val="tx1"/>
-                          </a:solidFill>
-                          <a:latin typeface="Maple Mono NF"/>
-                        </a:rPr>
-                        <a:t>workspace.resolve</a:t>
-                      </a:r>
-                      <a:r>
-                        <a:rPr sz="1000" b="0">
-                          <a:solidFill>
-                            <a:schemeClr val="tx1"/>
-                          </a:solidFill>
-                        </a:rPr>
-                        <a:t>.</a:t>
-                      </a:r>
-                    </a:p>
-                  </a:txBody>
-                  <a:tcPr marL="95250" marR="95250" marT="47625" marB="47625">
-                    <a:lnT w="12700" cap="flat" cmpd="sng" algn="ctr">
-                      <a:solidFill>
-                        <a:schemeClr val="tx1"/>
-                      </a:solidFill>
-                      <a:prstDash val="solid"/>
-                      <a:round/>
-                      <a:headEnd type="none" w="med" len="med"/>
-                      <a:tailEnd type="none" w="med" len="med"/>
-                    </a:lnT>
-                    <a:lnB w="12700" cap="flat" cmpd="sng" algn="ctr">
-                      <a:solidFill>
-                        <a:schemeClr val="tx1"/>
-                      </a:solidFill>
-                    </a:lnB>
-                    <a:noFill/>
-                  </a:tcPr>
-                </a:tc>
-                <a:extLst>
-                  <a:ext uri="{0D108BD9-81ED-4DB2-BD59-A6C34878D82A}">
-                    <a16:rowId xmlns:a16="http://schemas.microsoft.com/office/drawing/2014/main" val="10004"/>
-                  </a:ext>
-                </a:extLst>
-              </a:tr>
-              <a:tr h="0">
-                <a:tc>
-                  <a:txBody>
-                    <a:bodyPr/>
-                    <a:lstStyle/>
-                    <a:p>
-                      <a:pPr>
-                        <a:buNone/>
-                      </a:pPr>
-                      <a:r>
-                        <a:rPr sz="1000" b="1">
-                          <a:solidFill>
-                            <a:srgbClr val="28285E"/>
-                          </a:solidFill>
-                        </a:rPr>
-                        <a:t>The benchmark fixture stays unchanged</a:t>
-                      </a:r>
-                    </a:p>
-                  </a:txBody>
-                  <a:tcPr marL="95250" marR="95250" marT="47625" marB="47625">
-                    <a:lnT w="12700" cap="flat" cmpd="sng" algn="ctr">
-                      <a:solidFill>
-                        <a:schemeClr val="tx1"/>
-                      </a:solidFill>
-                      <a:prstDash val="solid"/>
-                      <a:round/>
-                      <a:headEnd type="none" w="med" len="med"/>
-                      <a:tailEnd type="none" w="med" len="med"/>
-                    </a:lnT>
-                    <a:lnB w="12700" cap="flat" cmpd="sng" algn="ctr">
-                      <a:solidFill>
-                        <a:schemeClr val="tx1"/>
-                      </a:solidFill>
-                    </a:lnB>
-                    <a:noFill/>
-                  </a:tcPr>
-                </a:tc>
-                <a:tc>
-                  <a:txBody>
-                    <a:bodyPr/>
-                    <a:lstStyle/>
-                    <a:p>
-                      <a:pPr>
-                        <a:buNone/>
-                      </a:pPr>
-                      <a:r>
-                        <a:rPr sz="1000" b="0">
-                          <a:solidFill>
-                            <a:schemeClr val="tx1"/>
-                          </a:solidFill>
-                        </a:rPr>
-                        <a:t>Tools work on a disposable copy of the fixture. The diff compares the copy with the original.</a:t>
-                      </a:r>
-                    </a:p>
-                  </a:txBody>
-                  <a:tcPr marL="95250" marR="95250" marT="47625" marB="47625">
-                    <a:lnT w="12700" cap="flat" cmpd="sng" algn="ctr">
-                      <a:solidFill>
-                        <a:schemeClr val="tx1"/>
-                      </a:solidFill>
-                      <a:prstDash val="solid"/>
-                      <a:round/>
-                      <a:headEnd type="none" w="med" len="med"/>
-                      <a:tailEnd type="none" w="med" len="med"/>
-                    </a:lnT>
-                    <a:lnB w="12700" cap="flat" cmpd="sng" algn="ctr">
-                      <a:solidFill>
-                        <a:schemeClr val="tx1"/>
-                      </a:solidFill>
-                    </a:lnB>
-                    <a:noFill/>
-                  </a:tcPr>
-                </a:tc>
-                <a:extLst>
-                  <a:ext uri="{0D108BD9-81ED-4DB2-BD59-A6C34878D82A}">
-                    <a16:rowId xmlns:a16="http://schemas.microsoft.com/office/drawing/2014/main" val="10005"/>
-                  </a:ext>
-                </a:extLst>
-              </a:tr>
-              <a:tr h="0">
-                <a:tc>
-                  <a:txBody>
-                    <a:bodyPr/>
-                    <a:lstStyle/>
-                    <a:p>
-                      <a:pPr>
-                        <a:buNone/>
-                      </a:pPr>
-                      <a:r>
-                        <a:rPr sz="1000" b="1">
-                          <a:solidFill>
-                            <a:srgbClr val="28285E"/>
-                          </a:solidFill>
-                        </a:rPr>
-                        <a:t>No model call after budget exhaustion</a:t>
-                      </a:r>
-                    </a:p>
-                  </a:txBody>
-                  <a:tcPr marL="95250" marR="95250" marT="47625" marB="47625">
-                    <a:lnT w="12700" cap="flat" cmpd="sng" algn="ctr">
-                      <a:solidFill>
-                        <a:schemeClr val="tx1"/>
-                      </a:solidFill>
-                      <a:prstDash val="solid"/>
-                      <a:round/>
-                      <a:headEnd type="none" w="med" len="med"/>
-                      <a:tailEnd type="none" w="med" len="med"/>
-                    </a:lnT>
-                    <a:lnB w="12700" cap="flat" cmpd="sng" algn="ctr">
-                      <a:solidFill>
-                        <a:schemeClr val="tx1"/>
-                      </a:solidFill>
-                    </a:lnB>
-                    <a:noFill/>
-                  </a:tcPr>
-                </a:tc>
-                <a:tc>
-                  <a:txBody>
-                    <a:bodyPr/>
-                    <a:lstStyle/>
-                    <a:p>
-                      <a:pPr>
-                        <a:buNone/>
-                      </a:pPr>
-                      <a:r>
-                        <a:rPr sz="1000" b="0">
-                          <a:solidFill>
-                            <a:schemeClr val="tx1"/>
-                          </a:solidFill>
-                        </a:rPr>
-                        <a:t>Each model node checks the budget before calling.</a:t>
-                      </a:r>
-                    </a:p>
-                  </a:txBody>
-                  <a:tcPr marL="95250" marR="95250" marT="47625" marB="47625">
-                    <a:lnT w="12700" cap="flat" cmpd="sng" algn="ctr">
-                      <a:solidFill>
-                        <a:schemeClr val="tx1"/>
-                      </a:solidFill>
-                      <a:prstDash val="solid"/>
-                      <a:round/>
-                      <a:headEnd type="none" w="med" len="med"/>
-                      <a:tailEnd type="none" w="med" len="med"/>
-                    </a:lnT>
-                    <a:lnB w="12700" cap="flat" cmpd="sng" algn="ctr">
-                      <a:solidFill>
-                        <a:schemeClr val="tx1"/>
-                      </a:solidFill>
-                    </a:lnB>
-                    <a:noFill/>
-                  </a:tcPr>
-                </a:tc>
-                <a:extLst>
-                  <a:ext uri="{0D108BD9-81ED-4DB2-BD59-A6C34878D82A}">
-                    <a16:rowId xmlns:a16="http://schemas.microsoft.com/office/drawing/2014/main" val="10006"/>
-                  </a:ext>
-                </a:extLst>
-              </a:tr>
-              <a:tr h="0">
-                <a:tc>
-                  <a:txBody>
-                    <a:bodyPr/>
-                    <a:lstStyle/>
-                    <a:p>
-                      <a:pPr>
-                        <a:buNone/>
-                      </a:pPr>
-                      <a:r>
-                        <a:rPr sz="1000" b="1">
-                          <a:solidFill>
-                            <a:srgbClr val="28285E"/>
-                          </a:solidFill>
-                        </a:rPr>
-                        <a:t>At most one plan revision per run</a:t>
-                      </a:r>
-                    </a:p>
-                  </a:txBody>
-                  <a:tcPr marL="95250" marR="95250" marT="47625" marB="47625">
-                    <a:lnT w="12700" cap="flat" cmpd="sng" algn="ctr">
-                      <a:solidFill>
-                        <a:schemeClr val="tx1"/>
-                      </a:solidFill>
-                      <a:prstDash val="solid"/>
-                      <a:round/>
-                      <a:headEnd type="none" w="med" len="med"/>
-                      <a:tailEnd type="none" w="med" len="med"/>
-                    </a:lnT>
-                    <a:lnB w="12700" cap="flat" cmpd="sng" algn="ctr">
-                      <a:solidFill>
-                        <a:schemeClr val="tx1"/>
-                      </a:solidFill>
-                    </a:lnB>
-                    <a:noFill/>
-                  </a:tcPr>
-                </a:tc>
-                <a:tc>
-                  <a:txBody>
-                    <a:bodyPr/>
-                    <a:lstStyle/>
-                    <a:p>
-                      <a:pPr>
-                        <a:buNone/>
-                      </a:pPr>
-                      <a:r>
-                        <a:rPr sz="1000" b="0">
-                          <a:solidFill>
-                            <a:schemeClr val="tx1"/>
-                          </a:solidFill>
-                        </a:rPr>
-                        <a:t>On a stall, tools requests plan revision only if </a:t>
-                      </a:r>
-                      <a:r>
-                        <a:rPr sz="1000" b="0">
-                          <a:solidFill>
-                            <a:schemeClr val="tx1"/>
-                          </a:solidFill>
-                          <a:latin typeface="Maple Mono NF"/>
-                        </a:rPr>
-                        <a:t>replanned_at</a:t>
-                      </a:r>
-                      <a:r>
-                        <a:rPr sz="1000" b="0">
-                          <a:solidFill>
-                            <a:schemeClr val="tx1"/>
-                          </a:solidFill>
-                        </a:rPr>
-                        <a:t> is unset.</a:t>
-                      </a:r>
-                    </a:p>
-                  </a:txBody>
-                  <a:tcPr marL="95250" marR="95250" marT="47625" marB="47625">
-                    <a:lnT w="12700" cap="flat" cmpd="sng" algn="ctr">
-                      <a:solidFill>
-                        <a:schemeClr val="tx1"/>
-                      </a:solidFill>
-                      <a:prstDash val="solid"/>
-                      <a:round/>
-                      <a:headEnd type="none" w="med" len="med"/>
-                      <a:tailEnd type="none" w="med" len="med"/>
-                    </a:lnT>
-                    <a:lnB w="12700" cap="flat" cmpd="sng" algn="ctr">
-                      <a:solidFill>
-                        <a:schemeClr val="tx1"/>
-                      </a:solidFill>
-                    </a:lnB>
-                    <a:noFill/>
-                  </a:tcPr>
-                </a:tc>
-                <a:extLst>
-                  <a:ext uri="{0D108BD9-81ED-4DB2-BD59-A6C34878D82A}">
-                    <a16:rowId xmlns:a16="http://schemas.microsoft.com/office/drawing/2014/main" val="10007"/>
-                  </a:ext>
-                </a:extLst>
-              </a:tr>
-            </a:tbl>
-          </a:graphicData>
-        </a:graphic>
-      </p:graphicFrame>
-      <p:sp>
-        <p:nvSpPr>
-          <p:cNvPr id="5" name="Rectangle 4"/>
-          <p:cNvSpPr/>
-          <p:nvPr/>
-        </p:nvSpPr>
-        <p:spPr>
-          <a:xfrm>
-            <a:off x="319251" y="4359776"/>
-            <a:ext cx="6014545" cy="430000"/>
-          </a:xfrm>
-          <a:prstGeom prst="rect">
-            <a:avLst/>
-          </a:prstGeom>
-          <a:solidFill>
-            <a:srgbClr val="28285E"/>
-          </a:solidFill>
-          <a:ln>
-            <a:solidFill>
-              <a:srgbClr val="28285E"/>
-            </a:solidFill>
-          </a:ln>
-          <a:effectLst/>
-        </p:spPr>
-        <p:style>
-          <a:lnRef idx="1">
-            <a:schemeClr val="accent1"/>
-          </a:lnRef>
-          <a:fillRef idx="3">
-            <a:schemeClr val="accent1"/>
-          </a:fillRef>
-          <a:effectRef idx="2">
-            <a:schemeClr val="accent1"/>
-          </a:effectRef>
-          <a:fontRef idx="minor">
-            <a:schemeClr val="lt1"/>
-          </a:fontRef>
-        </p:style>
-        <p:txBody>
-          <a:bodyPr wrap="square" lIns="137160" rIns="137160" rtlCol="0" anchor="ctr"/>
-          <a:lstStyle/>
-          <a:p>
-            <a:pPr algn="ctr"/>
-            <a:r>
-              <a:rPr sz="1200" b="1">
-                <a:solidFill>
-                  <a:schemeClr val="tx2"/>
-                </a:solidFill>
-              </a:rPr>
-              <a:t>Table 7 in the notes. The search tool can read outside the workspace because it skips the path check.</a:t>
             </a:r>
           </a:p>
         </p:txBody>
@@ -37638,7 +33365,7 @@
 </file>
 
 <file path=ppt/slides/slide67.xml><?xml version="1.0" encoding="utf-8"?>
-<p:sld xmlns:a="http://schemas.openxmlformats.org/drawingml/2006/main" xmlns:r="http://schemas.openxmlformats.org/officeDocument/2006/relationships" xmlns:p="http://schemas.openxmlformats.org/presentationml/2006/main">
+<p:sld xmlns:a="http://schemas.openxmlformats.org/drawingml/2006/main" xmlns:r="http://schemas.openxmlformats.org/officeDocument/2006/relationships" xmlns:p="http://schemas.openxmlformats.org/presentationml/2006/main" show="0">
   <p:cSld>
     <p:spTree>
       <p:nvGrpSpPr>
@@ -38289,406 +34016,8 @@
 </p:sld>
 </file>
 
-<file path=ppt/slides/slide68.xml><?xml version="1.0" encoding="utf-8"?>
-<p:sld xmlns:a="http://schemas.openxmlformats.org/drawingml/2006/main" xmlns:r="http://schemas.openxmlformats.org/officeDocument/2006/relationships" xmlns:p="http://schemas.openxmlformats.org/presentationml/2006/main">
-  <p:cSld>
-    <p:spTree>
-      <p:nvGrpSpPr>
-        <p:cNvPr id="1" name=""/>
-        <p:cNvGrpSpPr/>
-        <p:nvPr/>
-      </p:nvGrpSpPr>
-      <p:grpSpPr>
-        <a:xfrm>
-          <a:off x="0" y="0"/>
-          <a:ext cx="0" cy="0"/>
-          <a:chOff x="0" y="0"/>
-          <a:chExt cx="0" cy="0"/>
-        </a:xfrm>
-      </p:grpSpPr>
-      <p:sp>
-        <p:nvSpPr>
-          <p:cNvPr id="2" name="Title 1"/>
-          <p:cNvSpPr>
-            <a:spLocks noGrp="1"/>
-          </p:cNvSpPr>
-          <p:nvPr>
-            <p:ph type="title"/>
-          </p:nvPr>
-        </p:nvSpPr>
-        <p:spPr/>
-        <p:txBody>
-          <a:bodyPr/>
-          <a:lstStyle/>
-          <a:p>
-            <a:r>
-              <a:t>A refused read and an unchecked search</a:t>
-            </a:r>
-          </a:p>
-        </p:txBody>
-      </p:sp>
-      <p:sp>
-        <p:nvSpPr>
-          <p:cNvPr id="3" name="Content Placeholder 2"/>
-          <p:cNvSpPr>
-            <a:spLocks noGrp="1"/>
-          </p:cNvSpPr>
-          <p:nvPr>
-            <p:ph idx="1"/>
-          </p:nvPr>
-        </p:nvSpPr>
-        <p:spPr>
-          <a:xfrm>
-            <a:off x="319251" y="700000"/>
-            <a:ext cx="6014545" cy="2440280"/>
-          </a:xfrm>
-        </p:spPr>
-        <p:txBody>
-          <a:bodyPr wrap="square" anchor="ctr">
-            <a:normAutofit fontScale="92500" lnSpcReduction="10000"/>
-          </a:bodyPr>
-          <a:lstStyle/>
-          <a:p>
-            <a:pPr marL="0" indent="0">
-              <a:buNone/>
-            </a:pPr>
-            <a:r>
-              <a:rPr sz="1400" b="1">
-                <a:solidFill>
-                  <a:srgbClr val="28285E"/>
-                </a:solidFill>
-              </a:rPr>
-              <a:t>The recorded runs contain no refusals. This demonstration sends requests directly to the dispatcher.</a:t>
-            </a:r>
-          </a:p>
-          <a:p>
-            <a:pPr marL="400050" indent="-285750">
-              <a:spcBef>
-                <a:spcPts val="600"/>
-              </a:spcBef>
-              <a:spcAft>
-                <a:spcPts val="600"/>
-              </a:spcAft>
-              <a:buClr>
-                <a:srgbClr val="28285E"/>
-              </a:buClr>
-              <a:buSzPts val="1260"/>
-              <a:buFont typeface="+mn-lt"/>
-              <a:buChar char="●"/>
-            </a:pPr>
-            <a:r>
-              <a:rPr sz="1400" b="0">
-                <a:solidFill>
-                  <a:schemeClr val="tx1"/>
-                </a:solidFill>
-                <a:latin typeface="Maple Mono NF"/>
-              </a:rPr>
-              <a:t>read_file</a:t>
-            </a:r>
-            <a:r>
-              <a:rPr sz="1400" b="0">
-                <a:solidFill>
-                  <a:schemeClr val="tx1"/>
-                </a:solidFill>
-              </a:rPr>
-              <a:t> refuses </a:t>
-            </a:r>
-            <a:r>
-              <a:rPr sz="1400" b="0">
-                <a:solidFill>
-                  <a:schemeClr val="tx1"/>
-                </a:solidFill>
-                <a:latin typeface="Maple Mono NF"/>
-              </a:rPr>
-              <a:t>../../etc/passwd</a:t>
-            </a:r>
-            <a:r>
-              <a:rPr sz="1400" b="0">
-                <a:solidFill>
-                  <a:schemeClr val="tx1"/>
-                </a:solidFill>
-              </a:rPr>
-              <a:t>. The dispatcher returns an observation with </a:t>
-            </a:r>
-            <a:r>
-              <a:rPr sz="1400" b="0">
-                <a:solidFill>
-                  <a:schemeClr val="tx1"/>
-                </a:solidFill>
-                <a:latin typeface="Maple Mono NF"/>
-              </a:rPr>
-              <a:t>ok=false</a:t>
-            </a:r>
-            <a:r>
-              <a:rPr sz="1400" b="0">
-                <a:solidFill>
-                  <a:schemeClr val="tx1"/>
-                </a:solidFill>
-              </a:rPr>
-              <a:t> and the reason.</a:t>
-            </a:r>
-          </a:p>
-          <a:p>
-            <a:pPr marL="400050" indent="-285750">
-              <a:spcBef>
-                <a:spcPts val="600"/>
-              </a:spcBef>
-              <a:spcAft>
-                <a:spcPts val="600"/>
-              </a:spcAft>
-              <a:buClr>
-                <a:srgbClr val="28285E"/>
-              </a:buClr>
-              <a:buSzPts val="1260"/>
-              <a:buFont typeface="+mn-lt"/>
-              <a:buChar char="●"/>
-            </a:pPr>
-            <a:r>
-              <a:rPr sz="1400" b="1">
-                <a:solidFill>
-                  <a:schemeClr val="tx1"/>
-                </a:solidFill>
-              </a:rPr>
-              <a:t>search</a:t>
-            </a:r>
-            <a:r>
-              <a:rPr sz="1400" b="0">
-                <a:solidFill>
-                  <a:schemeClr val="tx1"/>
-                </a:solidFill>
-              </a:rPr>
-              <a:t> with </a:t>
-            </a:r>
-            <a:r>
-              <a:rPr sz="1400" b="0">
-                <a:solidFill>
-                  <a:schemeClr val="tx1"/>
-                </a:solidFill>
-                <a:latin typeface="Maple Mono NF"/>
-              </a:rPr>
-              <a:t>../*-withheld/testcode/*.py</a:t>
-            </a:r>
-            <a:r>
-              <a:rPr sz="1400" b="0">
-                <a:solidFill>
-                  <a:schemeClr val="tx1"/>
-                </a:solidFill>
-              </a:rPr>
-              <a:t> reads benchmark files in a sibling directory outside the workspace and reports </a:t>
-            </a:r>
-            <a:r>
-              <a:rPr sz="1400" b="0">
-                <a:solidFill>
-                  <a:schemeClr val="tx1"/>
-                </a:solidFill>
-                <a:latin typeface="Maple Mono NF"/>
-              </a:rPr>
-              <a:t>ok=true</a:t>
-            </a:r>
-            <a:r>
-              <a:rPr sz="1400" b="0">
-                <a:solidFill>
-                  <a:schemeClr val="tx1"/>
-                </a:solidFill>
-              </a:rPr>
-              <a:t>.</a:t>
-            </a:r>
-          </a:p>
-          <a:p>
-            <a:pPr marL="400050" indent="-285750">
-              <a:spcBef>
-                <a:spcPts val="600"/>
-              </a:spcBef>
-              <a:spcAft>
-                <a:spcPts val="600"/>
-              </a:spcAft>
-              <a:buClr>
-                <a:srgbClr val="28285E"/>
-              </a:buClr>
-              <a:buSzPts val="1260"/>
-              <a:buFont typeface="+mn-lt"/>
-              <a:buChar char="●"/>
-            </a:pPr>
-            <a:r>
-              <a:rPr sz="1400" b="0">
-                <a:solidFill>
-                  <a:schemeClr val="tx1"/>
-                </a:solidFill>
-                <a:latin typeface="Maple Mono NF"/>
-              </a:rPr>
-              <a:t>read_file</a:t>
-            </a:r>
-            <a:r>
-              <a:rPr sz="1400" b="1">
-                <a:solidFill>
-                  <a:schemeClr val="tx1"/>
-                </a:solidFill>
-              </a:rPr>
-              <a:t> and edit</a:t>
-            </a:r>
-            <a:r>
-              <a:rPr sz="1400" b="0">
-                <a:solidFill>
-                  <a:schemeClr val="tx1"/>
-                </a:solidFill>
-              </a:rPr>
-              <a:t> check paths with </a:t>
-            </a:r>
-            <a:r>
-              <a:rPr sz="1400" b="0">
-                <a:solidFill>
-                  <a:schemeClr val="tx1"/>
-                </a:solidFill>
-                <a:latin typeface="Maple Mono NF"/>
-              </a:rPr>
-              <a:t>workspace.resolve</a:t>
-            </a:r>
-            <a:r>
-              <a:rPr sz="1400" b="0">
-                <a:solidFill>
-                  <a:schemeClr val="tx1"/>
-                </a:solidFill>
-              </a:rPr>
-              <a:t>. The search tool uses its glob without this check.</a:t>
-            </a:r>
-          </a:p>
-        </p:txBody>
-      </p:sp>
-      <p:sp>
-        <p:nvSpPr>
-          <p:cNvPr id="4" name="Rectangle 3"/>
-          <p:cNvSpPr/>
-          <p:nvPr/>
-        </p:nvSpPr>
-        <p:spPr>
-          <a:xfrm>
-            <a:off x="319251" y="3330280"/>
-            <a:ext cx="6014545" cy="610801"/>
-          </a:xfrm>
-          <a:prstGeom prst="rect">
-            <a:avLst/>
-          </a:prstGeom>
-          <a:solidFill>
-            <a:srgbClr val="28285E"/>
-          </a:solidFill>
-          <a:ln>
-            <a:solidFill>
-              <a:srgbClr val="28285E"/>
-            </a:solidFill>
-          </a:ln>
-          <a:effectLst/>
-        </p:spPr>
-        <p:style>
-          <a:lnRef idx="1">
-            <a:schemeClr val="accent1"/>
-          </a:lnRef>
-          <a:fillRef idx="3">
-            <a:schemeClr val="accent1"/>
-          </a:fillRef>
-          <a:effectRef idx="2">
-            <a:schemeClr val="accent1"/>
-          </a:effectRef>
-          <a:fontRef idx="minor">
-            <a:schemeClr val="lt1"/>
-          </a:fontRef>
-        </p:style>
-        <p:txBody>
-          <a:bodyPr wrap="square" lIns="182880" rIns="182880" rtlCol="0" anchor="ctr"/>
-          <a:lstStyle/>
-          <a:p>
-            <a:pPr algn="ctr"/>
-            <a:r>
-              <a:rPr sz="1400" b="0">
-                <a:solidFill>
-                  <a:schemeClr val="tx2"/>
-                </a:solidFill>
-              </a:rPr>
-              <a:t>The repair is to check every file matched by search with </a:t>
-            </a:r>
-            <a:r>
-              <a:rPr sz="1400" b="0">
-                <a:solidFill>
-                  <a:schemeClr val="tx2"/>
-                </a:solidFill>
-                <a:latin typeface="Maple Mono NF"/>
-              </a:rPr>
-              <a:t>workspace.resolve</a:t>
-            </a:r>
-            <a:r>
-              <a:rPr sz="1400" b="0">
-                <a:solidFill>
-                  <a:schemeClr val="tx2"/>
-                </a:solidFill>
-              </a:rPr>
-              <a:t> before opening it.</a:t>
-            </a:r>
-          </a:p>
-        </p:txBody>
-      </p:sp>
-      <p:sp>
-        <p:nvSpPr>
-          <p:cNvPr id="5" name="Rectangle 4"/>
-          <p:cNvSpPr/>
-          <p:nvPr/>
-        </p:nvSpPr>
-        <p:spPr>
-          <a:xfrm>
-            <a:off x="319251" y="4131081"/>
-            <a:ext cx="6014545" cy="562963"/>
-          </a:xfrm>
-          <a:prstGeom prst="rect">
-            <a:avLst/>
-          </a:prstGeom>
-          <a:solidFill>
-            <a:srgbClr val="CACAE5"/>
-          </a:solidFill>
-          <a:ln>
-            <a:solidFill>
-              <a:srgbClr val="28285E"/>
-            </a:solidFill>
-          </a:ln>
-          <a:effectLst/>
-        </p:spPr>
-        <p:style>
-          <a:lnRef idx="1">
-            <a:schemeClr val="accent1"/>
-          </a:lnRef>
-          <a:fillRef idx="3">
-            <a:schemeClr val="accent1"/>
-          </a:fillRef>
-          <a:effectRef idx="2">
-            <a:schemeClr val="accent1"/>
-          </a:effectRef>
-          <a:fontRef idx="minor">
-            <a:schemeClr val="lt1"/>
-          </a:fontRef>
-        </p:style>
-        <p:txBody>
-          <a:bodyPr wrap="square" lIns="137160" rIns="137160" rtlCol="0" anchor="ctr"/>
-          <a:lstStyle/>
-          <a:p>
-            <a:pPr algn="ctr"/>
-            <a:r>
-              <a:rPr sz="1200" b="1">
-                <a:solidFill>
-                  <a:srgbClr val="28285E"/>
-                </a:solidFill>
-              </a:rPr>
-              <a:t>All writes pass through the path check. The search tool can still read files outside the workspace.</a:t>
-            </a:r>
-          </a:p>
-        </p:txBody>
-      </p:sp>
-    </p:spTree>
-  </p:cSld>
-  <p:clrMapOvr>
-    <a:masterClrMapping/>
-  </p:clrMapOvr>
-</p:sld>
-</file>
-
 <file path=ppt/slides/slide69.xml><?xml version="1.0" encoding="utf-8"?>
-<p:sld xmlns:a="http://schemas.openxmlformats.org/drawingml/2006/main" xmlns:r="http://schemas.openxmlformats.org/officeDocument/2006/relationships" xmlns:p="http://schemas.openxmlformats.org/presentationml/2006/main">
+<p:sld xmlns:a="http://schemas.openxmlformats.org/drawingml/2006/main" xmlns:r="http://schemas.openxmlformats.org/officeDocument/2006/relationships" xmlns:p="http://schemas.openxmlformats.org/presentationml/2006/main" show="0">
   <p:cSld>
     <p:spTree>
       <p:nvGrpSpPr>
@@ -38914,7 +34243,7 @@
 </file>
 
 <file path=ppt/slides/slide70.xml><?xml version="1.0" encoding="utf-8"?>
-<p:sld xmlns:a="http://schemas.openxmlformats.org/drawingml/2006/main" xmlns:r="http://schemas.openxmlformats.org/officeDocument/2006/relationships" xmlns:p="http://schemas.openxmlformats.org/presentationml/2006/main">
+<p:sld xmlns:a="http://schemas.openxmlformats.org/drawingml/2006/main" xmlns:r="http://schemas.openxmlformats.org/officeDocument/2006/relationships" xmlns:p="http://schemas.openxmlformats.org/presentationml/2006/main" show="0">
   <p:cSld>
     <p:spTree>
       <p:nvGrpSpPr>
@@ -39074,7 +34403,7 @@
 </file>
 
 <file path=ppt/slides/slide71.xml><?xml version="1.0" encoding="utf-8"?>
-<p:sld xmlns:a="http://schemas.openxmlformats.org/drawingml/2006/main" xmlns:r="http://schemas.openxmlformats.org/officeDocument/2006/relationships" xmlns:p="http://schemas.openxmlformats.org/presentationml/2006/main">
+<p:sld xmlns:a="http://schemas.openxmlformats.org/drawingml/2006/main" xmlns:r="http://schemas.openxmlformats.org/officeDocument/2006/relationships" xmlns:p="http://schemas.openxmlformats.org/presentationml/2006/main" show="0">
   <p:cSld>
     <p:spTree>
       <p:nvGrpSpPr>
@@ -39546,7 +34875,7 @@
 </file>
 
 <file path=ppt/slides/slide72.xml><?xml version="1.0" encoding="utf-8"?>
-<p:sld xmlns:a="http://schemas.openxmlformats.org/drawingml/2006/main" xmlns:r="http://schemas.openxmlformats.org/officeDocument/2006/relationships" xmlns:p="http://schemas.openxmlformats.org/presentationml/2006/main">
+<p:sld xmlns:a="http://schemas.openxmlformats.org/drawingml/2006/main" xmlns:r="http://schemas.openxmlformats.org/officeDocument/2006/relationships" xmlns:p="http://schemas.openxmlformats.org/presentationml/2006/main" show="0">
   <p:cSld>
     <p:spTree>
       <p:nvGrpSpPr>
@@ -39830,7 +35159,7 @@
 </file>
 
 <file path=ppt/slides/slide73.xml><?xml version="1.0" encoding="utf-8"?>
-<p:sld xmlns:a="http://schemas.openxmlformats.org/drawingml/2006/main" xmlns:r="http://schemas.openxmlformats.org/officeDocument/2006/relationships" xmlns:p="http://schemas.openxmlformats.org/presentationml/2006/main">
+<p:sld xmlns:a="http://schemas.openxmlformats.org/drawingml/2006/main" xmlns:r="http://schemas.openxmlformats.org/officeDocument/2006/relationships" xmlns:p="http://schemas.openxmlformats.org/presentationml/2006/main" show="0">
   <p:cSld>
     <p:spTree>
       <p:nvGrpSpPr>
@@ -40114,7 +35443,7 @@
 </file>
 
 <file path=ppt/slides/slide74.xml><?xml version="1.0" encoding="utf-8"?>
-<p:sld xmlns:a="http://schemas.openxmlformats.org/drawingml/2006/main" xmlns:r="http://schemas.openxmlformats.org/officeDocument/2006/relationships" xmlns:p="http://schemas.openxmlformats.org/presentationml/2006/main">
+<p:sld xmlns:a="http://schemas.openxmlformats.org/drawingml/2006/main" xmlns:r="http://schemas.openxmlformats.org/officeDocument/2006/relationships" xmlns:p="http://schemas.openxmlformats.org/presentationml/2006/main" show="0">
   <p:cSld>
     <p:spTree>
       <p:nvGrpSpPr>
@@ -40613,7 +35942,7 @@
 </file>
 
 <file path=ppt/slides/slide75.xml><?xml version="1.0" encoding="utf-8"?>
-<p:sld xmlns:a="http://schemas.openxmlformats.org/drawingml/2006/main" xmlns:r="http://schemas.openxmlformats.org/officeDocument/2006/relationships" xmlns:p="http://schemas.openxmlformats.org/presentationml/2006/main">
+<p:sld xmlns:a="http://schemas.openxmlformats.org/drawingml/2006/main" xmlns:r="http://schemas.openxmlformats.org/officeDocument/2006/relationships" xmlns:p="http://schemas.openxmlformats.org/presentationml/2006/main" show="0">
   <p:cSld>
     <p:spTree>
       <p:nvGrpSpPr>
@@ -40899,7 +36228,7 @@
 </file>
 
 <file path=ppt/slides/slide76.xml><?xml version="1.0" encoding="utf-8"?>
-<p:sld xmlns:a="http://schemas.openxmlformats.org/drawingml/2006/main" xmlns:r="http://schemas.openxmlformats.org/officeDocument/2006/relationships" xmlns:p="http://schemas.openxmlformats.org/presentationml/2006/main">
+<p:sld xmlns:a="http://schemas.openxmlformats.org/drawingml/2006/main" xmlns:r="http://schemas.openxmlformats.org/officeDocument/2006/relationships" xmlns:p="http://schemas.openxmlformats.org/presentationml/2006/main" show="0">
   <p:cSld>
     <p:spTree>
       <p:nvGrpSpPr>
@@ -41185,7 +36514,7 @@
 </file>
 
 <file path=ppt/slides/slide77.xml><?xml version="1.0" encoding="utf-8"?>
-<p:sld xmlns:a="http://schemas.openxmlformats.org/drawingml/2006/main" xmlns:r="http://schemas.openxmlformats.org/officeDocument/2006/relationships" xmlns:p="http://schemas.openxmlformats.org/presentationml/2006/main">
+<p:sld xmlns:a="http://schemas.openxmlformats.org/drawingml/2006/main" xmlns:r="http://schemas.openxmlformats.org/officeDocument/2006/relationships" xmlns:p="http://schemas.openxmlformats.org/presentationml/2006/main" show="0">
   <p:cSld>
     <p:spTree>
       <p:nvGrpSpPr>
@@ -41471,7 +36800,7 @@
 </file>
 
 <file path=ppt/slides/slide78.xml><?xml version="1.0" encoding="utf-8"?>
-<p:sld xmlns:a="http://schemas.openxmlformats.org/drawingml/2006/main" xmlns:r="http://schemas.openxmlformats.org/officeDocument/2006/relationships" xmlns:p="http://schemas.openxmlformats.org/presentationml/2006/main">
+<p:sld xmlns:a="http://schemas.openxmlformats.org/drawingml/2006/main" xmlns:r="http://schemas.openxmlformats.org/officeDocument/2006/relationships" xmlns:p="http://schemas.openxmlformats.org/presentationml/2006/main" show="0">
   <p:cSld>
     <p:spTree>
       <p:nvGrpSpPr>
@@ -41757,7 +37086,7 @@
 </file>
 
 <file path=ppt/slides/slide79.xml><?xml version="1.0" encoding="utf-8"?>
-<p:sld xmlns:a="http://schemas.openxmlformats.org/drawingml/2006/main" xmlns:r="http://schemas.openxmlformats.org/officeDocument/2006/relationships" xmlns:p="http://schemas.openxmlformats.org/presentationml/2006/main">
+<p:sld xmlns:a="http://schemas.openxmlformats.org/drawingml/2006/main" xmlns:r="http://schemas.openxmlformats.org/officeDocument/2006/relationships" xmlns:p="http://schemas.openxmlformats.org/presentationml/2006/main" show="0">
   <p:cSld>
     <p:spTree>
       <p:nvGrpSpPr>
@@ -42593,7 +37922,7 @@
 </file>
 
 <file path=ppt/slides/slide80.xml><?xml version="1.0" encoding="utf-8"?>
-<p:sld xmlns:a="http://schemas.openxmlformats.org/drawingml/2006/main" xmlns:r="http://schemas.openxmlformats.org/officeDocument/2006/relationships" xmlns:p="http://schemas.openxmlformats.org/presentationml/2006/main">
+<p:sld xmlns:a="http://schemas.openxmlformats.org/drawingml/2006/main" xmlns:r="http://schemas.openxmlformats.org/officeDocument/2006/relationships" xmlns:p="http://schemas.openxmlformats.org/presentationml/2006/main" show="0">
   <p:cSld>
     <p:spTree>
       <p:nvGrpSpPr>
@@ -42879,7 +38208,7 @@
 </file>
 
 <file path=ppt/slides/slide81.xml><?xml version="1.0" encoding="utf-8"?>
-<p:sld xmlns:a="http://schemas.openxmlformats.org/drawingml/2006/main" xmlns:r="http://schemas.openxmlformats.org/officeDocument/2006/relationships" xmlns:p="http://schemas.openxmlformats.org/presentationml/2006/main">
+<p:sld xmlns:a="http://schemas.openxmlformats.org/drawingml/2006/main" xmlns:r="http://schemas.openxmlformats.org/officeDocument/2006/relationships" xmlns:p="http://schemas.openxmlformats.org/presentationml/2006/main" show="0">
   <p:cSld>
     <p:spTree>
       <p:nvGrpSpPr>
@@ -43163,7 +38492,7 @@
 </file>
 
 <file path=ppt/slides/slide82.xml><?xml version="1.0" encoding="utf-8"?>
-<p:sld xmlns:a="http://schemas.openxmlformats.org/drawingml/2006/main" xmlns:r="http://schemas.openxmlformats.org/officeDocument/2006/relationships" xmlns:p="http://schemas.openxmlformats.org/presentationml/2006/main">
+<p:sld xmlns:a="http://schemas.openxmlformats.org/drawingml/2006/main" xmlns:r="http://schemas.openxmlformats.org/officeDocument/2006/relationships" xmlns:p="http://schemas.openxmlformats.org/presentationml/2006/main" show="0">
   <p:cSld>
     <p:spTree>
       <p:nvGrpSpPr>
@@ -43449,7 +38778,7 @@
 </file>
 
 <file path=ppt/slides/slide83.xml><?xml version="1.0" encoding="utf-8"?>
-<p:sld xmlns:a="http://schemas.openxmlformats.org/drawingml/2006/main" xmlns:r="http://schemas.openxmlformats.org/officeDocument/2006/relationships" xmlns:p="http://schemas.openxmlformats.org/presentationml/2006/main">
+<p:sld xmlns:a="http://schemas.openxmlformats.org/drawingml/2006/main" xmlns:r="http://schemas.openxmlformats.org/officeDocument/2006/relationships" xmlns:p="http://schemas.openxmlformats.org/presentationml/2006/main" show="0">
   <p:cSld>
     <p:spTree>
       <p:nvGrpSpPr>
@@ -44753,7 +40082,7 @@
 </file>
 
 <file path=ppt/slides/slide84.xml><?xml version="1.0" encoding="utf-8"?>
-<p:sld xmlns:a="http://schemas.openxmlformats.org/drawingml/2006/main" xmlns:r="http://schemas.openxmlformats.org/officeDocument/2006/relationships" xmlns:p="http://schemas.openxmlformats.org/presentationml/2006/main">
+<p:sld xmlns:a="http://schemas.openxmlformats.org/drawingml/2006/main" xmlns:r="http://schemas.openxmlformats.org/officeDocument/2006/relationships" xmlns:p="http://schemas.openxmlformats.org/presentationml/2006/main" show="0">
   <p:cSld>
     <p:spTree>
       <p:nvGrpSpPr>
@@ -44877,7 +40206,7 @@
 </file>
 
 <file path=ppt/slides/slide85.xml><?xml version="1.0" encoding="utf-8"?>
-<p:sld xmlns:a="http://schemas.openxmlformats.org/drawingml/2006/main" xmlns:r="http://schemas.openxmlformats.org/officeDocument/2006/relationships" xmlns:p="http://schemas.openxmlformats.org/presentationml/2006/main">
+<p:sld xmlns:a="http://schemas.openxmlformats.org/drawingml/2006/main" xmlns:r="http://schemas.openxmlformats.org/officeDocument/2006/relationships" xmlns:p="http://schemas.openxmlformats.org/presentationml/2006/main" show="0">
   <p:cSld>
     <p:spTree>
       <p:nvGrpSpPr>
@@ -45161,7 +40490,7 @@
 </file>
 
 <file path=ppt/slides/slide86.xml><?xml version="1.0" encoding="utf-8"?>
-<p:sld xmlns:a="http://schemas.openxmlformats.org/drawingml/2006/main" xmlns:r="http://schemas.openxmlformats.org/officeDocument/2006/relationships" xmlns:p="http://schemas.openxmlformats.org/presentationml/2006/main">
+<p:sld xmlns:a="http://schemas.openxmlformats.org/drawingml/2006/main" xmlns:r="http://schemas.openxmlformats.org/officeDocument/2006/relationships" xmlns:p="http://schemas.openxmlformats.org/presentationml/2006/main" show="0">
   <p:cSld>
     <p:spTree>
       <p:nvGrpSpPr>
@@ -45445,7 +40774,7 @@
 </file>
 
 <file path=ppt/slides/slide87.xml><?xml version="1.0" encoding="utf-8"?>
-<p:sld xmlns:a="http://schemas.openxmlformats.org/drawingml/2006/main" xmlns:r="http://schemas.openxmlformats.org/officeDocument/2006/relationships" xmlns:p="http://schemas.openxmlformats.org/presentationml/2006/main">
+<p:sld xmlns:a="http://schemas.openxmlformats.org/drawingml/2006/main" xmlns:r="http://schemas.openxmlformats.org/officeDocument/2006/relationships" xmlns:p="http://schemas.openxmlformats.org/presentationml/2006/main" show="0">
   <p:cSld>
     <p:spTree>
       <p:nvGrpSpPr>
@@ -45731,7 +41060,7 @@
 </file>
 
 <file path=ppt/slides/slide88.xml><?xml version="1.0" encoding="utf-8"?>
-<p:sld xmlns:a="http://schemas.openxmlformats.org/drawingml/2006/main" xmlns:r="http://schemas.openxmlformats.org/officeDocument/2006/relationships" xmlns:p="http://schemas.openxmlformats.org/presentationml/2006/main">
+<p:sld xmlns:a="http://schemas.openxmlformats.org/drawingml/2006/main" xmlns:r="http://schemas.openxmlformats.org/officeDocument/2006/relationships" xmlns:p="http://schemas.openxmlformats.org/presentationml/2006/main" show="0">
   <p:cSld>
     <p:spTree>
       <p:nvGrpSpPr>
@@ -46017,7 +41346,7 @@
 </file>
 
 <file path=ppt/slides/slide89.xml><?xml version="1.0" encoding="utf-8"?>
-<p:sld xmlns:a="http://schemas.openxmlformats.org/drawingml/2006/main" xmlns:r="http://schemas.openxmlformats.org/officeDocument/2006/relationships" xmlns:p="http://schemas.openxmlformats.org/presentationml/2006/main">
+<p:sld xmlns:a="http://schemas.openxmlformats.org/drawingml/2006/main" xmlns:r="http://schemas.openxmlformats.org/officeDocument/2006/relationships" xmlns:p="http://schemas.openxmlformats.org/presentationml/2006/main" show="0">
   <p:cSld>
     <p:spTree>
       <p:nvGrpSpPr>
@@ -46903,7 +42232,7 @@
 </file>
 
 <file path=ppt/slides/slide90.xml><?xml version="1.0" encoding="utf-8"?>
-<p:sld xmlns:a="http://schemas.openxmlformats.org/drawingml/2006/main" xmlns:r="http://schemas.openxmlformats.org/officeDocument/2006/relationships" xmlns:p="http://schemas.openxmlformats.org/presentationml/2006/main">
+<p:sld xmlns:a="http://schemas.openxmlformats.org/drawingml/2006/main" xmlns:r="http://schemas.openxmlformats.org/officeDocument/2006/relationships" xmlns:p="http://schemas.openxmlformats.org/presentationml/2006/main" show="0">
   <p:cSld>
     <p:spTree>
       <p:nvGrpSpPr>
@@ -47803,7 +43132,7 @@
 </file>
 
 <file path=ppt/slides/slide91.xml><?xml version="1.0" encoding="utf-8"?>
-<p:sld xmlns:a="http://schemas.openxmlformats.org/drawingml/2006/main" xmlns:r="http://schemas.openxmlformats.org/officeDocument/2006/relationships" xmlns:p="http://schemas.openxmlformats.org/presentationml/2006/main">
+<p:sld xmlns:a="http://schemas.openxmlformats.org/drawingml/2006/main" xmlns:r="http://schemas.openxmlformats.org/officeDocument/2006/relationships" xmlns:p="http://schemas.openxmlformats.org/presentationml/2006/main" show="0">
   <p:cSld>
     <p:spTree>
       <p:nvGrpSpPr>
@@ -48488,7 +43817,7 @@
 </file>
 
 <file path=ppt/slides/slide92.xml><?xml version="1.0" encoding="utf-8"?>
-<p:sld xmlns:a="http://schemas.openxmlformats.org/drawingml/2006/main" xmlns:r="http://schemas.openxmlformats.org/officeDocument/2006/relationships" xmlns:p="http://schemas.openxmlformats.org/presentationml/2006/main">
+<p:sld xmlns:a="http://schemas.openxmlformats.org/drawingml/2006/main" xmlns:r="http://schemas.openxmlformats.org/officeDocument/2006/relationships" xmlns:p="http://schemas.openxmlformats.org/presentationml/2006/main" show="0">
   <p:cSld>
     <p:spTree>
       <p:nvGrpSpPr>
@@ -49196,7 +44525,7 @@
 </file>
 
 <file path=ppt/slides/slide93.xml><?xml version="1.0" encoding="utf-8"?>
-<p:sld xmlns:a="http://schemas.openxmlformats.org/drawingml/2006/main" xmlns:r="http://schemas.openxmlformats.org/officeDocument/2006/relationships" xmlns:p="http://schemas.openxmlformats.org/presentationml/2006/main">
+<p:sld xmlns:a="http://schemas.openxmlformats.org/drawingml/2006/main" xmlns:r="http://schemas.openxmlformats.org/officeDocument/2006/relationships" xmlns:p="http://schemas.openxmlformats.org/presentationml/2006/main" show="0">
   <p:cSld>
     <p:spTree>
       <p:nvGrpSpPr>
@@ -50022,7 +45351,7 @@
 </file>
 
 <file path=ppt/slides/slide94.xml><?xml version="1.0" encoding="utf-8"?>
-<p:sld xmlns:a="http://schemas.openxmlformats.org/drawingml/2006/main" xmlns:r="http://schemas.openxmlformats.org/officeDocument/2006/relationships" xmlns:p="http://schemas.openxmlformats.org/presentationml/2006/main">
+<p:sld xmlns:a="http://schemas.openxmlformats.org/drawingml/2006/main" xmlns:r="http://schemas.openxmlformats.org/officeDocument/2006/relationships" xmlns:p="http://schemas.openxmlformats.org/presentationml/2006/main" show="0">
   <p:cSld>
     <p:spTree>
       <p:nvGrpSpPr>
